--- a/exports/pptx/lessons/middle-module-14-magic-squares/day-07-narayana.pptx
+++ b/exports/pptx/lessons/middle-module-14-magic-squares/day-07-narayana.pptx
@@ -4314,8 +4314,8 @@
         </p:nvSpPr>
         <p:spPr>
           <a:xfrm>
-            <a:off x="406301" y="3209330"/>
-            <a:ext cx="8498026" cy="426541"/>
+            <a:off x="406301" y="1254323"/>
+            <a:ext cx="8498026" cy="213271"/>
           </a:xfrm>
           <a:prstGeom prst="rect">
             <a:avLst/>
@@ -4348,7 +4348,7 @@
                 <a:ea typeface="Arial" pitchFamily="34" charset="-122"/>
                 <a:cs typeface="Arial" pitchFamily="34" charset="-120"/>
               </a:rPr>
-              <a:t>"Nārāyaṇa wrote in the 14th century — relatively 'late' in the medieval Indian mathematical tradition, but he produced one of the most comprehensive single works."</a:t>
+              <a:t>Each row: Period · Indian mathematics.</a:t>
             </a:r>
             <a:endParaRPr lang="en-US" sz="1200" dirty="0"/>
           </a:p>
@@ -4362,8 +4362,8 @@
         </p:nvSpPr>
         <p:spPr>
           <a:xfrm>
-            <a:off x="634901" y="3724721"/>
-            <a:ext cx="8102798" cy="281880"/>
+            <a:off x="634901" y="1556445"/>
+            <a:ext cx="8102798" cy="1500783"/>
           </a:xfrm>
           <a:prstGeom prst="rect">
             <a:avLst/>
@@ -4385,6 +4385,17 @@
               <a:buSzPct val="100000"/>
               <a:buChar char="•"/>
             </a:pPr>
+            <a:r>
+              <a:rPr lang="en-US" sz="1200" b="1" dirty="0">
+                <a:solidFill>
+                  <a:srgbClr val="1C2833"/>
+                </a:solidFill>
+                <a:latin typeface="Arial" pitchFamily="34" charset="0"/>
+                <a:ea typeface="Arial" pitchFamily="34" charset="-122"/>
+                <a:cs typeface="Arial" pitchFamily="34" charset="-120"/>
+              </a:rPr>
+              <a:t>~500 BCE</a:t>
+            </a:r>
             <a:pPr algn="l" indent="0" marL="0">
               <a:lnSpc>
                 <a:spcPts val="1620"/>
@@ -4395,6 +4406,26 @@
               <a:buNone/>
             </a:pPr>
             <a:r>
+              <a:rPr lang="en-US" sz="1200" dirty="0">
+                <a:solidFill>
+                  <a:srgbClr val="1C2833"/>
+                </a:solidFill>
+                <a:latin typeface="Arial" pitchFamily="34" charset="0"/>
+                <a:ea typeface="Arial" pitchFamily="34" charset="-122"/>
+                <a:cs typeface="Arial" pitchFamily="34" charset="-120"/>
+              </a:rPr>
+              <a:t> — </a:t>
+            </a:r>
+            <a:pPr algn="l" indent="0" marL="0">
+              <a:lnSpc>
+                <a:spcPts val="1620"/>
+              </a:lnSpc>
+              <a:spcAft>
+                <a:spcPts val="300"/>
+              </a:spcAft>
+              <a:buNone/>
+            </a:pPr>
+            <a:r>
               <a:rPr lang="en-US" sz="1200" i="1" dirty="0">
                 <a:solidFill>
                   <a:srgbClr val="1C2833"/>
@@ -4403,7 +4434,7 @@
                 <a:ea typeface="Arial" pitchFamily="34" charset="-122"/>
                 <a:cs typeface="Arial" pitchFamily="34" charset="-120"/>
               </a:rPr>
-              <a:t>What is in the</a:t>
+              <a:t>Śulba Sūtras</a:t>
             </a:r>
             <a:pPr algn="l" indent="0" marL="0">
               <a:lnSpc>
@@ -4423,15 +4454,59 @@
                 <a:ea typeface="Arial" pitchFamily="34" charset="-122"/>
                 <a:cs typeface="Arial" pitchFamily="34" charset="-120"/>
               </a:rPr>
-              <a:t>Gaṇita-kaumudī</a:t>
-            </a:r>
-            <a:pPr algn="l" indent="0" marL="0">
+              <a:t> — geometric ritual texts</a:t>
+            </a:r>
+            <a:endParaRPr lang="en-US" sz="1200" dirty="0"/>
+          </a:p>
+          <a:p>
+            <a:pPr algn="l" marL="342900" indent="-342900">
               <a:lnSpc>
                 <a:spcPts val="1620"/>
               </a:lnSpc>
               <a:spcAft>
                 <a:spcPts val="300"/>
               </a:spcAft>
+              <a:buSzPct val="100000"/>
+              <a:buChar char="•"/>
+            </a:pPr>
+            <a:r>
+              <a:rPr lang="en-US" sz="1200" b="1" dirty="0">
+                <a:solidFill>
+                  <a:srgbClr val="1C2833"/>
+                </a:solidFill>
+                <a:latin typeface="Arial" pitchFamily="34" charset="0"/>
+                <a:ea typeface="Arial" pitchFamily="34" charset="-122"/>
+                <a:cs typeface="Arial" pitchFamily="34" charset="-120"/>
+              </a:rPr>
+              <a:t>~500 CE</a:t>
+            </a:r>
+            <a:pPr algn="l" indent="0" marL="0">
+              <a:lnSpc>
+                <a:spcPts val="1620"/>
+              </a:lnSpc>
+              <a:spcAft>
+                <a:spcPts val="300"/>
+              </a:spcAft>
+              <a:buNone/>
+            </a:pPr>
+            <a:r>
+              <a:rPr lang="en-US" sz="1200" dirty="0">
+                <a:solidFill>
+                  <a:srgbClr val="1C2833"/>
+                </a:solidFill>
+                <a:latin typeface="Arial" pitchFamily="34" charset="0"/>
+                <a:ea typeface="Arial" pitchFamily="34" charset="-122"/>
+                <a:cs typeface="Arial" pitchFamily="34" charset="-120"/>
+              </a:rPr>
+              <a:t> — Āryabhaṭa (b. 476) — </a:t>
+            </a:r>
+            <a:pPr algn="l" indent="0" marL="0">
+              <a:lnSpc>
+                <a:spcPts val="1620"/>
+              </a:lnSpc>
+              <a:spcAft>
+                <a:spcPts val="300"/>
+              </a:spcAft>
               <a:buNone/>
             </a:pPr>
             <a:r>
@@ -4443,15 +4518,59 @@
                 <a:ea typeface="Arial" pitchFamily="34" charset="-122"/>
                 <a:cs typeface="Arial" pitchFamily="34" charset="-120"/>
               </a:rPr>
-              <a:t>?</a:t>
-            </a:r>
-            <a:pPr algn="l" indent="0" marL="0">
+              <a:t>Āryabhaṭīya</a:t>
+            </a:r>
+            <a:endParaRPr lang="en-US" sz="1200" dirty="0"/>
+          </a:p>
+          <a:p>
+            <a:pPr algn="l" marL="342900" indent="-342900">
               <a:lnSpc>
                 <a:spcPts val="1620"/>
               </a:lnSpc>
               <a:spcAft>
                 <a:spcPts val="300"/>
               </a:spcAft>
+              <a:buSzPct val="100000"/>
+              <a:buChar char="•"/>
+            </a:pPr>
+            <a:r>
+              <a:rPr lang="en-US" sz="1200" b="1" dirty="0">
+                <a:solidFill>
+                  <a:srgbClr val="1C2833"/>
+                </a:solidFill>
+                <a:latin typeface="Arial" pitchFamily="34" charset="0"/>
+                <a:ea typeface="Arial" pitchFamily="34" charset="-122"/>
+                <a:cs typeface="Arial" pitchFamily="34" charset="-120"/>
+              </a:rPr>
+              <a:t>~600 CE</a:t>
+            </a:r>
+            <a:pPr algn="l" indent="0" marL="0">
+              <a:lnSpc>
+                <a:spcPts val="1620"/>
+              </a:lnSpc>
+              <a:spcAft>
+                <a:spcPts val="300"/>
+              </a:spcAft>
+              <a:buNone/>
+            </a:pPr>
+            <a:r>
+              <a:rPr lang="en-US" sz="1200" dirty="0">
+                <a:solidFill>
+                  <a:srgbClr val="1C2833"/>
+                </a:solidFill>
+                <a:latin typeface="Arial" pitchFamily="34" charset="0"/>
+                <a:ea typeface="Arial" pitchFamily="34" charset="-122"/>
+                <a:cs typeface="Arial" pitchFamily="34" charset="-120"/>
+              </a:rPr>
+              <a:t> — Brahmagupta — </a:t>
+            </a:r>
+            <a:pPr algn="l" indent="0" marL="0">
+              <a:lnSpc>
+                <a:spcPts val="1620"/>
+              </a:lnSpc>
+              <a:spcAft>
+                <a:spcPts val="300"/>
+              </a:spcAft>
               <a:buNone/>
             </a:pPr>
             <a:r>
@@ -4463,15 +4582,39 @@
                 <a:ea typeface="Arial" pitchFamily="34" charset="-122"/>
                 <a:cs typeface="Arial" pitchFamily="34" charset="-120"/>
               </a:rPr>
-              <a:t> Fourteen books (</a:t>
-            </a:r>
-            <a:pPr algn="l" indent="0" marL="0">
+              <a:t>Brāhmasphuṭasiddhānta</a:t>
+            </a:r>
+            <a:endParaRPr lang="en-US" sz="1200" dirty="0"/>
+          </a:p>
+          <a:p>
+            <a:pPr algn="l" marL="342900" indent="-342900">
               <a:lnSpc>
                 <a:spcPts val="1620"/>
               </a:lnSpc>
               <a:spcAft>
                 <a:spcPts val="300"/>
               </a:spcAft>
+              <a:buSzPct val="100000"/>
+              <a:buChar char="•"/>
+            </a:pPr>
+            <a:r>
+              <a:rPr lang="en-US" sz="1200" b="1" dirty="0">
+                <a:solidFill>
+                  <a:srgbClr val="1C2833"/>
+                </a:solidFill>
+                <a:latin typeface="Arial" pitchFamily="34" charset="0"/>
+                <a:ea typeface="Arial" pitchFamily="34" charset="-122"/>
+                <a:cs typeface="Arial" pitchFamily="34" charset="-120"/>
+              </a:rPr>
+              <a:t>~1100 CE</a:t>
+            </a:r>
+            <a:pPr algn="l" indent="0" marL="0">
+              <a:lnSpc>
+                <a:spcPts val="1620"/>
+              </a:lnSpc>
+              <a:spcAft>
+                <a:spcPts val="300"/>
+              </a:spcAft>
               <a:buNone/>
             </a:pPr>
             <a:r>
@@ -4483,7 +4626,195 @@
                 <a:ea typeface="Arial" pitchFamily="34" charset="-122"/>
                 <a:cs typeface="Arial" pitchFamily="34" charset="-120"/>
               </a:rPr>
-              <a:t>vyavahāras*):</a:t>
+              <a:t> — Bhāskara II — </a:t>
+            </a:r>
+            <a:pPr algn="l" indent="0" marL="0">
+              <a:lnSpc>
+                <a:spcPts val="1620"/>
+              </a:lnSpc>
+              <a:spcAft>
+                <a:spcPts val="300"/>
+              </a:spcAft>
+              <a:buNone/>
+            </a:pPr>
+            <a:r>
+              <a:rPr lang="en-US" sz="1200" i="1" dirty="0">
+                <a:solidFill>
+                  <a:srgbClr val="1C2833"/>
+                </a:solidFill>
+                <a:latin typeface="Arial" pitchFamily="34" charset="0"/>
+                <a:ea typeface="Arial" pitchFamily="34" charset="-122"/>
+                <a:cs typeface="Arial" pitchFamily="34" charset="-120"/>
+              </a:rPr>
+              <a:t>Līlāvatī</a:t>
+            </a:r>
+            <a:pPr algn="l" indent="0" marL="0">
+              <a:lnSpc>
+                <a:spcPts val="1620"/>
+              </a:lnSpc>
+              <a:spcAft>
+                <a:spcPts val="300"/>
+              </a:spcAft>
+              <a:buNone/>
+            </a:pPr>
+            <a:r>
+              <a:rPr lang="en-US" sz="1200" dirty="0">
+                <a:solidFill>
+                  <a:srgbClr val="1C2833"/>
+                </a:solidFill>
+                <a:latin typeface="Arial" pitchFamily="34" charset="0"/>
+                <a:ea typeface="Arial" pitchFamily="34" charset="-122"/>
+                <a:cs typeface="Arial" pitchFamily="34" charset="-120"/>
+              </a:rPr>
+              <a:t>, </a:t>
+            </a:r>
+            <a:pPr algn="l" indent="0" marL="0">
+              <a:lnSpc>
+                <a:spcPts val="1620"/>
+              </a:lnSpc>
+              <a:spcAft>
+                <a:spcPts val="300"/>
+              </a:spcAft>
+              <a:buNone/>
+            </a:pPr>
+            <a:r>
+              <a:rPr lang="en-US" sz="1200" i="1" dirty="0">
+                <a:solidFill>
+                  <a:srgbClr val="1C2833"/>
+                </a:solidFill>
+                <a:latin typeface="Arial" pitchFamily="34" charset="0"/>
+                <a:ea typeface="Arial" pitchFamily="34" charset="-122"/>
+                <a:cs typeface="Arial" pitchFamily="34" charset="-120"/>
+              </a:rPr>
+              <a:t>Bījagaṇita</a:t>
+            </a:r>
+            <a:endParaRPr lang="en-US" sz="1200" dirty="0"/>
+          </a:p>
+          <a:p>
+            <a:pPr algn="l" marL="342900" indent="-342900">
+              <a:lnSpc>
+                <a:spcPts val="1620"/>
+              </a:lnSpc>
+              <a:spcAft>
+                <a:spcPts val="300"/>
+              </a:spcAft>
+              <a:buSzPct val="100000"/>
+              <a:buChar char="•"/>
+            </a:pPr>
+            <a:r>
+              <a:rPr lang="en-US" sz="1200" b="1" dirty="0">
+                <a:solidFill>
+                  <a:srgbClr val="1C2833"/>
+                </a:solidFill>
+                <a:latin typeface="Arial" pitchFamily="34" charset="0"/>
+                <a:ea typeface="Arial" pitchFamily="34" charset="-122"/>
+                <a:cs typeface="Arial" pitchFamily="34" charset="-120"/>
+              </a:rPr>
+              <a:t>1356 CE</a:t>
+            </a:r>
+            <a:pPr algn="l" indent="0" marL="0">
+              <a:lnSpc>
+                <a:spcPts val="1620"/>
+              </a:lnSpc>
+              <a:spcAft>
+                <a:spcPts val="300"/>
+              </a:spcAft>
+              <a:buNone/>
+            </a:pPr>
+            <a:r>
+              <a:rPr lang="en-US" sz="1200" dirty="0">
+                <a:solidFill>
+                  <a:srgbClr val="1C2833"/>
+                </a:solidFill>
+                <a:latin typeface="Arial" pitchFamily="34" charset="0"/>
+                <a:ea typeface="Arial" pitchFamily="34" charset="-122"/>
+                <a:cs typeface="Arial" pitchFamily="34" charset="-120"/>
+              </a:rPr>
+              <a:t> — *</a:t>
+            </a:r>
+            <a:pPr algn="l" indent="0" marL="0">
+              <a:lnSpc>
+                <a:spcPts val="1620"/>
+              </a:lnSpc>
+              <a:spcAft>
+                <a:spcPts val="300"/>
+              </a:spcAft>
+              <a:buNone/>
+            </a:pPr>
+            <a:r>
+              <a:rPr lang="en-US" sz="1200" i="1" dirty="0">
+                <a:solidFill>
+                  <a:srgbClr val="1C2833"/>
+                </a:solidFill>
+                <a:latin typeface="Arial" pitchFamily="34" charset="0"/>
+                <a:ea typeface="Arial" pitchFamily="34" charset="-122"/>
+                <a:cs typeface="Arial" pitchFamily="34" charset="-120"/>
+              </a:rPr>
+              <a:t>Nārāyaṇa Paṇḍita —</a:t>
+            </a:r>
+            <a:pPr algn="l" indent="0" marL="0">
+              <a:lnSpc>
+                <a:spcPts val="1620"/>
+              </a:lnSpc>
+              <a:spcAft>
+                <a:spcPts val="300"/>
+              </a:spcAft>
+              <a:buNone/>
+            </a:pPr>
+            <a:r>
+              <a:rPr lang="en-US" sz="1200" dirty="0">
+                <a:solidFill>
+                  <a:srgbClr val="1C2833"/>
+                </a:solidFill>
+                <a:latin typeface="Arial" pitchFamily="34" charset="0"/>
+                <a:ea typeface="Arial" pitchFamily="34" charset="-122"/>
+                <a:cs typeface="Arial" pitchFamily="34" charset="-120"/>
+              </a:rPr>
+              <a:t>Gaṇita-kaumudī***</a:t>
+            </a:r>
+            <a:endParaRPr lang="en-US" sz="1200" dirty="0"/>
+          </a:p>
+          <a:p>
+            <a:pPr algn="l" marL="342900" indent="-342900">
+              <a:lnSpc>
+                <a:spcPts val="1620"/>
+              </a:lnSpc>
+              <a:spcAft>
+                <a:spcPts val="300"/>
+              </a:spcAft>
+              <a:buSzPct val="100000"/>
+              <a:buChar char="•"/>
+            </a:pPr>
+            <a:r>
+              <a:rPr lang="en-US" sz="1200" b="1" dirty="0">
+                <a:solidFill>
+                  <a:srgbClr val="1C2833"/>
+                </a:solidFill>
+                <a:latin typeface="Arial" pitchFamily="34" charset="0"/>
+                <a:ea typeface="Arial" pitchFamily="34" charset="-122"/>
+                <a:cs typeface="Arial" pitchFamily="34" charset="-120"/>
+              </a:rPr>
+              <a:t>~1400 CE</a:t>
+            </a:r>
+            <a:pPr algn="l" indent="0" marL="0">
+              <a:lnSpc>
+                <a:spcPts val="1620"/>
+              </a:lnSpc>
+              <a:spcAft>
+                <a:spcPts val="300"/>
+              </a:spcAft>
+              <a:buNone/>
+            </a:pPr>
+            <a:r>
+              <a:rPr lang="en-US" sz="1200" dirty="0">
+                <a:solidFill>
+                  <a:srgbClr val="1C2833"/>
+                </a:solidFill>
+                <a:latin typeface="Arial" pitchFamily="34" charset="0"/>
+                <a:ea typeface="Arial" pitchFamily="34" charset="-122"/>
+                <a:cs typeface="Arial" pitchFamily="34" charset="-120"/>
+              </a:rPr>
+              <a:t> — Mādhava (Kerala) — early infinite series</a:t>
             </a:r>
             <a:endParaRPr lang="en-US" sz="1200" dirty="0"/>
           </a:p>
@@ -4497,8 +4828,8 @@
         </p:nvSpPr>
         <p:spPr>
           <a:xfrm>
-            <a:off x="406301" y="4095452"/>
-            <a:ext cx="8498026" cy="853083"/>
+            <a:off x="406301" y="3146078"/>
+            <a:ext cx="8498026" cy="426541"/>
           </a:xfrm>
           <a:prstGeom prst="rect">
             <a:avLst/>
@@ -4523,29 +4854,6 @@
               <a:buNone/>
             </a:pPr>
             <a:r>
-              <a:rPr lang="en-US" sz="1200" dirty="0">
-                <a:solidFill>
-                  <a:srgbClr val="1C2833"/>
-                </a:solidFill>
-                <a:latin typeface="Arial" pitchFamily="34" charset="0"/>
-                <a:ea typeface="Arial" pitchFamily="34" charset="-122"/>
-                <a:cs typeface="Arial" pitchFamily="34" charset="-120"/>
-              </a:rPr>
-              <a:t>– Book 1–3: arithmetic (basic operations, fractions) – Book 4–6: ratios, percentage problems, alligation – Book 7–8: progressions and series – Book 9: combinatorics (permutations, partitions — Nārāyaṇa was a pioneer here) – Book 10–11: geometry of plane figures and solids – Book 12: triangular and figurate numbers – Book 13: practical problems (e.g. dilution of milk, mixture problems) - *</a:t>
-            </a:r>
-            <a:pPr algn="l" indent="0" marL="0">
-              <a:lnSpc>
-                <a:spcPts val="1680"/>
-              </a:lnSpc>
-              <a:spcBef>
-                <a:spcPts val="300"/>
-              </a:spcBef>
-              <a:spcAft>
-                <a:spcPts val="300"/>
-              </a:spcAft>
-              <a:buNone/>
-            </a:pPr>
-            <a:r>
               <a:rPr lang="en-US" sz="1200" i="1" dirty="0">
                 <a:solidFill>
                   <a:srgbClr val="1C2833"/>
@@ -4554,76 +4862,7 @@
                 <a:ea typeface="Arial" pitchFamily="34" charset="-122"/>
                 <a:cs typeface="Arial" pitchFamily="34" charset="-120"/>
               </a:rPr>
-              <a:t>Book 14:</a:t>
-            </a:r>
-            <a:pPr algn="l" indent="0" marL="0">
-              <a:lnSpc>
-                <a:spcPts val="1680"/>
-              </a:lnSpc>
-              <a:spcBef>
-                <a:spcPts val="300"/>
-              </a:spcBef>
-              <a:spcAft>
-                <a:spcPts val="300"/>
-              </a:spcAft>
-              <a:buNone/>
-            </a:pPr>
-            <a:r>
-              <a:rPr lang="en-US" sz="1200" dirty="0">
-                <a:solidFill>
-                  <a:srgbClr val="1C2833"/>
-                </a:solidFill>
-                <a:latin typeface="Arial" pitchFamily="34" charset="0"/>
-                <a:ea typeface="Arial" pitchFamily="34" charset="-122"/>
-                <a:cs typeface="Arial" pitchFamily="34" charset="-120"/>
-              </a:rPr>
-              <a:t>Bhadragaṇita</a:t>
-            </a:r>
-            <a:pPr algn="l" indent="0" marL="0">
-              <a:lnSpc>
-                <a:spcPts val="1680"/>
-              </a:lnSpc>
-              <a:spcBef>
-                <a:spcPts val="300"/>
-              </a:spcBef>
-              <a:spcAft>
-                <a:spcPts val="300"/>
-              </a:spcAft>
-              <a:buNone/>
-            </a:pPr>
-            <a:r>
-              <a:rPr lang="en-US" sz="1200" i="1" dirty="0">
-                <a:solidFill>
-                  <a:srgbClr val="1C2833"/>
-                </a:solidFill>
-                <a:latin typeface="Arial" pitchFamily="34" charset="0"/>
-                <a:ea typeface="Arial" pitchFamily="34" charset="-122"/>
-                <a:cs typeface="Arial" pitchFamily="34" charset="-120"/>
-              </a:rPr>
-              <a:t> — magic squares</a:t>
-            </a:r>
-            <a:pPr algn="l" indent="0" marL="0">
-              <a:lnSpc>
-                <a:spcPts val="1680"/>
-              </a:lnSpc>
-              <a:spcBef>
-                <a:spcPts val="300"/>
-              </a:spcBef>
-              <a:spcAft>
-                <a:spcPts val="300"/>
-              </a:spcAft>
-              <a:buNone/>
-            </a:pPr>
-            <a:r>
-              <a:rPr lang="en-US" sz="1200" dirty="0">
-                <a:solidFill>
-                  <a:srgbClr val="1C2833"/>
-                </a:solidFill>
-                <a:latin typeface="Arial" pitchFamily="34" charset="0"/>
-                <a:ea typeface="Arial" pitchFamily="34" charset="-122"/>
-                <a:cs typeface="Arial" pitchFamily="34" charset="-120"/>
-              </a:rPr>
-              <a:t>*</a:t>
+              <a:t>"Nārāyaṇa wrote in the 14th century — relatively 'late' in the medieval Indian mathematical tradition, but he produced one of the most comprehensive single works."</a:t>
             </a:r>
             <a:endParaRPr lang="en-US" sz="1200" dirty="0"/>
           </a:p>
@@ -4637,8 +4876,8 @@
         </p:nvSpPr>
         <p:spPr>
           <a:xfrm>
-            <a:off x="406301" y="5024735"/>
-            <a:ext cx="8498026" cy="426541"/>
+            <a:off x="634901" y="3661470"/>
+            <a:ext cx="8102798" cy="281880"/>
           </a:xfrm>
           <a:prstGeom prst="rect">
             <a:avLst/>
@@ -4650,13 +4889,20 @@
           <a:bodyPr wrap="square" lIns="0" tIns="0" rIns="0" bIns="0" rtlCol="0" anchor="t"/>
           <a:lstStyle/>
           <a:p>
-            <a:pPr algn="l" indent="0" marL="0">
-              <a:lnSpc>
-                <a:spcPts val="1680"/>
-              </a:lnSpc>
-              <a:spcBef>
-                <a:spcPts val="300"/>
-              </a:spcBef>
+            <a:pPr algn="l" marL="342900" indent="-342900">
+              <a:lnSpc>
+                <a:spcPts val="1620"/>
+              </a:lnSpc>
+              <a:spcAft>
+                <a:spcPts val="300"/>
+              </a:spcAft>
+              <a:buSzPct val="100000"/>
+              <a:buChar char="•"/>
+            </a:pPr>
+            <a:pPr algn="l" indent="0" marL="0">
+              <a:lnSpc>
+                <a:spcPts val="1620"/>
+              </a:lnSpc>
               <a:spcAft>
                 <a:spcPts val="300"/>
               </a:spcAft>
@@ -4671,7 +4917,87 @@
                 <a:ea typeface="Arial" pitchFamily="34" charset="-122"/>
                 <a:cs typeface="Arial" pitchFamily="34" charset="-120"/>
               </a:rPr>
-              <a:t>"The treatise is comprehensive — it isn't only about magic squares. But the magic-square book is the longest and most systematic in any pre-modern work we have."</a:t>
+              <a:t>What is in the</a:t>
+            </a:r>
+            <a:pPr algn="l" indent="0" marL="0">
+              <a:lnSpc>
+                <a:spcPts val="1620"/>
+              </a:lnSpc>
+              <a:spcAft>
+                <a:spcPts val="300"/>
+              </a:spcAft>
+              <a:buNone/>
+            </a:pPr>
+            <a:r>
+              <a:rPr lang="en-US" sz="1200" dirty="0">
+                <a:solidFill>
+                  <a:srgbClr val="1C2833"/>
+                </a:solidFill>
+                <a:latin typeface="Arial" pitchFamily="34" charset="0"/>
+                <a:ea typeface="Arial" pitchFamily="34" charset="-122"/>
+                <a:cs typeface="Arial" pitchFamily="34" charset="-120"/>
+              </a:rPr>
+              <a:t>Gaṇita-kaumudī</a:t>
+            </a:r>
+            <a:pPr algn="l" indent="0" marL="0">
+              <a:lnSpc>
+                <a:spcPts val="1620"/>
+              </a:lnSpc>
+              <a:spcAft>
+                <a:spcPts val="300"/>
+              </a:spcAft>
+              <a:buNone/>
+            </a:pPr>
+            <a:r>
+              <a:rPr lang="en-US" sz="1200" i="1" dirty="0">
+                <a:solidFill>
+                  <a:srgbClr val="1C2833"/>
+                </a:solidFill>
+                <a:latin typeface="Arial" pitchFamily="34" charset="0"/>
+                <a:ea typeface="Arial" pitchFamily="34" charset="-122"/>
+                <a:cs typeface="Arial" pitchFamily="34" charset="-120"/>
+              </a:rPr>
+              <a:t>?</a:t>
+            </a:r>
+            <a:pPr algn="l" indent="0" marL="0">
+              <a:lnSpc>
+                <a:spcPts val="1620"/>
+              </a:lnSpc>
+              <a:spcAft>
+                <a:spcPts val="300"/>
+              </a:spcAft>
+              <a:buNone/>
+            </a:pPr>
+            <a:r>
+              <a:rPr lang="en-US" sz="1200" i="1" dirty="0">
+                <a:solidFill>
+                  <a:srgbClr val="1C2833"/>
+                </a:solidFill>
+                <a:latin typeface="Arial" pitchFamily="34" charset="0"/>
+                <a:ea typeface="Arial" pitchFamily="34" charset="-122"/>
+                <a:cs typeface="Arial" pitchFamily="34" charset="-120"/>
+              </a:rPr>
+              <a:t> Fourteen books (</a:t>
+            </a:r>
+            <a:pPr algn="l" indent="0" marL="0">
+              <a:lnSpc>
+                <a:spcPts val="1620"/>
+              </a:lnSpc>
+              <a:spcAft>
+                <a:spcPts val="300"/>
+              </a:spcAft>
+              <a:buNone/>
+            </a:pPr>
+            <a:r>
+              <a:rPr lang="en-US" sz="1200" dirty="0">
+                <a:solidFill>
+                  <a:srgbClr val="1C2833"/>
+                </a:solidFill>
+                <a:latin typeface="Arial" pitchFamily="34" charset="0"/>
+                <a:ea typeface="Arial" pitchFamily="34" charset="-122"/>
+                <a:cs typeface="Arial" pitchFamily="34" charset="-120"/>
+              </a:rPr>
+              <a:t>vyavahāras*):</a:t>
             </a:r>
             <a:endParaRPr lang="en-US" sz="1200" dirty="0"/>
           </a:p>
@@ -4685,8 +5011,8 @@
         </p:nvSpPr>
         <p:spPr>
           <a:xfrm>
-            <a:off x="634901" y="5540127"/>
-            <a:ext cx="8102798" cy="281880"/>
+            <a:off x="406301" y="4032200"/>
+            <a:ext cx="8498026" cy="853083"/>
           </a:xfrm>
           <a:prstGeom prst="rect">
             <a:avLst/>
@@ -4698,31 +5024,13 @@
           <a:bodyPr wrap="square" lIns="0" tIns="0" rIns="0" bIns="0" rtlCol="0" anchor="t"/>
           <a:lstStyle/>
           <a:p>
-            <a:pPr algn="l" marL="342900" indent="-342900">
-              <a:lnSpc>
-                <a:spcPts val="1620"/>
-              </a:lnSpc>
-              <a:spcAft>
-                <a:spcPts val="300"/>
-              </a:spcAft>
-              <a:buSzPct val="100000"/>
-              <a:buChar char="•"/>
-            </a:pPr>
-            <a:r>
-              <a:rPr lang="en-US" sz="1200" b="1" dirty="0">
-                <a:solidFill>
-                  <a:srgbClr val="1C2833"/>
-                </a:solidFill>
-                <a:latin typeface="Arial" pitchFamily="34" charset="0"/>
-                <a:ea typeface="Arial" pitchFamily="34" charset="-122"/>
-                <a:cs typeface="Arial" pitchFamily="34" charset="-120"/>
-              </a:rPr>
-              <a:t>Why systematic written method matters.</a:t>
-            </a:r>
-            <a:pPr algn="l" indent="0" marL="0">
-              <a:lnSpc>
-                <a:spcPts val="1620"/>
-              </a:lnSpc>
+            <a:pPr algn="l" indent="0" marL="0">
+              <a:lnSpc>
+                <a:spcPts val="1680"/>
+              </a:lnSpc>
+              <a:spcBef>
+                <a:spcPts val="300"/>
+              </a:spcBef>
               <a:spcAft>
                 <a:spcPts val="300"/>
               </a:spcAft>
@@ -4737,7 +5045,99 @@
                 <a:ea typeface="Arial" pitchFamily="34" charset="-122"/>
                 <a:cs typeface="Arial" pitchFamily="34" charset="-120"/>
               </a:rPr>
-              <a:t> Discuss together:</a:t>
+              <a:t>– Book 1–3: arithmetic (basic operations, fractions) – Book 4–6: ratios, percentage problems, alligation – Book 7–8: progressions and series – Book 9: combinatorics (permutations, partitions — Nārāyaṇa was a pioneer here) – Book 10–11: geometry of plane figures and solids – Book 12: triangular and figurate numbers – Book 13: practical problems (e.g. dilution of milk, mixture problems) - *</a:t>
+            </a:r>
+            <a:pPr algn="l" indent="0" marL="0">
+              <a:lnSpc>
+                <a:spcPts val="1680"/>
+              </a:lnSpc>
+              <a:spcBef>
+                <a:spcPts val="300"/>
+              </a:spcBef>
+              <a:spcAft>
+                <a:spcPts val="300"/>
+              </a:spcAft>
+              <a:buNone/>
+            </a:pPr>
+            <a:r>
+              <a:rPr lang="en-US" sz="1200" i="1" dirty="0">
+                <a:solidFill>
+                  <a:srgbClr val="1C2833"/>
+                </a:solidFill>
+                <a:latin typeface="Arial" pitchFamily="34" charset="0"/>
+                <a:ea typeface="Arial" pitchFamily="34" charset="-122"/>
+                <a:cs typeface="Arial" pitchFamily="34" charset="-120"/>
+              </a:rPr>
+              <a:t>Book 14:</a:t>
+            </a:r>
+            <a:pPr algn="l" indent="0" marL="0">
+              <a:lnSpc>
+                <a:spcPts val="1680"/>
+              </a:lnSpc>
+              <a:spcBef>
+                <a:spcPts val="300"/>
+              </a:spcBef>
+              <a:spcAft>
+                <a:spcPts val="300"/>
+              </a:spcAft>
+              <a:buNone/>
+            </a:pPr>
+            <a:r>
+              <a:rPr lang="en-US" sz="1200" dirty="0">
+                <a:solidFill>
+                  <a:srgbClr val="1C2833"/>
+                </a:solidFill>
+                <a:latin typeface="Arial" pitchFamily="34" charset="0"/>
+                <a:ea typeface="Arial" pitchFamily="34" charset="-122"/>
+                <a:cs typeface="Arial" pitchFamily="34" charset="-120"/>
+              </a:rPr>
+              <a:t>Bhadragaṇita</a:t>
+            </a:r>
+            <a:pPr algn="l" indent="0" marL="0">
+              <a:lnSpc>
+                <a:spcPts val="1680"/>
+              </a:lnSpc>
+              <a:spcBef>
+                <a:spcPts val="300"/>
+              </a:spcBef>
+              <a:spcAft>
+                <a:spcPts val="300"/>
+              </a:spcAft>
+              <a:buNone/>
+            </a:pPr>
+            <a:r>
+              <a:rPr lang="en-US" sz="1200" i="1" dirty="0">
+                <a:solidFill>
+                  <a:srgbClr val="1C2833"/>
+                </a:solidFill>
+                <a:latin typeface="Arial" pitchFamily="34" charset="0"/>
+                <a:ea typeface="Arial" pitchFamily="34" charset="-122"/>
+                <a:cs typeface="Arial" pitchFamily="34" charset="-120"/>
+              </a:rPr>
+              <a:t> — magic squares</a:t>
+            </a:r>
+            <a:pPr algn="l" indent="0" marL="0">
+              <a:lnSpc>
+                <a:spcPts val="1680"/>
+              </a:lnSpc>
+              <a:spcBef>
+                <a:spcPts val="300"/>
+              </a:spcBef>
+              <a:spcAft>
+                <a:spcPts val="300"/>
+              </a:spcAft>
+              <a:buNone/>
+            </a:pPr>
+            <a:r>
+              <a:rPr lang="en-US" sz="1200" dirty="0">
+                <a:solidFill>
+                  <a:srgbClr val="1C2833"/>
+                </a:solidFill>
+                <a:latin typeface="Arial" pitchFamily="34" charset="0"/>
+                <a:ea typeface="Arial" pitchFamily="34" charset="-122"/>
+                <a:cs typeface="Arial" pitchFamily="34" charset="-120"/>
+              </a:rPr>
+              <a:t>*</a:t>
             </a:r>
             <a:endParaRPr lang="en-US" sz="1200" dirty="0"/>
           </a:p>
@@ -4751,8 +5151,8 @@
         </p:nvSpPr>
         <p:spPr>
           <a:xfrm>
-            <a:off x="406301" y="5910858"/>
-            <a:ext cx="8498026" cy="853083"/>
+            <a:off x="406301" y="4961483"/>
+            <a:ext cx="8498026" cy="426541"/>
           </a:xfrm>
           <a:prstGeom prst="rect">
             <a:avLst/>
@@ -4777,29 +5177,6 @@
               <a:buNone/>
             </a:pPr>
             <a:r>
-              <a:rPr lang="en-US" sz="1200" dirty="0">
-                <a:solidFill>
-                  <a:srgbClr val="1C2833"/>
-                </a:solidFill>
-                <a:latin typeface="Arial" pitchFamily="34" charset="0"/>
-                <a:ea typeface="Arial" pitchFamily="34" charset="-122"/>
-                <a:cs typeface="Arial" pitchFamily="34" charset="-120"/>
-              </a:rPr>
-              <a:t>– Before Nārāyaṇa, magic squares appeared in many Indian and non-Indian sources — but mostly as </a:t>
-            </a:r>
-            <a:pPr algn="l" indent="0" marL="0">
-              <a:lnSpc>
-                <a:spcPts val="1680"/>
-              </a:lnSpc>
-              <a:spcBef>
-                <a:spcPts val="300"/>
-              </a:spcBef>
-              <a:spcAft>
-                <a:spcPts val="300"/>
-              </a:spcAft>
-              <a:buNone/>
-            </a:pPr>
-            <a:r>
               <a:rPr lang="en-US" sz="1200" i="1" dirty="0">
                 <a:solidFill>
                   <a:srgbClr val="1C2833"/>
@@ -4808,76 +5185,7 @@
                 <a:ea typeface="Arial" pitchFamily="34" charset="-122"/>
                 <a:cs typeface="Arial" pitchFamily="34" charset="-120"/>
               </a:rPr>
-              <a:t>examples</a:t>
-            </a:r>
-            <a:pPr algn="l" indent="0" marL="0">
-              <a:lnSpc>
-                <a:spcPts val="1680"/>
-              </a:lnSpc>
-              <a:spcBef>
-                <a:spcPts val="300"/>
-              </a:spcBef>
-              <a:spcAft>
-                <a:spcPts val="300"/>
-              </a:spcAft>
-              <a:buNone/>
-            </a:pPr>
-            <a:r>
-              <a:rPr lang="en-US" sz="1200" dirty="0">
-                <a:solidFill>
-                  <a:srgbClr val="1C2833"/>
-                </a:solidFill>
-                <a:latin typeface="Arial" pitchFamily="34" charset="0"/>
-                <a:ea typeface="Arial" pitchFamily="34" charset="-122"/>
-                <a:cs typeface="Arial" pitchFamily="34" charset="-120"/>
-              </a:rPr>
-              <a:t>, not as recipes. – Nārāyaṇa gives </a:t>
-            </a:r>
-            <a:pPr algn="l" indent="0" marL="0">
-              <a:lnSpc>
-                <a:spcPts val="1680"/>
-              </a:lnSpc>
-              <a:spcBef>
-                <a:spcPts val="300"/>
-              </a:spcBef>
-              <a:spcAft>
-                <a:spcPts val="300"/>
-              </a:spcAft>
-              <a:buNone/>
-            </a:pPr>
-            <a:r>
-              <a:rPr lang="en-US" sz="1200" b="1" dirty="0">
-                <a:solidFill>
-                  <a:srgbClr val="1C2833"/>
-                </a:solidFill>
-                <a:latin typeface="Arial" pitchFamily="34" charset="0"/>
-                <a:ea typeface="Arial" pitchFamily="34" charset="-122"/>
-                <a:cs typeface="Arial" pitchFamily="34" charset="-120"/>
-              </a:rPr>
-              <a:t>methods</a:t>
-            </a:r>
-            <a:pPr algn="l" indent="0" marL="0">
-              <a:lnSpc>
-                <a:spcPts val="1680"/>
-              </a:lnSpc>
-              <a:spcBef>
-                <a:spcPts val="300"/>
-              </a:spcBef>
-              <a:spcAft>
-                <a:spcPts val="300"/>
-              </a:spcAft>
-              <a:buNone/>
-            </a:pPr>
-            <a:r>
-              <a:rPr lang="en-US" sz="1200" dirty="0">
-                <a:solidFill>
-                  <a:srgbClr val="1C2833"/>
-                </a:solidFill>
-                <a:latin typeface="Arial" pitchFamily="34" charset="0"/>
-                <a:ea typeface="Arial" pitchFamily="34" charset="-122"/>
-                <a:cs typeface="Arial" pitchFamily="34" charset="-120"/>
-              </a:rPr>
-              <a:t>: rules that work for any input size. This is what makes it mathematics, not just a curiosity collection. – This is the same distinction we draw today between "here's a Sudoku puzzle" and "here's an algorithm to generate Sudoku puzzles."</a:t>
+              <a:t>"The treatise is comprehensive — it isn't only about magic squares. But the magic-square book is the longest and most systematic in any pre-modern work we have."</a:t>
             </a:r>
             <a:endParaRPr lang="en-US" sz="1200" dirty="0"/>
           </a:p>
@@ -4891,7 +5199,7 @@
         </p:nvSpPr>
         <p:spPr>
           <a:xfrm>
-            <a:off x="634901" y="6852791"/>
+            <a:off x="634901" y="5476875"/>
             <a:ext cx="8102798" cy="281880"/>
           </a:xfrm>
           <a:prstGeom prst="rect">
@@ -4923,7 +5231,7 @@
                 <a:ea typeface="Arial" pitchFamily="34" charset="-122"/>
                 <a:cs typeface="Arial" pitchFamily="34" charset="-120"/>
               </a:rPr>
-              <a:t>A paraphrase from the source.</a:t>
+              <a:t>Why systematic written method matters.</a:t>
             </a:r>
             <a:pPr algn="l" indent="0" marL="0">
               <a:lnSpc>
@@ -4943,47 +5251,7 @@
                 <a:ea typeface="Arial" pitchFamily="34" charset="-122"/>
                 <a:cs typeface="Arial" pitchFamily="34" charset="-120"/>
               </a:rPr>
-              <a:t> From </a:t>
-            </a:r>
-            <a:pPr algn="l" indent="0" marL="0">
-              <a:lnSpc>
-                <a:spcPts val="1620"/>
-              </a:lnSpc>
-              <a:spcAft>
-                <a:spcPts val="300"/>
-              </a:spcAft>
-              <a:buNone/>
-            </a:pPr>
-            <a:r>
-              <a:rPr lang="en-US" sz="1200" i="1" dirty="0">
-                <a:solidFill>
-                  <a:srgbClr val="1C2833"/>
-                </a:solidFill>
-                <a:latin typeface="Arial" pitchFamily="34" charset="0"/>
-                <a:ea typeface="Arial" pitchFamily="34" charset="-122"/>
-                <a:cs typeface="Arial" pitchFamily="34" charset="-120"/>
-              </a:rPr>
-              <a:t>Bhadragaṇita</a:t>
-            </a:r>
-            <a:pPr algn="l" indent="0" marL="0">
-              <a:lnSpc>
-                <a:spcPts val="1620"/>
-              </a:lnSpc>
-              <a:spcAft>
-                <a:spcPts val="300"/>
-              </a:spcAft>
-              <a:buNone/>
-            </a:pPr>
-            <a:r>
-              <a:rPr lang="en-US" sz="1200" dirty="0">
-                <a:solidFill>
-                  <a:srgbClr val="1C2833"/>
-                </a:solidFill>
-                <a:latin typeface="Arial" pitchFamily="34" charset="0"/>
-                <a:ea typeface="Arial" pitchFamily="34" charset="-122"/>
-                <a:cs typeface="Arial" pitchFamily="34" charset="-120"/>
-              </a:rPr>
-              <a:t>, paraphrased:</a:t>
+              <a:t> Discuss together:</a:t>
             </a:r>
             <a:endParaRPr lang="en-US" sz="1200" dirty="0"/>
           </a:p>
@@ -4997,8 +5265,8 @@
         </p:nvSpPr>
         <p:spPr>
           <a:xfrm>
-            <a:off x="406301" y="7223522"/>
-            <a:ext cx="8498026" cy="639812"/>
+            <a:off x="406301" y="5847606"/>
+            <a:ext cx="8498026" cy="853083"/>
           </a:xfrm>
           <a:prstGeom prst="rect">
             <a:avLst/>
@@ -5031,7 +5299,7 @@
                 <a:ea typeface="Arial" pitchFamily="34" charset="-122"/>
                 <a:cs typeface="Arial" pitchFamily="34" charset="-120"/>
               </a:rPr>
-              <a:t>&gt; "Magic squares of odd order are made by placing the first number in the top middle cell, and proceeding diagonally upward and rightward; if blocked, descend by one." (Nārāyaṇa Paṇḍita, </a:t>
+              <a:t>– Before Nārāyaṇa, magic squares appeared in many Indian and non-Indian sources — but mostly as </a:t>
             </a:r>
             <a:pPr algn="l" indent="0" marL="0">
               <a:lnSpc>
@@ -5054,7 +5322,7 @@
                 <a:ea typeface="Arial" pitchFamily="34" charset="-122"/>
                 <a:cs typeface="Arial" pitchFamily="34" charset="-120"/>
               </a:rPr>
-              <a:t>Gaṇita-kaumudī</a:t>
+              <a:t>examples</a:t>
             </a:r>
             <a:pPr algn="l" indent="0" marL="0">
               <a:lnSpc>
@@ -5077,7 +5345,53 @@
                 <a:ea typeface="Arial" pitchFamily="34" charset="-122"/>
                 <a:cs typeface="Arial" pitchFamily="34" charset="-120"/>
               </a:rPr>
-              <a:t> Book 14, 1356 CE — paraphrased.)</a:t>
+              <a:t>, not as recipes. – Nārāyaṇa gives </a:t>
+            </a:r>
+            <a:pPr algn="l" indent="0" marL="0">
+              <a:lnSpc>
+                <a:spcPts val="1680"/>
+              </a:lnSpc>
+              <a:spcBef>
+                <a:spcPts val="300"/>
+              </a:spcBef>
+              <a:spcAft>
+                <a:spcPts val="300"/>
+              </a:spcAft>
+              <a:buNone/>
+            </a:pPr>
+            <a:r>
+              <a:rPr lang="en-US" sz="1200" b="1" dirty="0">
+                <a:solidFill>
+                  <a:srgbClr val="1C2833"/>
+                </a:solidFill>
+                <a:latin typeface="Arial" pitchFamily="34" charset="0"/>
+                <a:ea typeface="Arial" pitchFamily="34" charset="-122"/>
+                <a:cs typeface="Arial" pitchFamily="34" charset="-120"/>
+              </a:rPr>
+              <a:t>methods</a:t>
+            </a:r>
+            <a:pPr algn="l" indent="0" marL="0">
+              <a:lnSpc>
+                <a:spcPts val="1680"/>
+              </a:lnSpc>
+              <a:spcBef>
+                <a:spcPts val="300"/>
+              </a:spcBef>
+              <a:spcAft>
+                <a:spcPts val="300"/>
+              </a:spcAft>
+              <a:buNone/>
+            </a:pPr>
+            <a:r>
+              <a:rPr lang="en-US" sz="1200" dirty="0">
+                <a:solidFill>
+                  <a:srgbClr val="1C2833"/>
+                </a:solidFill>
+                <a:latin typeface="Arial" pitchFamily="34" charset="0"/>
+                <a:ea typeface="Arial" pitchFamily="34" charset="-122"/>
+                <a:cs typeface="Arial" pitchFamily="34" charset="-120"/>
+              </a:rPr>
+              <a:t>: rules that work for any input size. This is what makes it mathematics, not just a curiosity collection. – This is the same distinction we draw today between "here's a Sudoku puzzle" and "here's an algorithm to generate Sudoku puzzles."</a:t>
             </a:r>
             <a:endParaRPr lang="en-US" sz="1200" dirty="0"/>
           </a:p>
@@ -5091,8 +5405,8 @@
         </p:nvSpPr>
         <p:spPr>
           <a:xfrm>
-            <a:off x="406301" y="7939534"/>
-            <a:ext cx="8498026" cy="213271"/>
+            <a:off x="634901" y="6789539"/>
+            <a:ext cx="8102798" cy="281880"/>
           </a:xfrm>
           <a:prstGeom prst="rect">
             <a:avLst/>
@@ -5104,13 +5418,31 @@
           <a:bodyPr wrap="square" lIns="0" tIns="0" rIns="0" bIns="0" rtlCol="0" anchor="t"/>
           <a:lstStyle/>
           <a:p>
-            <a:pPr algn="l" indent="0" marL="0">
-              <a:lnSpc>
-                <a:spcPts val="1680"/>
-              </a:lnSpc>
-              <a:spcBef>
-                <a:spcPts val="300"/>
-              </a:spcBef>
+            <a:pPr algn="l" marL="342900" indent="-342900">
+              <a:lnSpc>
+                <a:spcPts val="1620"/>
+              </a:lnSpc>
+              <a:spcAft>
+                <a:spcPts val="300"/>
+              </a:spcAft>
+              <a:buSzPct val="100000"/>
+              <a:buChar char="•"/>
+            </a:pPr>
+            <a:r>
+              <a:rPr lang="en-US" sz="1200" b="1" dirty="0">
+                <a:solidFill>
+                  <a:srgbClr val="1C2833"/>
+                </a:solidFill>
+                <a:latin typeface="Arial" pitchFamily="34" charset="0"/>
+                <a:ea typeface="Arial" pitchFamily="34" charset="-122"/>
+                <a:cs typeface="Arial" pitchFamily="34" charset="-120"/>
+              </a:rPr>
+              <a:t>A paraphrase from the source.</a:t>
+            </a:r>
+            <a:pPr algn="l" indent="0" marL="0">
+              <a:lnSpc>
+                <a:spcPts val="1620"/>
+              </a:lnSpc>
               <a:spcAft>
                 <a:spcPts val="300"/>
               </a:spcAft>
@@ -5125,7 +5457,47 @@
                 <a:ea typeface="Arial" pitchFamily="34" charset="-122"/>
                 <a:cs typeface="Arial" pitchFamily="34" charset="-120"/>
               </a:rPr>
-              <a:t>This is the rule you have been using. The original is in Sanskrit; this is a faithful paraphrase, not a quoted verse.</a:t>
+              <a:t> From </a:t>
+            </a:r>
+            <a:pPr algn="l" indent="0" marL="0">
+              <a:lnSpc>
+                <a:spcPts val="1620"/>
+              </a:lnSpc>
+              <a:spcAft>
+                <a:spcPts val="300"/>
+              </a:spcAft>
+              <a:buNone/>
+            </a:pPr>
+            <a:r>
+              <a:rPr lang="en-US" sz="1200" i="1" dirty="0">
+                <a:solidFill>
+                  <a:srgbClr val="1C2833"/>
+                </a:solidFill>
+                <a:latin typeface="Arial" pitchFamily="34" charset="0"/>
+                <a:ea typeface="Arial" pitchFamily="34" charset="-122"/>
+                <a:cs typeface="Arial" pitchFamily="34" charset="-120"/>
+              </a:rPr>
+              <a:t>Bhadragaṇita</a:t>
+            </a:r>
+            <a:pPr algn="l" indent="0" marL="0">
+              <a:lnSpc>
+                <a:spcPts val="1620"/>
+              </a:lnSpc>
+              <a:spcAft>
+                <a:spcPts val="300"/>
+              </a:spcAft>
+              <a:buNone/>
+            </a:pPr>
+            <a:r>
+              <a:rPr lang="en-US" sz="1200" dirty="0">
+                <a:solidFill>
+                  <a:srgbClr val="1C2833"/>
+                </a:solidFill>
+                <a:latin typeface="Arial" pitchFamily="34" charset="0"/>
+                <a:ea typeface="Arial" pitchFamily="34" charset="-122"/>
+                <a:cs typeface="Arial" pitchFamily="34" charset="-120"/>
+              </a:rPr>
+              <a:t>, paraphrased:</a:t>
             </a:r>
             <a:endParaRPr lang="en-US" sz="1200" dirty="0"/>
           </a:p>
@@ -5139,7 +5511,149 @@
         </p:nvSpPr>
         <p:spPr>
           <a:xfrm>
-            <a:off x="406301" y="8305205"/>
+            <a:off x="406301" y="7160270"/>
+            <a:ext cx="8498026" cy="639812"/>
+          </a:xfrm>
+          <a:prstGeom prst="rect">
+            <a:avLst/>
+          </a:prstGeom>
+          <a:noFill/>
+          <a:ln/>
+        </p:spPr>
+        <p:txBody>
+          <a:bodyPr wrap="square" lIns="0" tIns="0" rIns="0" bIns="0" rtlCol="0" anchor="t"/>
+          <a:lstStyle/>
+          <a:p>
+            <a:pPr algn="l" indent="0" marL="0">
+              <a:lnSpc>
+                <a:spcPts val="1680"/>
+              </a:lnSpc>
+              <a:spcBef>
+                <a:spcPts val="300"/>
+              </a:spcBef>
+              <a:spcAft>
+                <a:spcPts val="300"/>
+              </a:spcAft>
+              <a:buNone/>
+            </a:pPr>
+            <a:r>
+              <a:rPr lang="en-US" sz="1200" dirty="0">
+                <a:solidFill>
+                  <a:srgbClr val="1C2833"/>
+                </a:solidFill>
+                <a:latin typeface="Arial" pitchFamily="34" charset="0"/>
+                <a:ea typeface="Arial" pitchFamily="34" charset="-122"/>
+                <a:cs typeface="Arial" pitchFamily="34" charset="-120"/>
+              </a:rPr>
+              <a:t>&gt; "Magic squares of odd order are made by placing the first number in the top middle cell, and proceeding diagonally upward and rightward; if blocked, descend by one." (Nārāyaṇa Paṇḍita, </a:t>
+            </a:r>
+            <a:pPr algn="l" indent="0" marL="0">
+              <a:lnSpc>
+                <a:spcPts val="1680"/>
+              </a:lnSpc>
+              <a:spcBef>
+                <a:spcPts val="300"/>
+              </a:spcBef>
+              <a:spcAft>
+                <a:spcPts val="300"/>
+              </a:spcAft>
+              <a:buNone/>
+            </a:pPr>
+            <a:r>
+              <a:rPr lang="en-US" sz="1200" i="1" dirty="0">
+                <a:solidFill>
+                  <a:srgbClr val="1C2833"/>
+                </a:solidFill>
+                <a:latin typeface="Arial" pitchFamily="34" charset="0"/>
+                <a:ea typeface="Arial" pitchFamily="34" charset="-122"/>
+                <a:cs typeface="Arial" pitchFamily="34" charset="-120"/>
+              </a:rPr>
+              <a:t>Gaṇita-kaumudī</a:t>
+            </a:r>
+            <a:pPr algn="l" indent="0" marL="0">
+              <a:lnSpc>
+                <a:spcPts val="1680"/>
+              </a:lnSpc>
+              <a:spcBef>
+                <a:spcPts val="300"/>
+              </a:spcBef>
+              <a:spcAft>
+                <a:spcPts val="300"/>
+              </a:spcAft>
+              <a:buNone/>
+            </a:pPr>
+            <a:r>
+              <a:rPr lang="en-US" sz="1200" dirty="0">
+                <a:solidFill>
+                  <a:srgbClr val="1C2833"/>
+                </a:solidFill>
+                <a:latin typeface="Arial" pitchFamily="34" charset="0"/>
+                <a:ea typeface="Arial" pitchFamily="34" charset="-122"/>
+                <a:cs typeface="Arial" pitchFamily="34" charset="-120"/>
+              </a:rPr>
+              <a:t> Book 14, 1356 CE — paraphrased.)</a:t>
+            </a:r>
+            <a:endParaRPr lang="en-US" sz="1200" dirty="0"/>
+          </a:p>
+        </p:txBody>
+      </p:sp>
+      <p:sp>
+        <p:nvSpPr>
+          <p:cNvPr id="15" name="Text 13"/>
+          <p:cNvSpPr/>
+          <p:nvPr/>
+        </p:nvSpPr>
+        <p:spPr>
+          <a:xfrm>
+            <a:off x="406301" y="7876282"/>
+            <a:ext cx="8498026" cy="213271"/>
+          </a:xfrm>
+          <a:prstGeom prst="rect">
+            <a:avLst/>
+          </a:prstGeom>
+          <a:noFill/>
+          <a:ln/>
+        </p:spPr>
+        <p:txBody>
+          <a:bodyPr wrap="square" lIns="0" tIns="0" rIns="0" bIns="0" rtlCol="0" anchor="t"/>
+          <a:lstStyle/>
+          <a:p>
+            <a:pPr algn="l" indent="0" marL="0">
+              <a:lnSpc>
+                <a:spcPts val="1680"/>
+              </a:lnSpc>
+              <a:spcBef>
+                <a:spcPts val="300"/>
+              </a:spcBef>
+              <a:spcAft>
+                <a:spcPts val="300"/>
+              </a:spcAft>
+              <a:buNone/>
+            </a:pPr>
+            <a:r>
+              <a:rPr lang="en-US" sz="1200" dirty="0">
+                <a:solidFill>
+                  <a:srgbClr val="1C2833"/>
+                </a:solidFill>
+                <a:latin typeface="Arial" pitchFamily="34" charset="0"/>
+                <a:ea typeface="Arial" pitchFamily="34" charset="-122"/>
+                <a:cs typeface="Arial" pitchFamily="34" charset="-120"/>
+              </a:rPr>
+              <a:t>This is the rule you have been using. The original is in Sanskrit; this is a faithful paraphrase, not a quoted verse.</a:t>
+            </a:r>
+            <a:endParaRPr lang="en-US" sz="1200" dirty="0"/>
+          </a:p>
+        </p:txBody>
+      </p:sp>
+      <p:sp>
+        <p:nvSpPr>
+          <p:cNvPr id="16" name="Text 14"/>
+          <p:cNvSpPr/>
+          <p:nvPr/>
+        </p:nvSpPr>
+        <p:spPr>
+          <a:xfrm>
+            <a:off x="406301" y="8241953"/>
             <a:ext cx="8498026" cy="213271"/>
           </a:xfrm>
           <a:prstGeom prst="rect">

--- a/exports/pptx/lessons/middle-module-14-magic-squares/day-07-narayana.pptx
+++ b/exports/pptx/lessons/middle-module-14-magic-squares/day-07-narayana.pptx
@@ -17,9 +17,16 @@
     <p:sldId id="265" r:id="rId11"/>
     <p:sldId id="266" r:id="rId12"/>
     <p:sldId id="267" r:id="rId13"/>
+    <p:sldId id="268" r:id="rId14"/>
+    <p:sldId id="269" r:id="rId15"/>
+    <p:sldId id="270" r:id="rId16"/>
+    <p:sldId id="271" r:id="rId17"/>
+    <p:sldId id="272" r:id="rId18"/>
+    <p:sldId id="273" r:id="rId19"/>
+    <p:sldId id="274" r:id="rId20"/>
   </p:sldIdLst>
   <p:notesMasterIdLst>
-    <p:notesMasterId r:id="rId14"/>
+    <p:notesMasterId r:id="rId21"/>
   </p:notesMasterIdLst>
   <p:sldSz cx="9144000" cy="5143500"/>
   <p:notesSz cx="5143500" cy="9144000"/>
@@ -801,6 +808,622 @@
             <a:fld id="{F7021451-1387-4CA6-816F-3879F97B5CBC}" type="slidenum">
               <a:rPr lang="en-US"/>
               <a:t>12</a:t>
+            </a:fld>
+            <a:endParaRPr lang="en-US"/>
+          </a:p>
+        </p:txBody>
+      </p:sp>
+    </p:spTree>
+    <p:extLst>
+      <p:ext uri="{BB962C8B-B14F-4D97-AF65-F5344CB8AC3E}">
+        <p14:creationId xmlns:p14="http://schemas.microsoft.com/office/powerpoint/2010/main" val="1024086991"/>
+      </p:ext>
+    </p:extLst>
+  </p:cSld>
+  <p:clrMapOvr>
+    <a:masterClrMapping/>
+  </p:clrMapOvr>
+</p:notes>
+</file>
+
+<file path=ppt/notesSlides/notesSlide13.xml><?xml version="1.0" encoding="utf-8"?>
+<p:notes xmlns:a="http://schemas.openxmlformats.org/drawingml/2006/main" xmlns:r="http://schemas.openxmlformats.org/officeDocument/2006/relationships" xmlns:p="http://schemas.openxmlformats.org/presentationml/2006/main">
+  <p:cSld>
+    <p:spTree>
+      <p:nvGrpSpPr>
+        <p:cNvPr id="1" name=""/>
+        <p:cNvGrpSpPr/>
+        <p:nvPr/>
+      </p:nvGrpSpPr>
+      <p:grpSpPr>
+        <a:xfrm>
+          <a:off x="0" y="0"/>
+          <a:ext cx="0" cy="0"/>
+          <a:chOff x="0" y="0"/>
+          <a:chExt cx="0" cy="0"/>
+        </a:xfrm>
+      </p:grpSpPr>
+      <p:sp>
+        <p:nvSpPr>
+          <p:cNvPr id="2" name="Slide Image Placeholder 1"/>
+          <p:cNvSpPr>
+            <a:spLocks noGrp="1" noRot="1" noChangeAspect="1"/>
+          </p:cNvSpPr>
+          <p:nvPr>
+            <p:ph type="sldImg"/>
+          </p:nvPr>
+        </p:nvSpPr>
+        <p:spPr/>
+      </p:sp>
+      <p:sp>
+        <p:nvSpPr>
+          <p:cNvPr id="3" name="Notes Placeholder 2"/>
+          <p:cNvSpPr>
+            <a:spLocks noGrp="1"/>
+          </p:cNvSpPr>
+          <p:nvPr>
+            <p:ph type="body" idx="1"/>
+          </p:nvPr>
+        </p:nvSpPr>
+        <p:spPr/>
+        <p:txBody>
+          <a:bodyPr/>
+          <a:lstStyle/>
+          <a:p>
+            <a:r>
+              <a:rPr lang="en-US" dirty="0"/>
+              <a:t/>
+            </a:r>
+            <a:endParaRPr lang="en-US" dirty="0"/>
+          </a:p>
+        </p:txBody>
+      </p:sp>
+      <p:sp>
+        <p:nvSpPr>
+          <p:cNvPr id="4" name="Slide Number Placeholder 3"/>
+          <p:cNvSpPr>
+            <a:spLocks noGrp="1"/>
+          </p:cNvSpPr>
+          <p:nvPr>
+            <p:ph type="sldNum" sz="quarter" idx="10"/>
+          </p:nvPr>
+        </p:nvSpPr>
+        <p:spPr/>
+        <p:txBody>
+          <a:bodyPr/>
+          <a:lstStyle/>
+          <a:p>
+            <a:fld id="{F7021451-1387-4CA6-816F-3879F97B5CBC}" type="slidenum">
+              <a:rPr lang="en-US"/>
+              <a:t>13</a:t>
+            </a:fld>
+            <a:endParaRPr lang="en-US"/>
+          </a:p>
+        </p:txBody>
+      </p:sp>
+    </p:spTree>
+    <p:extLst>
+      <p:ext uri="{BB962C8B-B14F-4D97-AF65-F5344CB8AC3E}">
+        <p14:creationId xmlns:p14="http://schemas.microsoft.com/office/powerpoint/2010/main" val="1024086991"/>
+      </p:ext>
+    </p:extLst>
+  </p:cSld>
+  <p:clrMapOvr>
+    <a:masterClrMapping/>
+  </p:clrMapOvr>
+</p:notes>
+</file>
+
+<file path=ppt/notesSlides/notesSlide14.xml><?xml version="1.0" encoding="utf-8"?>
+<p:notes xmlns:a="http://schemas.openxmlformats.org/drawingml/2006/main" xmlns:r="http://schemas.openxmlformats.org/officeDocument/2006/relationships" xmlns:p="http://schemas.openxmlformats.org/presentationml/2006/main">
+  <p:cSld>
+    <p:spTree>
+      <p:nvGrpSpPr>
+        <p:cNvPr id="1" name=""/>
+        <p:cNvGrpSpPr/>
+        <p:nvPr/>
+      </p:nvGrpSpPr>
+      <p:grpSpPr>
+        <a:xfrm>
+          <a:off x="0" y="0"/>
+          <a:ext cx="0" cy="0"/>
+          <a:chOff x="0" y="0"/>
+          <a:chExt cx="0" cy="0"/>
+        </a:xfrm>
+      </p:grpSpPr>
+      <p:sp>
+        <p:nvSpPr>
+          <p:cNvPr id="2" name="Slide Image Placeholder 1"/>
+          <p:cNvSpPr>
+            <a:spLocks noGrp="1" noRot="1" noChangeAspect="1"/>
+          </p:cNvSpPr>
+          <p:nvPr>
+            <p:ph type="sldImg"/>
+          </p:nvPr>
+        </p:nvSpPr>
+        <p:spPr/>
+      </p:sp>
+      <p:sp>
+        <p:nvSpPr>
+          <p:cNvPr id="3" name="Notes Placeholder 2"/>
+          <p:cNvSpPr>
+            <a:spLocks noGrp="1"/>
+          </p:cNvSpPr>
+          <p:nvPr>
+            <p:ph type="body" idx="1"/>
+          </p:nvPr>
+        </p:nvSpPr>
+        <p:spPr/>
+        <p:txBody>
+          <a:bodyPr/>
+          <a:lstStyle/>
+          <a:p>
+            <a:r>
+              <a:rPr lang="en-US" dirty="0"/>
+              <a:t/>
+            </a:r>
+            <a:endParaRPr lang="en-US" dirty="0"/>
+          </a:p>
+        </p:txBody>
+      </p:sp>
+      <p:sp>
+        <p:nvSpPr>
+          <p:cNvPr id="4" name="Slide Number Placeholder 3"/>
+          <p:cNvSpPr>
+            <a:spLocks noGrp="1"/>
+          </p:cNvSpPr>
+          <p:nvPr>
+            <p:ph type="sldNum" sz="quarter" idx="10"/>
+          </p:nvPr>
+        </p:nvSpPr>
+        <p:spPr/>
+        <p:txBody>
+          <a:bodyPr/>
+          <a:lstStyle/>
+          <a:p>
+            <a:fld id="{F7021451-1387-4CA6-816F-3879F97B5CBC}" type="slidenum">
+              <a:rPr lang="en-US"/>
+              <a:t>14</a:t>
+            </a:fld>
+            <a:endParaRPr lang="en-US"/>
+          </a:p>
+        </p:txBody>
+      </p:sp>
+    </p:spTree>
+    <p:extLst>
+      <p:ext uri="{BB962C8B-B14F-4D97-AF65-F5344CB8AC3E}">
+        <p14:creationId xmlns:p14="http://schemas.microsoft.com/office/powerpoint/2010/main" val="1024086991"/>
+      </p:ext>
+    </p:extLst>
+  </p:cSld>
+  <p:clrMapOvr>
+    <a:masterClrMapping/>
+  </p:clrMapOvr>
+</p:notes>
+</file>
+
+<file path=ppt/notesSlides/notesSlide15.xml><?xml version="1.0" encoding="utf-8"?>
+<p:notes xmlns:a="http://schemas.openxmlformats.org/drawingml/2006/main" xmlns:r="http://schemas.openxmlformats.org/officeDocument/2006/relationships" xmlns:p="http://schemas.openxmlformats.org/presentationml/2006/main">
+  <p:cSld>
+    <p:spTree>
+      <p:nvGrpSpPr>
+        <p:cNvPr id="1" name=""/>
+        <p:cNvGrpSpPr/>
+        <p:nvPr/>
+      </p:nvGrpSpPr>
+      <p:grpSpPr>
+        <a:xfrm>
+          <a:off x="0" y="0"/>
+          <a:ext cx="0" cy="0"/>
+          <a:chOff x="0" y="0"/>
+          <a:chExt cx="0" cy="0"/>
+        </a:xfrm>
+      </p:grpSpPr>
+      <p:sp>
+        <p:nvSpPr>
+          <p:cNvPr id="2" name="Slide Image Placeholder 1"/>
+          <p:cNvSpPr>
+            <a:spLocks noGrp="1" noRot="1" noChangeAspect="1"/>
+          </p:cNvSpPr>
+          <p:nvPr>
+            <p:ph type="sldImg"/>
+          </p:nvPr>
+        </p:nvSpPr>
+        <p:spPr/>
+      </p:sp>
+      <p:sp>
+        <p:nvSpPr>
+          <p:cNvPr id="3" name="Notes Placeholder 2"/>
+          <p:cNvSpPr>
+            <a:spLocks noGrp="1"/>
+          </p:cNvSpPr>
+          <p:nvPr>
+            <p:ph type="body" idx="1"/>
+          </p:nvPr>
+        </p:nvSpPr>
+        <p:spPr/>
+        <p:txBody>
+          <a:bodyPr/>
+          <a:lstStyle/>
+          <a:p>
+            <a:r>
+              <a:rPr lang="en-US" dirty="0"/>
+              <a:t/>
+            </a:r>
+            <a:endParaRPr lang="en-US" dirty="0"/>
+          </a:p>
+        </p:txBody>
+      </p:sp>
+      <p:sp>
+        <p:nvSpPr>
+          <p:cNvPr id="4" name="Slide Number Placeholder 3"/>
+          <p:cNvSpPr>
+            <a:spLocks noGrp="1"/>
+          </p:cNvSpPr>
+          <p:nvPr>
+            <p:ph type="sldNum" sz="quarter" idx="10"/>
+          </p:nvPr>
+        </p:nvSpPr>
+        <p:spPr/>
+        <p:txBody>
+          <a:bodyPr/>
+          <a:lstStyle/>
+          <a:p>
+            <a:fld id="{F7021451-1387-4CA6-816F-3879F97B5CBC}" type="slidenum">
+              <a:rPr lang="en-US"/>
+              <a:t>15</a:t>
+            </a:fld>
+            <a:endParaRPr lang="en-US"/>
+          </a:p>
+        </p:txBody>
+      </p:sp>
+    </p:spTree>
+    <p:extLst>
+      <p:ext uri="{BB962C8B-B14F-4D97-AF65-F5344CB8AC3E}">
+        <p14:creationId xmlns:p14="http://schemas.microsoft.com/office/powerpoint/2010/main" val="1024086991"/>
+      </p:ext>
+    </p:extLst>
+  </p:cSld>
+  <p:clrMapOvr>
+    <a:masterClrMapping/>
+  </p:clrMapOvr>
+</p:notes>
+</file>
+
+<file path=ppt/notesSlides/notesSlide16.xml><?xml version="1.0" encoding="utf-8"?>
+<p:notes xmlns:a="http://schemas.openxmlformats.org/drawingml/2006/main" xmlns:r="http://schemas.openxmlformats.org/officeDocument/2006/relationships" xmlns:p="http://schemas.openxmlformats.org/presentationml/2006/main">
+  <p:cSld>
+    <p:spTree>
+      <p:nvGrpSpPr>
+        <p:cNvPr id="1" name=""/>
+        <p:cNvGrpSpPr/>
+        <p:nvPr/>
+      </p:nvGrpSpPr>
+      <p:grpSpPr>
+        <a:xfrm>
+          <a:off x="0" y="0"/>
+          <a:ext cx="0" cy="0"/>
+          <a:chOff x="0" y="0"/>
+          <a:chExt cx="0" cy="0"/>
+        </a:xfrm>
+      </p:grpSpPr>
+      <p:sp>
+        <p:nvSpPr>
+          <p:cNvPr id="2" name="Slide Image Placeholder 1"/>
+          <p:cNvSpPr>
+            <a:spLocks noGrp="1" noRot="1" noChangeAspect="1"/>
+          </p:cNvSpPr>
+          <p:nvPr>
+            <p:ph type="sldImg"/>
+          </p:nvPr>
+        </p:nvSpPr>
+        <p:spPr/>
+      </p:sp>
+      <p:sp>
+        <p:nvSpPr>
+          <p:cNvPr id="3" name="Notes Placeholder 2"/>
+          <p:cNvSpPr>
+            <a:spLocks noGrp="1"/>
+          </p:cNvSpPr>
+          <p:nvPr>
+            <p:ph type="body" idx="1"/>
+          </p:nvPr>
+        </p:nvSpPr>
+        <p:spPr/>
+        <p:txBody>
+          <a:bodyPr/>
+          <a:lstStyle/>
+          <a:p>
+            <a:r>
+              <a:rPr lang="en-US" dirty="0"/>
+              <a:t/>
+            </a:r>
+            <a:endParaRPr lang="en-US" dirty="0"/>
+          </a:p>
+        </p:txBody>
+      </p:sp>
+      <p:sp>
+        <p:nvSpPr>
+          <p:cNvPr id="4" name="Slide Number Placeholder 3"/>
+          <p:cNvSpPr>
+            <a:spLocks noGrp="1"/>
+          </p:cNvSpPr>
+          <p:nvPr>
+            <p:ph type="sldNum" sz="quarter" idx="10"/>
+          </p:nvPr>
+        </p:nvSpPr>
+        <p:spPr/>
+        <p:txBody>
+          <a:bodyPr/>
+          <a:lstStyle/>
+          <a:p>
+            <a:fld id="{F7021451-1387-4CA6-816F-3879F97B5CBC}" type="slidenum">
+              <a:rPr lang="en-US"/>
+              <a:t>16</a:t>
+            </a:fld>
+            <a:endParaRPr lang="en-US"/>
+          </a:p>
+        </p:txBody>
+      </p:sp>
+    </p:spTree>
+    <p:extLst>
+      <p:ext uri="{BB962C8B-B14F-4D97-AF65-F5344CB8AC3E}">
+        <p14:creationId xmlns:p14="http://schemas.microsoft.com/office/powerpoint/2010/main" val="1024086991"/>
+      </p:ext>
+    </p:extLst>
+  </p:cSld>
+  <p:clrMapOvr>
+    <a:masterClrMapping/>
+  </p:clrMapOvr>
+</p:notes>
+</file>
+
+<file path=ppt/notesSlides/notesSlide17.xml><?xml version="1.0" encoding="utf-8"?>
+<p:notes xmlns:a="http://schemas.openxmlformats.org/drawingml/2006/main" xmlns:r="http://schemas.openxmlformats.org/officeDocument/2006/relationships" xmlns:p="http://schemas.openxmlformats.org/presentationml/2006/main">
+  <p:cSld>
+    <p:spTree>
+      <p:nvGrpSpPr>
+        <p:cNvPr id="1" name=""/>
+        <p:cNvGrpSpPr/>
+        <p:nvPr/>
+      </p:nvGrpSpPr>
+      <p:grpSpPr>
+        <a:xfrm>
+          <a:off x="0" y="0"/>
+          <a:ext cx="0" cy="0"/>
+          <a:chOff x="0" y="0"/>
+          <a:chExt cx="0" cy="0"/>
+        </a:xfrm>
+      </p:grpSpPr>
+      <p:sp>
+        <p:nvSpPr>
+          <p:cNvPr id="2" name="Slide Image Placeholder 1"/>
+          <p:cNvSpPr>
+            <a:spLocks noGrp="1" noRot="1" noChangeAspect="1"/>
+          </p:cNvSpPr>
+          <p:nvPr>
+            <p:ph type="sldImg"/>
+          </p:nvPr>
+        </p:nvSpPr>
+        <p:spPr/>
+      </p:sp>
+      <p:sp>
+        <p:nvSpPr>
+          <p:cNvPr id="3" name="Notes Placeholder 2"/>
+          <p:cNvSpPr>
+            <a:spLocks noGrp="1"/>
+          </p:cNvSpPr>
+          <p:nvPr>
+            <p:ph type="body" idx="1"/>
+          </p:nvPr>
+        </p:nvSpPr>
+        <p:spPr/>
+        <p:txBody>
+          <a:bodyPr/>
+          <a:lstStyle/>
+          <a:p>
+            <a:r>
+              <a:rPr lang="en-US" dirty="0"/>
+              <a:t/>
+            </a:r>
+            <a:endParaRPr lang="en-US" dirty="0"/>
+          </a:p>
+        </p:txBody>
+      </p:sp>
+      <p:sp>
+        <p:nvSpPr>
+          <p:cNvPr id="4" name="Slide Number Placeholder 3"/>
+          <p:cNvSpPr>
+            <a:spLocks noGrp="1"/>
+          </p:cNvSpPr>
+          <p:nvPr>
+            <p:ph type="sldNum" sz="quarter" idx="10"/>
+          </p:nvPr>
+        </p:nvSpPr>
+        <p:spPr/>
+        <p:txBody>
+          <a:bodyPr/>
+          <a:lstStyle/>
+          <a:p>
+            <a:fld id="{F7021451-1387-4CA6-816F-3879F97B5CBC}" type="slidenum">
+              <a:rPr lang="en-US"/>
+              <a:t>17</a:t>
+            </a:fld>
+            <a:endParaRPr lang="en-US"/>
+          </a:p>
+        </p:txBody>
+      </p:sp>
+    </p:spTree>
+    <p:extLst>
+      <p:ext uri="{BB962C8B-B14F-4D97-AF65-F5344CB8AC3E}">
+        <p14:creationId xmlns:p14="http://schemas.microsoft.com/office/powerpoint/2010/main" val="1024086991"/>
+      </p:ext>
+    </p:extLst>
+  </p:cSld>
+  <p:clrMapOvr>
+    <a:masterClrMapping/>
+  </p:clrMapOvr>
+</p:notes>
+</file>
+
+<file path=ppt/notesSlides/notesSlide18.xml><?xml version="1.0" encoding="utf-8"?>
+<p:notes xmlns:a="http://schemas.openxmlformats.org/drawingml/2006/main" xmlns:r="http://schemas.openxmlformats.org/officeDocument/2006/relationships" xmlns:p="http://schemas.openxmlformats.org/presentationml/2006/main">
+  <p:cSld>
+    <p:spTree>
+      <p:nvGrpSpPr>
+        <p:cNvPr id="1" name=""/>
+        <p:cNvGrpSpPr/>
+        <p:nvPr/>
+      </p:nvGrpSpPr>
+      <p:grpSpPr>
+        <a:xfrm>
+          <a:off x="0" y="0"/>
+          <a:ext cx="0" cy="0"/>
+          <a:chOff x="0" y="0"/>
+          <a:chExt cx="0" cy="0"/>
+        </a:xfrm>
+      </p:grpSpPr>
+      <p:sp>
+        <p:nvSpPr>
+          <p:cNvPr id="2" name="Slide Image Placeholder 1"/>
+          <p:cNvSpPr>
+            <a:spLocks noGrp="1" noRot="1" noChangeAspect="1"/>
+          </p:cNvSpPr>
+          <p:nvPr>
+            <p:ph type="sldImg"/>
+          </p:nvPr>
+        </p:nvSpPr>
+        <p:spPr/>
+      </p:sp>
+      <p:sp>
+        <p:nvSpPr>
+          <p:cNvPr id="3" name="Notes Placeholder 2"/>
+          <p:cNvSpPr>
+            <a:spLocks noGrp="1"/>
+          </p:cNvSpPr>
+          <p:nvPr>
+            <p:ph type="body" idx="1"/>
+          </p:nvPr>
+        </p:nvSpPr>
+        <p:spPr/>
+        <p:txBody>
+          <a:bodyPr/>
+          <a:lstStyle/>
+          <a:p>
+            <a:r>
+              <a:rPr lang="en-US" dirty="0"/>
+              <a:t/>
+            </a:r>
+            <a:endParaRPr lang="en-US" dirty="0"/>
+          </a:p>
+        </p:txBody>
+      </p:sp>
+      <p:sp>
+        <p:nvSpPr>
+          <p:cNvPr id="4" name="Slide Number Placeholder 3"/>
+          <p:cNvSpPr>
+            <a:spLocks noGrp="1"/>
+          </p:cNvSpPr>
+          <p:nvPr>
+            <p:ph type="sldNum" sz="quarter" idx="10"/>
+          </p:nvPr>
+        </p:nvSpPr>
+        <p:spPr/>
+        <p:txBody>
+          <a:bodyPr/>
+          <a:lstStyle/>
+          <a:p>
+            <a:fld id="{F7021451-1387-4CA6-816F-3879F97B5CBC}" type="slidenum">
+              <a:rPr lang="en-US"/>
+              <a:t>18</a:t>
+            </a:fld>
+            <a:endParaRPr lang="en-US"/>
+          </a:p>
+        </p:txBody>
+      </p:sp>
+    </p:spTree>
+    <p:extLst>
+      <p:ext uri="{BB962C8B-B14F-4D97-AF65-F5344CB8AC3E}">
+        <p14:creationId xmlns:p14="http://schemas.microsoft.com/office/powerpoint/2010/main" val="1024086991"/>
+      </p:ext>
+    </p:extLst>
+  </p:cSld>
+  <p:clrMapOvr>
+    <a:masterClrMapping/>
+  </p:clrMapOvr>
+</p:notes>
+</file>
+
+<file path=ppt/notesSlides/notesSlide19.xml><?xml version="1.0" encoding="utf-8"?>
+<p:notes xmlns:a="http://schemas.openxmlformats.org/drawingml/2006/main" xmlns:r="http://schemas.openxmlformats.org/officeDocument/2006/relationships" xmlns:p="http://schemas.openxmlformats.org/presentationml/2006/main">
+  <p:cSld>
+    <p:spTree>
+      <p:nvGrpSpPr>
+        <p:cNvPr id="1" name=""/>
+        <p:cNvGrpSpPr/>
+        <p:nvPr/>
+      </p:nvGrpSpPr>
+      <p:grpSpPr>
+        <a:xfrm>
+          <a:off x="0" y="0"/>
+          <a:ext cx="0" cy="0"/>
+          <a:chOff x="0" y="0"/>
+          <a:chExt cx="0" cy="0"/>
+        </a:xfrm>
+      </p:grpSpPr>
+      <p:sp>
+        <p:nvSpPr>
+          <p:cNvPr id="2" name="Slide Image Placeholder 1"/>
+          <p:cNvSpPr>
+            <a:spLocks noGrp="1" noRot="1" noChangeAspect="1"/>
+          </p:cNvSpPr>
+          <p:nvPr>
+            <p:ph type="sldImg"/>
+          </p:nvPr>
+        </p:nvSpPr>
+        <p:spPr/>
+      </p:sp>
+      <p:sp>
+        <p:nvSpPr>
+          <p:cNvPr id="3" name="Notes Placeholder 2"/>
+          <p:cNvSpPr>
+            <a:spLocks noGrp="1"/>
+          </p:cNvSpPr>
+          <p:nvPr>
+            <p:ph type="body" idx="1"/>
+          </p:nvPr>
+        </p:nvSpPr>
+        <p:spPr/>
+        <p:txBody>
+          <a:bodyPr/>
+          <a:lstStyle/>
+          <a:p>
+            <a:r>
+              <a:rPr lang="en-US" dirty="0"/>
+              <a:t/>
+            </a:r>
+            <a:endParaRPr lang="en-US" dirty="0"/>
+          </a:p>
+        </p:txBody>
+      </p:sp>
+      <p:sp>
+        <p:nvSpPr>
+          <p:cNvPr id="4" name="Slide Number Placeholder 3"/>
+          <p:cNvSpPr>
+            <a:spLocks noGrp="1"/>
+          </p:cNvSpPr>
+          <p:nvPr>
+            <p:ph type="sldNum" sz="quarter" idx="10"/>
+          </p:nvPr>
+        </p:nvSpPr>
+        <p:spPr/>
+        <p:txBody>
+          <a:bodyPr/>
+          <a:lstStyle/>
+          <a:p>
+            <a:fld id="{F7021451-1387-4CA6-816F-3879F97B5CBC}" type="slidenum">
+              <a:rPr lang="en-US"/>
+              <a:t>19</a:t>
             </a:fld>
             <a:endParaRPr lang="en-US"/>
           </a:p>
@@ -2166,148 +2789,6 @@
         </p:nvSpPr>
         <p:spPr>
           <a:xfrm>
-            <a:off x="406301" y="1223963"/>
-            <a:ext cx="8498026" cy="274290"/>
-          </a:xfrm>
-          <a:prstGeom prst="rect">
-            <a:avLst/>
-          </a:prstGeom>
-          <a:noFill/>
-          <a:ln/>
-        </p:spPr>
-        <p:txBody>
-          <a:bodyPr wrap="square" lIns="0" tIns="0" rIns="0" bIns="0" rtlCol="0" anchor="t"/>
-          <a:lstStyle/>
-          <a:p>
-            <a:pPr algn="l" indent="0" marL="0">
-              <a:lnSpc>
-                <a:spcPts val="2160"/>
-              </a:lnSpc>
-              <a:spcBef>
-                <a:spcPts val="600"/>
-              </a:spcBef>
-              <a:spcAft>
-                <a:spcPts val="800"/>
-              </a:spcAft>
-              <a:buNone/>
-            </a:pPr>
-            <a:r>
-              <a:rPr lang="en-US" sz="1800" b="1" dirty="0">
-                <a:solidFill>
-                  <a:srgbClr val="FE4447"/>
-                </a:solidFill>
-                <a:latin typeface="Georgia" pitchFamily="34" charset="0"/>
-                <a:ea typeface="Georgia" pitchFamily="34" charset="-122"/>
-                <a:cs typeface="Georgia" pitchFamily="34" charset="-120"/>
-              </a:rPr>
-              <a:t>Learning objective</a:t>
-            </a:r>
-            <a:endParaRPr lang="en-US" sz="1800" dirty="0"/>
-          </a:p>
-        </p:txBody>
-      </p:sp>
-      <p:sp>
-        <p:nvSpPr>
-          <p:cNvPr id="6" name="Text 4"/>
-          <p:cNvSpPr/>
-          <p:nvPr/>
-        </p:nvSpPr>
-        <p:spPr>
-          <a:xfrm>
-            <a:off x="406301" y="1637854"/>
-            <a:ext cx="8498026" cy="426541"/>
-          </a:xfrm>
-          <a:prstGeom prst="rect">
-            <a:avLst/>
-          </a:prstGeom>
-          <a:noFill/>
-          <a:ln/>
-        </p:spPr>
-        <p:txBody>
-          <a:bodyPr wrap="square" lIns="0" tIns="0" rIns="0" bIns="0" rtlCol="0" anchor="t"/>
-          <a:lstStyle/>
-          <a:p>
-            <a:pPr algn="l" indent="0" marL="0">
-              <a:lnSpc>
-                <a:spcPts val="1680"/>
-              </a:lnSpc>
-              <a:spcBef>
-                <a:spcPts val="300"/>
-              </a:spcBef>
-              <a:spcAft>
-                <a:spcPts val="300"/>
-              </a:spcAft>
-              <a:buNone/>
-            </a:pPr>
-            <a:r>
-              <a:rPr lang="en-US" sz="1200" dirty="0">
-                <a:solidFill>
-                  <a:srgbClr val="1C2833"/>
-                </a:solidFill>
-                <a:latin typeface="Arial" pitchFamily="34" charset="0"/>
-                <a:ea typeface="Arial" pitchFamily="34" charset="-122"/>
-                <a:cs typeface="Arial" pitchFamily="34" charset="-120"/>
-              </a:rPr>
-              <a:t>By the end of this lesson, students will (a) place Nārāyaṇa Paṇḍita (14th c. CE) in the chronology of Indian mathematics, (b) describe what the </a:t>
-            </a:r>
-            <a:pPr algn="l" indent="0" marL="0">
-              <a:lnSpc>
-                <a:spcPts val="1680"/>
-              </a:lnSpc>
-              <a:spcBef>
-                <a:spcPts val="300"/>
-              </a:spcBef>
-              <a:spcAft>
-                <a:spcPts val="300"/>
-              </a:spcAft>
-              <a:buNone/>
-            </a:pPr>
-            <a:r>
-              <a:rPr lang="en-US" sz="1200" i="1" dirty="0">
-                <a:solidFill>
-                  <a:srgbClr val="1C2833"/>
-                </a:solidFill>
-                <a:latin typeface="Arial" pitchFamily="34" charset="0"/>
-                <a:ea typeface="Arial" pitchFamily="34" charset="-122"/>
-                <a:cs typeface="Arial" pitchFamily="34" charset="-120"/>
-              </a:rPr>
-              <a:t>Gaṇita-kaumudī</a:t>
-            </a:r>
-            <a:pPr algn="l" indent="0" marL="0">
-              <a:lnSpc>
-                <a:spcPts val="1680"/>
-              </a:lnSpc>
-              <a:spcBef>
-                <a:spcPts val="300"/>
-              </a:spcBef>
-              <a:spcAft>
-                <a:spcPts val="300"/>
-              </a:spcAft>
-              <a:buNone/>
-            </a:pPr>
-            <a:r>
-              <a:rPr lang="en-US" sz="1200" dirty="0">
-                <a:solidFill>
-                  <a:srgbClr val="1C2833"/>
-                </a:solidFill>
-                <a:latin typeface="Arial" pitchFamily="34" charset="0"/>
-                <a:ea typeface="Arial" pitchFamily="34" charset="-122"/>
-                <a:cs typeface="Arial" pitchFamily="34" charset="-120"/>
-              </a:rPr>
-              <a:t> covers, and (c) write a short reflection on why systematic written method matters.</a:t>
-            </a:r>
-            <a:endParaRPr lang="en-US" sz="1200" dirty="0"/>
-          </a:p>
-        </p:txBody>
-      </p:sp>
-      <p:sp>
-        <p:nvSpPr>
-          <p:cNvPr id="7" name="Text 5"/>
-          <p:cNvSpPr/>
-          <p:nvPr/>
-        </p:nvSpPr>
-        <p:spPr>
-          <a:xfrm>
             <a:off x="406301" y="4434929"/>
             <a:ext cx="8498026" cy="213271"/>
           </a:xfrm>
@@ -2452,7 +2933,7 @@
                 <a:ea typeface="Georgia" pitchFamily="34" charset="-122"/>
                 <a:cs typeface="Georgia" pitchFamily="34" charset="-120"/>
               </a:rPr>
-              <a:t>Differentiation</a:t>
+              <a:t>Core (20 min) (cont.)</a:t>
             </a:r>
             <a:endParaRPr lang="en-US" sz="1800" dirty="0"/>
           </a:p>
@@ -2467,7 +2948,7 @@
         <p:spPr>
           <a:xfrm>
             <a:off x="634901" y="883593"/>
-            <a:ext cx="8102798" cy="731341"/>
+            <a:ext cx="8102798" cy="1988344"/>
           </a:xfrm>
           <a:prstGeom prst="rect">
             <a:avLst/>
@@ -2490,26 +2971,6 @@
               <a:buChar char="•"/>
             </a:pPr>
             <a:r>
-              <a:rPr lang="en-US" sz="1200" b="1" dirty="0">
-                <a:solidFill>
-                  <a:srgbClr val="1C2833"/>
-                </a:solidFill>
-                <a:latin typeface="Arial" pitchFamily="34" charset="0"/>
-                <a:ea typeface="Arial" pitchFamily="34" charset="-122"/>
-                <a:cs typeface="Arial" pitchFamily="34" charset="-120"/>
-              </a:rPr>
-              <a:t>One tier up:</a:t>
-            </a:r>
-            <a:pPr algn="l" indent="0" marL="0">
-              <a:lnSpc>
-                <a:spcPts val="1620"/>
-              </a:lnSpc>
-              <a:spcAft>
-                <a:spcPts val="300"/>
-              </a:spcAft>
-              <a:buNone/>
-            </a:pPr>
-            <a:r>
               <a:rPr lang="en-US" sz="1200" dirty="0">
                 <a:solidFill>
                   <a:srgbClr val="1C2833"/>
@@ -2518,7 +2979,7 @@
                 <a:ea typeface="Arial" pitchFamily="34" charset="-122"/>
                 <a:cs typeface="Arial" pitchFamily="34" charset="-120"/>
               </a:rPr>
-              <a:t> Compare Nārāyaṇa to Bhāskara II (~1150 CE). What did Bhāskara cover that Nārāyaṇa didn't? Vice versa? (Bhāskara: calculus precursors, planetary motion. Nārāyaṇa: combinatorics, magic squares.)</a:t>
+              <a:t>Book 1–3: arithmetic (basic operations, fractions)</a:t>
             </a:r>
             <a:endParaRPr lang="en-US" sz="1200" dirty="0"/>
           </a:p>
@@ -2534,24 +2995,28 @@
               <a:buChar char="•"/>
             </a:pPr>
             <a:r>
-              <a:rPr lang="en-US" sz="1200" b="1" dirty="0">
-                <a:solidFill>
-                  <a:srgbClr val="1C2833"/>
-                </a:solidFill>
-                <a:latin typeface="Arial" pitchFamily="34" charset="0"/>
-                <a:ea typeface="Arial" pitchFamily="34" charset="-122"/>
-                <a:cs typeface="Arial" pitchFamily="34" charset="-120"/>
-              </a:rPr>
-              <a:t>One tier down:</a:t>
-            </a:r>
-            <a:pPr algn="l" indent="0" marL="0">
+              <a:rPr lang="en-US" sz="1200" dirty="0">
+                <a:solidFill>
+                  <a:srgbClr val="1C2833"/>
+                </a:solidFill>
+                <a:latin typeface="Arial" pitchFamily="34" charset="0"/>
+                <a:ea typeface="Arial" pitchFamily="34" charset="-122"/>
+                <a:cs typeface="Arial" pitchFamily="34" charset="-120"/>
+              </a:rPr>
+              <a:t>Book 4–6: ratios, percentage problems, alligation</a:t>
+            </a:r>
+            <a:endParaRPr lang="en-US" sz="1200" dirty="0"/>
+          </a:p>
+          <a:p>
+            <a:pPr algn="l" marL="342900" indent="-342900">
               <a:lnSpc>
                 <a:spcPts val="1620"/>
               </a:lnSpc>
               <a:spcAft>
                 <a:spcPts val="300"/>
               </a:spcAft>
-              <a:buNone/>
+              <a:buSzPct val="100000"/>
+              <a:buChar char="•"/>
             </a:pPr>
             <a:r>
               <a:rPr lang="en-US" sz="1200" dirty="0">
@@ -2562,7 +3027,196 @@
                 <a:ea typeface="Arial" pitchFamily="34" charset="-122"/>
                 <a:cs typeface="Arial" pitchFamily="34" charset="-120"/>
               </a:rPr>
-              <a:t> Write just 3–4 sentences. Focus on the "rule vs. example" distinction.</a:t>
+              <a:t>Book 7–8: progressions and series</a:t>
+            </a:r>
+            <a:endParaRPr lang="en-US" sz="1200" dirty="0"/>
+          </a:p>
+          <a:p>
+            <a:pPr algn="l" marL="342900" indent="-342900">
+              <a:lnSpc>
+                <a:spcPts val="1620"/>
+              </a:lnSpc>
+              <a:spcAft>
+                <a:spcPts val="300"/>
+              </a:spcAft>
+              <a:buSzPct val="100000"/>
+              <a:buChar char="•"/>
+            </a:pPr>
+            <a:r>
+              <a:rPr lang="en-US" sz="1200" dirty="0">
+                <a:solidFill>
+                  <a:srgbClr val="1C2833"/>
+                </a:solidFill>
+                <a:latin typeface="Arial" pitchFamily="34" charset="0"/>
+                <a:ea typeface="Arial" pitchFamily="34" charset="-122"/>
+                <a:cs typeface="Arial" pitchFamily="34" charset="-120"/>
+              </a:rPr>
+              <a:t>Book 9: combinatorics (permutations, partitions — Nārāyaṇa was a pioneer here)</a:t>
+            </a:r>
+            <a:endParaRPr lang="en-US" sz="1200" dirty="0"/>
+          </a:p>
+          <a:p>
+            <a:pPr algn="l" marL="342900" indent="-342900">
+              <a:lnSpc>
+                <a:spcPts val="1620"/>
+              </a:lnSpc>
+              <a:spcAft>
+                <a:spcPts val="300"/>
+              </a:spcAft>
+              <a:buSzPct val="100000"/>
+              <a:buChar char="•"/>
+            </a:pPr>
+            <a:r>
+              <a:rPr lang="en-US" sz="1200" dirty="0">
+                <a:solidFill>
+                  <a:srgbClr val="1C2833"/>
+                </a:solidFill>
+                <a:latin typeface="Arial" pitchFamily="34" charset="0"/>
+                <a:ea typeface="Arial" pitchFamily="34" charset="-122"/>
+                <a:cs typeface="Arial" pitchFamily="34" charset="-120"/>
+              </a:rPr>
+              <a:t>Book 10–11: geometry of plane figures and solids</a:t>
+            </a:r>
+            <a:endParaRPr lang="en-US" sz="1200" dirty="0"/>
+          </a:p>
+          <a:p>
+            <a:pPr algn="l" marL="342900" indent="-342900">
+              <a:lnSpc>
+                <a:spcPts val="1620"/>
+              </a:lnSpc>
+              <a:spcAft>
+                <a:spcPts val="300"/>
+              </a:spcAft>
+              <a:buSzPct val="100000"/>
+              <a:buChar char="•"/>
+            </a:pPr>
+            <a:r>
+              <a:rPr lang="en-US" sz="1200" dirty="0">
+                <a:solidFill>
+                  <a:srgbClr val="1C2833"/>
+                </a:solidFill>
+                <a:latin typeface="Arial" pitchFamily="34" charset="0"/>
+                <a:ea typeface="Arial" pitchFamily="34" charset="-122"/>
+                <a:cs typeface="Arial" pitchFamily="34" charset="-120"/>
+              </a:rPr>
+              <a:t>Book 12: triangular and figurate numbers</a:t>
+            </a:r>
+            <a:endParaRPr lang="en-US" sz="1200" dirty="0"/>
+          </a:p>
+          <a:p>
+            <a:pPr algn="l" marL="342900" indent="-342900">
+              <a:lnSpc>
+                <a:spcPts val="1620"/>
+              </a:lnSpc>
+              <a:spcAft>
+                <a:spcPts val="300"/>
+              </a:spcAft>
+              <a:buSzPct val="100000"/>
+              <a:buChar char="•"/>
+            </a:pPr>
+            <a:r>
+              <a:rPr lang="en-US" sz="1200" dirty="0">
+                <a:solidFill>
+                  <a:srgbClr val="1C2833"/>
+                </a:solidFill>
+                <a:latin typeface="Arial" pitchFamily="34" charset="0"/>
+                <a:ea typeface="Arial" pitchFamily="34" charset="-122"/>
+                <a:cs typeface="Arial" pitchFamily="34" charset="-120"/>
+              </a:rPr>
+              <a:t>Book 13: practical problems (e.g. dilution of milk, mixture problems)</a:t>
+            </a:r>
+            <a:endParaRPr lang="en-US" sz="1200" dirty="0"/>
+          </a:p>
+          <a:p>
+            <a:pPr algn="l" marL="342900" indent="-342900">
+              <a:lnSpc>
+                <a:spcPts val="1620"/>
+              </a:lnSpc>
+              <a:spcAft>
+                <a:spcPts val="300"/>
+              </a:spcAft>
+              <a:buSzPct val="100000"/>
+              <a:buChar char="•"/>
+            </a:pPr>
+            <a:pPr algn="l" indent="0" marL="0">
+              <a:lnSpc>
+                <a:spcPts val="1620"/>
+              </a:lnSpc>
+              <a:spcAft>
+                <a:spcPts val="300"/>
+              </a:spcAft>
+              <a:buNone/>
+            </a:pPr>
+            <a:r>
+              <a:rPr lang="en-US" sz="1200" i="1" dirty="0">
+                <a:solidFill>
+                  <a:srgbClr val="1C2833"/>
+                </a:solidFill>
+                <a:latin typeface="Arial" pitchFamily="34" charset="0"/>
+                <a:ea typeface="Arial" pitchFamily="34" charset="-122"/>
+                <a:cs typeface="Arial" pitchFamily="34" charset="-120"/>
+              </a:rPr>
+              <a:t>Book 14:</a:t>
+            </a:r>
+            <a:pPr algn="l" indent="0" marL="0">
+              <a:lnSpc>
+                <a:spcPts val="1620"/>
+              </a:lnSpc>
+              <a:spcAft>
+                <a:spcPts val="300"/>
+              </a:spcAft>
+              <a:buNone/>
+            </a:pPr>
+            <a:r>
+              <a:rPr lang="en-US" sz="1200" dirty="0">
+                <a:solidFill>
+                  <a:srgbClr val="1C2833"/>
+                </a:solidFill>
+                <a:latin typeface="Arial" pitchFamily="34" charset="0"/>
+                <a:ea typeface="Arial" pitchFamily="34" charset="-122"/>
+                <a:cs typeface="Arial" pitchFamily="34" charset="-120"/>
+              </a:rPr>
+              <a:t>Bhadragaṇita</a:t>
+            </a:r>
+            <a:pPr algn="l" indent="0" marL="0">
+              <a:lnSpc>
+                <a:spcPts val="1620"/>
+              </a:lnSpc>
+              <a:spcAft>
+                <a:spcPts val="300"/>
+              </a:spcAft>
+              <a:buNone/>
+            </a:pPr>
+            <a:r>
+              <a:rPr lang="en-US" sz="1200" i="1" dirty="0">
+                <a:solidFill>
+                  <a:srgbClr val="1C2833"/>
+                </a:solidFill>
+                <a:latin typeface="Arial" pitchFamily="34" charset="0"/>
+                <a:ea typeface="Arial" pitchFamily="34" charset="-122"/>
+                <a:cs typeface="Arial" pitchFamily="34" charset="-120"/>
+              </a:rPr>
+              <a:t> — magic squares</a:t>
+            </a:r>
+            <a:pPr algn="l" indent="0" marL="0">
+              <a:lnSpc>
+                <a:spcPts val="1620"/>
+              </a:lnSpc>
+              <a:spcAft>
+                <a:spcPts val="300"/>
+              </a:spcAft>
+              <a:buNone/>
+            </a:pPr>
+            <a:r>
+              <a:rPr lang="en-US" sz="1200" dirty="0">
+                <a:solidFill>
+                  <a:srgbClr val="1C2833"/>
+                </a:solidFill>
+                <a:latin typeface="Arial" pitchFamily="34" charset="0"/>
+                <a:ea typeface="Arial" pitchFamily="34" charset="-122"/>
+                <a:cs typeface="Arial" pitchFamily="34" charset="-120"/>
+              </a:rPr>
+              <a:t>*</a:t>
             </a:r>
             <a:endParaRPr lang="en-US" sz="1200" dirty="0"/>
           </a:p>
@@ -2720,7 +3374,7 @@
                 <a:ea typeface="Georgia" pitchFamily="34" charset="-122"/>
                 <a:cs typeface="Georgia" pitchFamily="34" charset="-120"/>
               </a:rPr>
-              <a:t>Teacher notes</a:t>
+              <a:t>Core (20 min) (cont.)</a:t>
             </a:r>
             <a:endParaRPr lang="en-US" sz="1800" dirty="0"/>
           </a:p>
@@ -2735,7 +3389,7 @@
         <p:spPr>
           <a:xfrm>
             <a:off x="406301" y="870942"/>
-            <a:ext cx="8498026" cy="1066354"/>
+            <a:ext cx="8498026" cy="426541"/>
           </a:xfrm>
           <a:prstGeom prst="rect">
             <a:avLst/>
@@ -2760,6 +3414,72 @@
               <a:buNone/>
             </a:pPr>
             <a:r>
+              <a:rPr lang="en-US" sz="1200" i="1" dirty="0">
+                <a:solidFill>
+                  <a:srgbClr val="1C2833"/>
+                </a:solidFill>
+                <a:latin typeface="Arial" pitchFamily="34" charset="0"/>
+                <a:ea typeface="Arial" pitchFamily="34" charset="-122"/>
+                <a:cs typeface="Arial" pitchFamily="34" charset="-120"/>
+              </a:rPr>
+              <a:t>"The treatise is comprehensive — it isn't only about magic squares. But the magic-square book is the longest and most systematic in any pre-modern work we have."</a:t>
+            </a:r>
+            <a:endParaRPr lang="en-US" sz="1200" dirty="0"/>
+          </a:p>
+        </p:txBody>
+      </p:sp>
+      <p:sp>
+        <p:nvSpPr>
+          <p:cNvPr id="5" name="Text 3"/>
+          <p:cNvSpPr/>
+          <p:nvPr/>
+        </p:nvSpPr>
+        <p:spPr>
+          <a:xfrm>
+            <a:off x="634901" y="1386334"/>
+            <a:ext cx="8102798" cy="281880"/>
+          </a:xfrm>
+          <a:prstGeom prst="rect">
+            <a:avLst/>
+          </a:prstGeom>
+          <a:noFill/>
+          <a:ln/>
+        </p:spPr>
+        <p:txBody>
+          <a:bodyPr wrap="square" lIns="0" tIns="0" rIns="0" bIns="0" rtlCol="0" anchor="t"/>
+          <a:lstStyle/>
+          <a:p>
+            <a:pPr algn="l" marL="342900" indent="-342900">
+              <a:lnSpc>
+                <a:spcPts val="1620"/>
+              </a:lnSpc>
+              <a:spcAft>
+                <a:spcPts val="300"/>
+              </a:spcAft>
+              <a:buSzPct val="100000"/>
+              <a:buChar char="•"/>
+            </a:pPr>
+            <a:r>
+              <a:rPr lang="en-US" sz="1200" b="1" dirty="0">
+                <a:solidFill>
+                  <a:srgbClr val="1C2833"/>
+                </a:solidFill>
+                <a:latin typeface="Arial" pitchFamily="34" charset="0"/>
+                <a:ea typeface="Arial" pitchFamily="34" charset="-122"/>
+                <a:cs typeface="Arial" pitchFamily="34" charset="-120"/>
+              </a:rPr>
+              <a:t>Why systematic written method matters.</a:t>
+            </a:r>
+            <a:pPr algn="l" indent="0" marL="0">
+              <a:lnSpc>
+                <a:spcPts val="1620"/>
+              </a:lnSpc>
+              <a:spcAft>
+                <a:spcPts val="300"/>
+              </a:spcAft>
+              <a:buNone/>
+            </a:pPr>
+            <a:r>
               <a:rPr lang="en-US" sz="1200" dirty="0">
                 <a:solidFill>
                   <a:srgbClr val="1C2833"/>
@@ -2768,7 +3488,7 @@
                 <a:ea typeface="Arial" pitchFamily="34" charset="-122"/>
                 <a:cs typeface="Arial" pitchFamily="34" charset="-120"/>
               </a:rPr>
-              <a:t>– Avoid hero-worship framing. Nārāyaṇa was a brilliant systematiser; he was not the sole discoverer of magic squares. – A few students will ask whether Nārāyaṇa's methods were known outside India. Answer: yes, eventually — the same odd-order method shows up in 17th-c. European mathematics (via de la Loubère, 1687) probably with intermediate Islamic-world transmission. The independent re-discovery story is interesting but speculative. – The reflection paragraph is a low-stakes formative — don't grade harshly. Read for understanding, not for polish.</a:t>
+              <a:t> Discuss together:</a:t>
             </a:r>
             <a:endParaRPr lang="en-US" sz="1200" dirty="0"/>
           </a:p>
@@ -2776,7 +3496,7 @@
       </p:sp>
       <p:sp>
         <p:nvSpPr>
-          <p:cNvPr id="5" name="Text 3"/>
+          <p:cNvPr id="6" name="Text 4"/>
           <p:cNvSpPr/>
           <p:nvPr/>
         </p:nvSpPr>
@@ -2926,7 +3646,7 @@
                 <a:ea typeface="Georgia" pitchFamily="34" charset="-122"/>
                 <a:cs typeface="Georgia" pitchFamily="34" charset="-120"/>
               </a:rPr>
-              <a:t>Citation(s) used in this lesson</a:t>
+              <a:t>Core (20 min) (cont.)</a:t>
             </a:r>
             <a:endParaRPr lang="en-US" sz="1800" dirty="0"/>
           </a:p>
@@ -2940,8 +3660,8 @@
         </p:nvSpPr>
         <p:spPr>
           <a:xfrm>
-            <a:off x="406301" y="870942"/>
-            <a:ext cx="8498026" cy="426541"/>
+            <a:off x="634901" y="883593"/>
+            <a:ext cx="8102798" cy="1386483"/>
           </a:xfrm>
           <a:prstGeom prst="rect">
             <a:avLst/>
@@ -2953,6 +3673,286 @@
           <a:bodyPr wrap="square" lIns="0" tIns="0" rIns="0" bIns="0" rtlCol="0" anchor="t"/>
           <a:lstStyle/>
           <a:p>
+            <a:pPr algn="l" marL="342900" indent="-342900">
+              <a:lnSpc>
+                <a:spcPts val="1620"/>
+              </a:lnSpc>
+              <a:spcAft>
+                <a:spcPts val="300"/>
+              </a:spcAft>
+              <a:buSzPct val="100000"/>
+              <a:buChar char="•"/>
+            </a:pPr>
+            <a:r>
+              <a:rPr lang="en-US" sz="1200" dirty="0">
+                <a:solidFill>
+                  <a:srgbClr val="1C2833"/>
+                </a:solidFill>
+                <a:latin typeface="Arial" pitchFamily="34" charset="0"/>
+                <a:ea typeface="Arial" pitchFamily="34" charset="-122"/>
+                <a:cs typeface="Arial" pitchFamily="34" charset="-120"/>
+              </a:rPr>
+              <a:t>Before Nārāyaṇa, magic squares appeared in many Indian and non-Indian sources — but mostly as </a:t>
+            </a:r>
+            <a:pPr algn="l" indent="0" marL="0">
+              <a:lnSpc>
+                <a:spcPts val="1620"/>
+              </a:lnSpc>
+              <a:spcAft>
+                <a:spcPts val="300"/>
+              </a:spcAft>
+              <a:buNone/>
+            </a:pPr>
+            <a:r>
+              <a:rPr lang="en-US" sz="1200" i="1" dirty="0">
+                <a:solidFill>
+                  <a:srgbClr val="1C2833"/>
+                </a:solidFill>
+                <a:latin typeface="Arial" pitchFamily="34" charset="0"/>
+                <a:ea typeface="Arial" pitchFamily="34" charset="-122"/>
+                <a:cs typeface="Arial" pitchFamily="34" charset="-120"/>
+              </a:rPr>
+              <a:t>examples</a:t>
+            </a:r>
+            <a:pPr algn="l" indent="0" marL="0">
+              <a:lnSpc>
+                <a:spcPts val="1620"/>
+              </a:lnSpc>
+              <a:spcAft>
+                <a:spcPts val="300"/>
+              </a:spcAft>
+              <a:buNone/>
+            </a:pPr>
+            <a:r>
+              <a:rPr lang="en-US" sz="1200" dirty="0">
+                <a:solidFill>
+                  <a:srgbClr val="1C2833"/>
+                </a:solidFill>
+                <a:latin typeface="Arial" pitchFamily="34" charset="0"/>
+                <a:ea typeface="Arial" pitchFamily="34" charset="-122"/>
+                <a:cs typeface="Arial" pitchFamily="34" charset="-120"/>
+              </a:rPr>
+              <a:t>, not as recipes.</a:t>
+            </a:r>
+            <a:endParaRPr lang="en-US" sz="1200" dirty="0"/>
+          </a:p>
+          <a:p>
+            <a:pPr algn="l" marL="342900" indent="-342900">
+              <a:lnSpc>
+                <a:spcPts val="1620"/>
+              </a:lnSpc>
+              <a:spcAft>
+                <a:spcPts val="300"/>
+              </a:spcAft>
+              <a:buSzPct val="100000"/>
+              <a:buChar char="•"/>
+            </a:pPr>
+            <a:r>
+              <a:rPr lang="en-US" sz="1200" dirty="0">
+                <a:solidFill>
+                  <a:srgbClr val="1C2833"/>
+                </a:solidFill>
+                <a:latin typeface="Arial" pitchFamily="34" charset="0"/>
+                <a:ea typeface="Arial" pitchFamily="34" charset="-122"/>
+                <a:cs typeface="Arial" pitchFamily="34" charset="-120"/>
+              </a:rPr>
+              <a:t>Nārāyaṇa gives </a:t>
+            </a:r>
+            <a:pPr algn="l" indent="0" marL="0">
+              <a:lnSpc>
+                <a:spcPts val="1620"/>
+              </a:lnSpc>
+              <a:spcAft>
+                <a:spcPts val="300"/>
+              </a:spcAft>
+              <a:buNone/>
+            </a:pPr>
+            <a:r>
+              <a:rPr lang="en-US" sz="1200" b="1" dirty="0">
+                <a:solidFill>
+                  <a:srgbClr val="1C2833"/>
+                </a:solidFill>
+                <a:latin typeface="Arial" pitchFamily="34" charset="0"/>
+                <a:ea typeface="Arial" pitchFamily="34" charset="-122"/>
+                <a:cs typeface="Arial" pitchFamily="34" charset="-120"/>
+              </a:rPr>
+              <a:t>methods</a:t>
+            </a:r>
+            <a:pPr algn="l" indent="0" marL="0">
+              <a:lnSpc>
+                <a:spcPts val="1620"/>
+              </a:lnSpc>
+              <a:spcAft>
+                <a:spcPts val="300"/>
+              </a:spcAft>
+              <a:buNone/>
+            </a:pPr>
+            <a:r>
+              <a:rPr lang="en-US" sz="1200" dirty="0">
+                <a:solidFill>
+                  <a:srgbClr val="1C2833"/>
+                </a:solidFill>
+                <a:latin typeface="Arial" pitchFamily="34" charset="0"/>
+                <a:ea typeface="Arial" pitchFamily="34" charset="-122"/>
+                <a:cs typeface="Arial" pitchFamily="34" charset="-120"/>
+              </a:rPr>
+              <a:t>: rules that work for any input size. This is what makes it mathematics, not just a curiosity collection.</a:t>
+            </a:r>
+            <a:endParaRPr lang="en-US" sz="1200" dirty="0"/>
+          </a:p>
+          <a:p>
+            <a:pPr algn="l" marL="342900" indent="-342900">
+              <a:lnSpc>
+                <a:spcPts val="1620"/>
+              </a:lnSpc>
+              <a:spcAft>
+                <a:spcPts val="300"/>
+              </a:spcAft>
+              <a:buSzPct val="100000"/>
+              <a:buChar char="•"/>
+            </a:pPr>
+            <a:r>
+              <a:rPr lang="en-US" sz="1200" dirty="0">
+                <a:solidFill>
+                  <a:srgbClr val="1C2833"/>
+                </a:solidFill>
+                <a:latin typeface="Arial" pitchFamily="34" charset="0"/>
+                <a:ea typeface="Arial" pitchFamily="34" charset="-122"/>
+                <a:cs typeface="Arial" pitchFamily="34" charset="-120"/>
+              </a:rPr>
+              <a:t>This is the same distinction we draw today between "here's a Sudoku puzzle" and "here's an algorithm to generate Sudoku puzzles."</a:t>
+            </a:r>
+            <a:endParaRPr lang="en-US" sz="1200" dirty="0"/>
+          </a:p>
+        </p:txBody>
+      </p:sp>
+      <p:sp>
+        <p:nvSpPr>
+          <p:cNvPr id="5" name="Text 3"/>
+          <p:cNvSpPr/>
+          <p:nvPr/>
+        </p:nvSpPr>
+        <p:spPr>
+          <a:xfrm>
+            <a:off x="634901" y="2371576"/>
+            <a:ext cx="8102798" cy="281880"/>
+          </a:xfrm>
+          <a:prstGeom prst="rect">
+            <a:avLst/>
+          </a:prstGeom>
+          <a:noFill/>
+          <a:ln/>
+        </p:spPr>
+        <p:txBody>
+          <a:bodyPr wrap="square" lIns="0" tIns="0" rIns="0" bIns="0" rtlCol="0" anchor="t"/>
+          <a:lstStyle/>
+          <a:p>
+            <a:pPr algn="l" marL="342900" indent="-342900">
+              <a:lnSpc>
+                <a:spcPts val="1620"/>
+              </a:lnSpc>
+              <a:spcAft>
+                <a:spcPts val="300"/>
+              </a:spcAft>
+              <a:buSzPct val="100000"/>
+              <a:buChar char="•"/>
+            </a:pPr>
+            <a:r>
+              <a:rPr lang="en-US" sz="1200" b="1" dirty="0">
+                <a:solidFill>
+                  <a:srgbClr val="1C2833"/>
+                </a:solidFill>
+                <a:latin typeface="Arial" pitchFamily="34" charset="0"/>
+                <a:ea typeface="Arial" pitchFamily="34" charset="-122"/>
+                <a:cs typeface="Arial" pitchFamily="34" charset="-120"/>
+              </a:rPr>
+              <a:t>A paraphrase from the source.</a:t>
+            </a:r>
+            <a:pPr algn="l" indent="0" marL="0">
+              <a:lnSpc>
+                <a:spcPts val="1620"/>
+              </a:lnSpc>
+              <a:spcAft>
+                <a:spcPts val="300"/>
+              </a:spcAft>
+              <a:buNone/>
+            </a:pPr>
+            <a:r>
+              <a:rPr lang="en-US" sz="1200" dirty="0">
+                <a:solidFill>
+                  <a:srgbClr val="1C2833"/>
+                </a:solidFill>
+                <a:latin typeface="Arial" pitchFamily="34" charset="0"/>
+                <a:ea typeface="Arial" pitchFamily="34" charset="-122"/>
+                <a:cs typeface="Arial" pitchFamily="34" charset="-120"/>
+              </a:rPr>
+              <a:t> From </a:t>
+            </a:r>
+            <a:pPr algn="l" indent="0" marL="0">
+              <a:lnSpc>
+                <a:spcPts val="1620"/>
+              </a:lnSpc>
+              <a:spcAft>
+                <a:spcPts val="300"/>
+              </a:spcAft>
+              <a:buNone/>
+            </a:pPr>
+            <a:r>
+              <a:rPr lang="en-US" sz="1200" i="1" dirty="0">
+                <a:solidFill>
+                  <a:srgbClr val="1C2833"/>
+                </a:solidFill>
+                <a:latin typeface="Arial" pitchFamily="34" charset="0"/>
+                <a:ea typeface="Arial" pitchFamily="34" charset="-122"/>
+                <a:cs typeface="Arial" pitchFamily="34" charset="-120"/>
+              </a:rPr>
+              <a:t>Bhadragaṇita</a:t>
+            </a:r>
+            <a:pPr algn="l" indent="0" marL="0">
+              <a:lnSpc>
+                <a:spcPts val="1620"/>
+              </a:lnSpc>
+              <a:spcAft>
+                <a:spcPts val="300"/>
+              </a:spcAft>
+              <a:buNone/>
+            </a:pPr>
+            <a:r>
+              <a:rPr lang="en-US" sz="1200" dirty="0">
+                <a:solidFill>
+                  <a:srgbClr val="1C2833"/>
+                </a:solidFill>
+                <a:latin typeface="Arial" pitchFamily="34" charset="0"/>
+                <a:ea typeface="Arial" pitchFamily="34" charset="-122"/>
+                <a:cs typeface="Arial" pitchFamily="34" charset="-120"/>
+              </a:rPr>
+              <a:t>, paraphrased:</a:t>
+            </a:r>
+            <a:endParaRPr lang="en-US" sz="1200" dirty="0"/>
+          </a:p>
+        </p:txBody>
+      </p:sp>
+      <p:sp>
+        <p:nvSpPr>
+          <p:cNvPr id="6" name="Text 4"/>
+          <p:cNvSpPr/>
+          <p:nvPr/>
+        </p:nvSpPr>
+        <p:spPr>
+          <a:xfrm>
+            <a:off x="406301" y="4434929"/>
+            <a:ext cx="8498026" cy="213271"/>
+          </a:xfrm>
+          <a:prstGeom prst="rect">
+            <a:avLst/>
+          </a:prstGeom>
+          <a:noFill/>
+          <a:ln/>
+        </p:spPr>
+        <p:txBody>
+          <a:bodyPr wrap="square" lIns="0" tIns="0" rIns="0" bIns="0" rtlCol="0" anchor="t"/>
+          <a:lstStyle/>
+          <a:p>
             <a:pPr algn="l" indent="0" marL="0">
               <a:lnSpc>
                 <a:spcPts val="1680"/>
@@ -2974,8 +3974,290 @@
                 <a:ea typeface="Arial" pitchFamily="34" charset="-122"/>
                 <a:cs typeface="Arial" pitchFamily="34" charset="-120"/>
               </a:rPr>
-              <a:t>– Nārāyaṇa Paṇḍita, </a:t>
-            </a:r>
+              <a:t>Middle ·  · IKS Curriculum</a:t>
+            </a:r>
+            <a:endParaRPr lang="en-US" sz="1200" dirty="0"/>
+          </a:p>
+        </p:txBody>
+      </p:sp>
+    </p:spTree>
+  </p:cSld>
+  <p:clrMapOvr>
+    <a:masterClrMapping/>
+  </p:clrMapOvr>
+</p:sld>
+</file>
+
+<file path=ppt/slides/slide13.xml><?xml version="1.0" encoding="utf-8"?>
+<p:sld xmlns:a="http://schemas.openxmlformats.org/drawingml/2006/main" xmlns:r="http://schemas.openxmlformats.org/officeDocument/2006/relationships" xmlns:p="http://schemas.openxmlformats.org/presentationml/2006/main">
+  <p:cSld name="Slide 13">
+    <p:bg>
+      <p:bgPr>
+        <a:solidFill>
+          <a:srgbClr val="FFFFFF"/>
+        </a:solidFill>
+      </p:bgPr>
+    </p:bg>
+    <p:spTree>
+      <p:nvGrpSpPr>
+        <p:cNvPr id="1" name=""/>
+        <p:cNvGrpSpPr/>
+        <p:nvPr/>
+      </p:nvGrpSpPr>
+      <p:grpSpPr>
+        <a:xfrm>
+          <a:off x="0" y="0"/>
+          <a:ext cx="0" cy="0"/>
+          <a:chOff x="0" y="0"/>
+          <a:chExt cx="0" cy="0"/>
+        </a:xfrm>
+      </p:grpSpPr>
+      <p:sp>
+        <p:nvSpPr>
+          <p:cNvPr id="2" name="Text 0"/>
+          <p:cNvSpPr/>
+          <p:nvPr/>
+        </p:nvSpPr>
+        <p:spPr>
+          <a:xfrm>
+            <a:off x="0" y="0"/>
+            <a:ext cx="9144000" cy="101501"/>
+          </a:xfrm>
+          <a:prstGeom prst="rect">
+            <a:avLst/>
+          </a:prstGeom>
+          <a:solidFill>
+            <a:srgbClr val="277884"/>
+          </a:solidFill>
+          <a:ln/>
+        </p:spPr>
+        <p:txBody>
+          <a:bodyPr wrap="square" rtlCol="0" anchor="ctr"/>
+          <a:lstStyle/>
+          <a:p>
+            <a:pPr indent="0" marL="0">
+              <a:buNone/>
+            </a:pPr>
+            <a:endParaRPr lang="en-US" dirty="0"/>
+          </a:p>
+        </p:txBody>
+      </p:sp>
+      <p:sp>
+        <p:nvSpPr>
+          <p:cNvPr id="3" name="Text 1"/>
+          <p:cNvSpPr/>
+          <p:nvPr/>
+        </p:nvSpPr>
+        <p:spPr>
+          <a:xfrm>
+            <a:off x="406301" y="457051"/>
+            <a:ext cx="8498026" cy="274290"/>
+          </a:xfrm>
+          <a:prstGeom prst="rect">
+            <a:avLst/>
+          </a:prstGeom>
+          <a:noFill/>
+          <a:ln/>
+        </p:spPr>
+        <p:txBody>
+          <a:bodyPr wrap="square" lIns="0" tIns="0" rIns="0" bIns="0" rtlCol="0" anchor="t"/>
+          <a:lstStyle/>
+          <a:p>
+            <a:pPr algn="l" indent="0" marL="0">
+              <a:lnSpc>
+                <a:spcPts val="2160"/>
+              </a:lnSpc>
+              <a:spcBef>
+                <a:spcPts val="600"/>
+              </a:spcBef>
+              <a:spcAft>
+                <a:spcPts val="800"/>
+              </a:spcAft>
+              <a:buNone/>
+            </a:pPr>
+            <a:r>
+              <a:rPr lang="en-US" sz="1800" b="1" dirty="0">
+                <a:solidFill>
+                  <a:srgbClr val="FE4447"/>
+                </a:solidFill>
+                <a:latin typeface="Georgia" pitchFamily="34" charset="0"/>
+                <a:ea typeface="Georgia" pitchFamily="34" charset="-122"/>
+                <a:cs typeface="Georgia" pitchFamily="34" charset="-120"/>
+              </a:rPr>
+              <a:t>Core (20 min) (cont.)</a:t>
+            </a:r>
+            <a:endParaRPr lang="en-US" sz="1800" dirty="0"/>
+          </a:p>
+        </p:txBody>
+      </p:sp>
+      <p:sp>
+        <p:nvSpPr>
+          <p:cNvPr id="4" name="Text 2"/>
+          <p:cNvSpPr/>
+          <p:nvPr/>
+        </p:nvSpPr>
+        <p:spPr>
+          <a:xfrm>
+            <a:off x="406301" y="883593"/>
+            <a:ext cx="8331398" cy="1073944"/>
+          </a:xfrm>
+          <a:prstGeom prst="rect">
+            <a:avLst/>
+          </a:prstGeom>
+          <a:solidFill>
+            <a:srgbClr val="F4F8F9"/>
+          </a:solidFill>
+          <a:ln/>
+        </p:spPr>
+        <p:txBody>
+          <a:bodyPr wrap="square" rtlCol="0" anchor="ctr"/>
+          <a:lstStyle/>
+          <a:p>
+            <a:pPr indent="0" marL="0">
+              <a:buNone/>
+            </a:pPr>
+            <a:endParaRPr lang="en-US" dirty="0"/>
+          </a:p>
+        </p:txBody>
+      </p:sp>
+      <p:sp>
+        <p:nvSpPr>
+          <p:cNvPr id="5" name="Shape 3"/>
+          <p:cNvSpPr/>
+          <p:nvPr/>
+        </p:nvSpPr>
+        <p:spPr>
+          <a:xfrm>
+            <a:off x="434876" y="883593"/>
+            <a:ext cx="0" cy="1073944"/>
+          </a:xfrm>
+          <a:prstGeom prst="line">
+            <a:avLst/>
+          </a:prstGeom>
+          <a:noFill/>
+          <a:ln w="57150">
+            <a:solidFill>
+              <a:srgbClr val="FE4447"/>
+            </a:solidFill>
+            <a:prstDash val="solid"/>
+          </a:ln>
+        </p:spPr>
+      </p:sp>
+      <p:sp>
+        <p:nvSpPr>
+          <p:cNvPr id="6" name="Text 4"/>
+          <p:cNvSpPr/>
+          <p:nvPr/>
+        </p:nvSpPr>
+        <p:spPr>
+          <a:xfrm>
+            <a:off x="692051" y="1074093"/>
+            <a:ext cx="7973389" cy="692944"/>
+          </a:xfrm>
+          <a:prstGeom prst="rect">
+            <a:avLst/>
+          </a:prstGeom>
+          <a:noFill/>
+          <a:ln/>
+        </p:spPr>
+        <p:txBody>
+          <a:bodyPr wrap="square" lIns="0" tIns="0" rIns="0" bIns="0" rtlCol="0" anchor="t"/>
+          <a:lstStyle/>
+          <a:p>
+            <a:pPr algn="l" indent="0" marL="0">
+              <a:lnSpc>
+                <a:spcPts val="1820"/>
+              </a:lnSpc>
+              <a:spcBef>
+                <a:spcPts val="300"/>
+              </a:spcBef>
+              <a:spcAft>
+                <a:spcPts val="300"/>
+              </a:spcAft>
+              <a:buNone/>
+            </a:pPr>
+            <a:r>
+              <a:rPr lang="en-US" sz="1300" dirty="0">
+                <a:solidFill>
+                  <a:srgbClr val="1C2833"/>
+                </a:solidFill>
+                <a:latin typeface="Georgia" pitchFamily="34" charset="0"/>
+                <a:ea typeface="Georgia" pitchFamily="34" charset="-122"/>
+                <a:cs typeface="Georgia" pitchFamily="34" charset="-120"/>
+              </a:rPr>
+              <a:t>"Magic squares of odd order are made by placing the first number in the top middle cell, and proceeding diagonally upward and rightward; if blocked, descend by one." (Nārāyaṇa Paṇḍita, </a:t>
+            </a:r>
+            <a:pPr algn="l" indent="0" marL="0">
+              <a:lnSpc>
+                <a:spcPts val="1820"/>
+              </a:lnSpc>
+              <a:spcBef>
+                <a:spcPts val="300"/>
+              </a:spcBef>
+              <a:spcAft>
+                <a:spcPts val="300"/>
+              </a:spcAft>
+              <a:buNone/>
+            </a:pPr>
+            <a:r>
+              <a:rPr lang="en-US" sz="1300" i="1" dirty="0">
+                <a:solidFill>
+                  <a:srgbClr val="1C2833"/>
+                </a:solidFill>
+                <a:latin typeface="Georgia" pitchFamily="34" charset="0"/>
+                <a:ea typeface="Georgia" pitchFamily="34" charset="-122"/>
+                <a:cs typeface="Georgia" pitchFamily="34" charset="-120"/>
+              </a:rPr>
+              <a:t>Gaṇita-kaumudī</a:t>
+            </a:r>
+            <a:pPr algn="l" indent="0" marL="0">
+              <a:lnSpc>
+                <a:spcPts val="1820"/>
+              </a:lnSpc>
+              <a:spcBef>
+                <a:spcPts val="300"/>
+              </a:spcBef>
+              <a:spcAft>
+                <a:spcPts val="300"/>
+              </a:spcAft>
+              <a:buNone/>
+            </a:pPr>
+            <a:r>
+              <a:rPr lang="en-US" sz="1300" dirty="0">
+                <a:solidFill>
+                  <a:srgbClr val="1C2833"/>
+                </a:solidFill>
+                <a:latin typeface="Georgia" pitchFamily="34" charset="0"/>
+                <a:ea typeface="Georgia" pitchFamily="34" charset="-122"/>
+                <a:cs typeface="Georgia" pitchFamily="34" charset="-120"/>
+              </a:rPr>
+              <a:t> Book 14, 1356 CE — paraphrased.)</a:t>
+            </a:r>
+            <a:endParaRPr lang="en-US" sz="1300" dirty="0"/>
+          </a:p>
+        </p:txBody>
+      </p:sp>
+      <p:sp>
+        <p:nvSpPr>
+          <p:cNvPr id="7" name="Text 5"/>
+          <p:cNvSpPr/>
+          <p:nvPr/>
+        </p:nvSpPr>
+        <p:spPr>
+          <a:xfrm>
+            <a:off x="406301" y="2046387"/>
+            <a:ext cx="8498026" cy="213271"/>
+          </a:xfrm>
+          <a:prstGeom prst="rect">
+            <a:avLst/>
+          </a:prstGeom>
+          <a:noFill/>
+          <a:ln/>
+        </p:spPr>
+        <p:txBody>
+          <a:bodyPr wrap="square" lIns="0" tIns="0" rIns="0" bIns="0" rtlCol="0" anchor="t"/>
+          <a:lstStyle/>
+          <a:p>
             <a:pPr algn="l" indent="0" marL="0">
               <a:lnSpc>
                 <a:spcPts val="1680"/>
@@ -2989,6 +4271,605 @@
               <a:buNone/>
             </a:pPr>
             <a:r>
+              <a:rPr lang="en-US" sz="1200" dirty="0">
+                <a:solidFill>
+                  <a:srgbClr val="1C2833"/>
+                </a:solidFill>
+                <a:latin typeface="Arial" pitchFamily="34" charset="0"/>
+                <a:ea typeface="Arial" pitchFamily="34" charset="-122"/>
+                <a:cs typeface="Arial" pitchFamily="34" charset="-120"/>
+              </a:rPr>
+              <a:t>This is the rule you have been using. The original is in Sanskrit; this is a faithful paraphrase, not a quoted verse.</a:t>
+            </a:r>
+            <a:endParaRPr lang="en-US" sz="1200" dirty="0"/>
+          </a:p>
+        </p:txBody>
+      </p:sp>
+      <p:sp>
+        <p:nvSpPr>
+          <p:cNvPr id="8" name="Text 6"/>
+          <p:cNvSpPr/>
+          <p:nvPr/>
+        </p:nvSpPr>
+        <p:spPr>
+          <a:xfrm>
+            <a:off x="406301" y="4434929"/>
+            <a:ext cx="8498026" cy="213271"/>
+          </a:xfrm>
+          <a:prstGeom prst="rect">
+            <a:avLst/>
+          </a:prstGeom>
+          <a:noFill/>
+          <a:ln/>
+        </p:spPr>
+        <p:txBody>
+          <a:bodyPr wrap="square" lIns="0" tIns="0" rIns="0" bIns="0" rtlCol="0" anchor="t"/>
+          <a:lstStyle/>
+          <a:p>
+            <a:pPr algn="l" indent="0" marL="0">
+              <a:lnSpc>
+                <a:spcPts val="1680"/>
+              </a:lnSpc>
+              <a:spcBef>
+                <a:spcPts val="300"/>
+              </a:spcBef>
+              <a:spcAft>
+                <a:spcPts val="300"/>
+              </a:spcAft>
+              <a:buNone/>
+            </a:pPr>
+            <a:r>
+              <a:rPr lang="en-US" sz="1200" dirty="0">
+                <a:solidFill>
+                  <a:srgbClr val="1C2833"/>
+                </a:solidFill>
+                <a:latin typeface="Arial" pitchFamily="34" charset="0"/>
+                <a:ea typeface="Arial" pitchFamily="34" charset="-122"/>
+                <a:cs typeface="Arial" pitchFamily="34" charset="-120"/>
+              </a:rPr>
+              <a:t>Middle ·  · IKS Curriculum</a:t>
+            </a:r>
+            <a:endParaRPr lang="en-US" sz="1200" dirty="0"/>
+          </a:p>
+        </p:txBody>
+      </p:sp>
+    </p:spTree>
+  </p:cSld>
+  <p:clrMapOvr>
+    <a:masterClrMapping/>
+  </p:clrMapOvr>
+</p:sld>
+</file>
+
+<file path=ppt/slides/slide14.xml><?xml version="1.0" encoding="utf-8"?>
+<p:sld xmlns:a="http://schemas.openxmlformats.org/drawingml/2006/main" xmlns:r="http://schemas.openxmlformats.org/officeDocument/2006/relationships" xmlns:p="http://schemas.openxmlformats.org/presentationml/2006/main">
+  <p:cSld name="Slide 14">
+    <p:bg>
+      <p:bgPr>
+        <a:solidFill>
+          <a:srgbClr val="FFFFFF"/>
+        </a:solidFill>
+      </p:bgPr>
+    </p:bg>
+    <p:spTree>
+      <p:nvGrpSpPr>
+        <p:cNvPr id="1" name=""/>
+        <p:cNvGrpSpPr/>
+        <p:nvPr/>
+      </p:nvGrpSpPr>
+      <p:grpSpPr>
+        <a:xfrm>
+          <a:off x="0" y="0"/>
+          <a:ext cx="0" cy="0"/>
+          <a:chOff x="0" y="0"/>
+          <a:chExt cx="0" cy="0"/>
+        </a:xfrm>
+      </p:grpSpPr>
+      <p:sp>
+        <p:nvSpPr>
+          <p:cNvPr id="2" name="Text 0"/>
+          <p:cNvSpPr/>
+          <p:nvPr/>
+        </p:nvSpPr>
+        <p:spPr>
+          <a:xfrm>
+            <a:off x="0" y="0"/>
+            <a:ext cx="9144000" cy="101501"/>
+          </a:xfrm>
+          <a:prstGeom prst="rect">
+            <a:avLst/>
+          </a:prstGeom>
+          <a:solidFill>
+            <a:srgbClr val="277884"/>
+          </a:solidFill>
+          <a:ln/>
+        </p:spPr>
+        <p:txBody>
+          <a:bodyPr wrap="square" rtlCol="0" anchor="ctr"/>
+          <a:lstStyle/>
+          <a:p>
+            <a:pPr indent="0" marL="0">
+              <a:buNone/>
+            </a:pPr>
+            <a:endParaRPr lang="en-US" dirty="0"/>
+          </a:p>
+        </p:txBody>
+      </p:sp>
+      <p:sp>
+        <p:nvSpPr>
+          <p:cNvPr id="3" name="Text 1"/>
+          <p:cNvSpPr/>
+          <p:nvPr/>
+        </p:nvSpPr>
+        <p:spPr>
+          <a:xfrm>
+            <a:off x="406301" y="457051"/>
+            <a:ext cx="8498026" cy="274290"/>
+          </a:xfrm>
+          <a:prstGeom prst="rect">
+            <a:avLst/>
+          </a:prstGeom>
+          <a:noFill/>
+          <a:ln/>
+        </p:spPr>
+        <p:txBody>
+          <a:bodyPr wrap="square" lIns="0" tIns="0" rIns="0" bIns="0" rtlCol="0" anchor="t"/>
+          <a:lstStyle/>
+          <a:p>
+            <a:pPr algn="l" indent="0" marL="0">
+              <a:lnSpc>
+                <a:spcPts val="2160"/>
+              </a:lnSpc>
+              <a:spcBef>
+                <a:spcPts val="600"/>
+              </a:spcBef>
+              <a:spcAft>
+                <a:spcPts val="800"/>
+              </a:spcAft>
+              <a:buNone/>
+            </a:pPr>
+            <a:r>
+              <a:rPr lang="en-US" sz="1800" b="1" dirty="0">
+                <a:solidFill>
+                  <a:srgbClr val="FE4447"/>
+                </a:solidFill>
+                <a:latin typeface="Georgia" pitchFamily="34" charset="0"/>
+                <a:ea typeface="Georgia" pitchFamily="34" charset="-122"/>
+                <a:cs typeface="Georgia" pitchFamily="34" charset="-120"/>
+              </a:rPr>
+              <a:t>Activity (15 min) — Reflection paragraph</a:t>
+            </a:r>
+            <a:endParaRPr lang="en-US" sz="1800" dirty="0"/>
+          </a:p>
+        </p:txBody>
+      </p:sp>
+      <p:sp>
+        <p:nvSpPr>
+          <p:cNvPr id="4" name="Text 2"/>
+          <p:cNvSpPr/>
+          <p:nvPr/>
+        </p:nvSpPr>
+        <p:spPr>
+          <a:xfrm>
+            <a:off x="634901" y="883593"/>
+            <a:ext cx="8102798" cy="281880"/>
+          </a:xfrm>
+          <a:prstGeom prst="rect">
+            <a:avLst/>
+          </a:prstGeom>
+          <a:noFill/>
+          <a:ln/>
+        </p:spPr>
+        <p:txBody>
+          <a:bodyPr wrap="square" lIns="0" tIns="0" rIns="0" bIns="0" rtlCol="0" anchor="t"/>
+          <a:lstStyle/>
+          <a:p>
+            <a:pPr algn="l" marL="342900" indent="-342900">
+              <a:lnSpc>
+                <a:spcPts val="1620"/>
+              </a:lnSpc>
+              <a:spcAft>
+                <a:spcPts val="300"/>
+              </a:spcAft>
+              <a:buSzPct val="100000"/>
+              <a:buChar char="•"/>
+            </a:pPr>
+            <a:r>
+              <a:rPr lang="en-US" sz="1200" dirty="0">
+                <a:solidFill>
+                  <a:srgbClr val="1C2833"/>
+                </a:solidFill>
+                <a:latin typeface="Arial" pitchFamily="34" charset="0"/>
+                <a:ea typeface="Arial" pitchFamily="34" charset="-122"/>
+                <a:cs typeface="Arial" pitchFamily="34" charset="-120"/>
+              </a:rPr>
+              <a:t>Each student writes 5–7 sentences in response to:</a:t>
+            </a:r>
+            <a:endParaRPr lang="en-US" sz="1200" dirty="0"/>
+          </a:p>
+        </p:txBody>
+      </p:sp>
+      <p:sp>
+        <p:nvSpPr>
+          <p:cNvPr id="5" name="Text 3"/>
+          <p:cNvSpPr/>
+          <p:nvPr/>
+        </p:nvSpPr>
+        <p:spPr>
+          <a:xfrm>
+            <a:off x="406301" y="1266974"/>
+            <a:ext cx="8331398" cy="842963"/>
+          </a:xfrm>
+          <a:prstGeom prst="rect">
+            <a:avLst/>
+          </a:prstGeom>
+          <a:solidFill>
+            <a:srgbClr val="F4F8F9"/>
+          </a:solidFill>
+          <a:ln/>
+        </p:spPr>
+        <p:txBody>
+          <a:bodyPr wrap="square" rtlCol="0" anchor="ctr"/>
+          <a:lstStyle/>
+          <a:p>
+            <a:pPr indent="0" marL="0">
+              <a:buNone/>
+            </a:pPr>
+            <a:endParaRPr lang="en-US" dirty="0"/>
+          </a:p>
+        </p:txBody>
+      </p:sp>
+      <p:sp>
+        <p:nvSpPr>
+          <p:cNvPr id="6" name="Shape 4"/>
+          <p:cNvSpPr/>
+          <p:nvPr/>
+        </p:nvSpPr>
+        <p:spPr>
+          <a:xfrm>
+            <a:off x="434876" y="1266974"/>
+            <a:ext cx="0" cy="842962"/>
+          </a:xfrm>
+          <a:prstGeom prst="line">
+            <a:avLst/>
+          </a:prstGeom>
+          <a:noFill/>
+          <a:ln w="57150">
+            <a:solidFill>
+              <a:srgbClr val="FE4447"/>
+            </a:solidFill>
+            <a:prstDash val="solid"/>
+          </a:ln>
+        </p:spPr>
+      </p:sp>
+      <p:sp>
+        <p:nvSpPr>
+          <p:cNvPr id="7" name="Text 5"/>
+          <p:cNvSpPr/>
+          <p:nvPr/>
+        </p:nvSpPr>
+        <p:spPr>
+          <a:xfrm>
+            <a:off x="692051" y="1457474"/>
+            <a:ext cx="7973389" cy="461963"/>
+          </a:xfrm>
+          <a:prstGeom prst="rect">
+            <a:avLst/>
+          </a:prstGeom>
+          <a:noFill/>
+          <a:ln/>
+        </p:spPr>
+        <p:txBody>
+          <a:bodyPr wrap="square" lIns="0" tIns="0" rIns="0" bIns="0" rtlCol="0" anchor="t"/>
+          <a:lstStyle/>
+          <a:p>
+            <a:pPr algn="l" indent="0" marL="0">
+              <a:lnSpc>
+                <a:spcPts val="1820"/>
+              </a:lnSpc>
+              <a:spcBef>
+                <a:spcPts val="300"/>
+              </a:spcBef>
+              <a:spcAft>
+                <a:spcPts val="300"/>
+              </a:spcAft>
+              <a:buNone/>
+            </a:pPr>
+            <a:r>
+              <a:rPr lang="en-US" sz="1300" i="1" dirty="0">
+                <a:solidFill>
+                  <a:srgbClr val="1C2833"/>
+                </a:solidFill>
+                <a:latin typeface="Georgia" pitchFamily="34" charset="0"/>
+                <a:ea typeface="Georgia" pitchFamily="34" charset="-122"/>
+                <a:cs typeface="Georgia" pitchFamily="34" charset="-120"/>
+              </a:rPr>
+              <a:t>"Nārāyaṇa Paṇḍita gave us a rule, not a magic square. Why is having a rule more valuable than having just one example? Use specific evidence from this module."</a:t>
+            </a:r>
+            <a:endParaRPr lang="en-US" sz="1300" dirty="0"/>
+          </a:p>
+        </p:txBody>
+      </p:sp>
+      <p:sp>
+        <p:nvSpPr>
+          <p:cNvPr id="8" name="Text 6"/>
+          <p:cNvSpPr/>
+          <p:nvPr/>
+        </p:nvSpPr>
+        <p:spPr>
+          <a:xfrm>
+            <a:off x="634901" y="2211437"/>
+            <a:ext cx="8102798" cy="487561"/>
+          </a:xfrm>
+          <a:prstGeom prst="rect">
+            <a:avLst/>
+          </a:prstGeom>
+          <a:noFill/>
+          <a:ln/>
+        </p:spPr>
+        <p:txBody>
+          <a:bodyPr wrap="square" lIns="0" tIns="0" rIns="0" bIns="0" rtlCol="0" anchor="t"/>
+          <a:lstStyle/>
+          <a:p>
+            <a:pPr algn="l" marL="342900" indent="-342900">
+              <a:lnSpc>
+                <a:spcPts val="1620"/>
+              </a:lnSpc>
+              <a:spcAft>
+                <a:spcPts val="300"/>
+              </a:spcAft>
+              <a:buSzPct val="100000"/>
+              <a:buChar char="•"/>
+            </a:pPr>
+            <a:r>
+              <a:rPr lang="en-US" sz="1200" dirty="0">
+                <a:solidFill>
+                  <a:srgbClr val="1C2833"/>
+                </a:solidFill>
+                <a:latin typeface="Arial" pitchFamily="34" charset="0"/>
+                <a:ea typeface="Arial" pitchFamily="34" charset="-122"/>
+                <a:cs typeface="Arial" pitchFamily="34" charset="-120"/>
+              </a:rPr>
+              <a:t>Pairs swap and read each other's paragraphs. One quick comment each: "the part that landed" and "what I'd want more of."</a:t>
+            </a:r>
+            <a:endParaRPr lang="en-US" sz="1200" dirty="0"/>
+          </a:p>
+        </p:txBody>
+      </p:sp>
+      <p:sp>
+        <p:nvSpPr>
+          <p:cNvPr id="9" name="Text 7"/>
+          <p:cNvSpPr/>
+          <p:nvPr/>
+        </p:nvSpPr>
+        <p:spPr>
+          <a:xfrm>
+            <a:off x="406301" y="4434929"/>
+            <a:ext cx="8498026" cy="213271"/>
+          </a:xfrm>
+          <a:prstGeom prst="rect">
+            <a:avLst/>
+          </a:prstGeom>
+          <a:noFill/>
+          <a:ln/>
+        </p:spPr>
+        <p:txBody>
+          <a:bodyPr wrap="square" lIns="0" tIns="0" rIns="0" bIns="0" rtlCol="0" anchor="t"/>
+          <a:lstStyle/>
+          <a:p>
+            <a:pPr algn="l" indent="0" marL="0">
+              <a:lnSpc>
+                <a:spcPts val="1680"/>
+              </a:lnSpc>
+              <a:spcBef>
+                <a:spcPts val="300"/>
+              </a:spcBef>
+              <a:spcAft>
+                <a:spcPts val="300"/>
+              </a:spcAft>
+              <a:buNone/>
+            </a:pPr>
+            <a:r>
+              <a:rPr lang="en-US" sz="1200" dirty="0">
+                <a:solidFill>
+                  <a:srgbClr val="1C2833"/>
+                </a:solidFill>
+                <a:latin typeface="Arial" pitchFamily="34" charset="0"/>
+                <a:ea typeface="Arial" pitchFamily="34" charset="-122"/>
+                <a:cs typeface="Arial" pitchFamily="34" charset="-120"/>
+              </a:rPr>
+              <a:t>Middle ·  · IKS Curriculum</a:t>
+            </a:r>
+            <a:endParaRPr lang="en-US" sz="1200" dirty="0"/>
+          </a:p>
+        </p:txBody>
+      </p:sp>
+    </p:spTree>
+  </p:cSld>
+  <p:clrMapOvr>
+    <a:masterClrMapping/>
+  </p:clrMapOvr>
+</p:sld>
+</file>
+
+<file path=ppt/slides/slide15.xml><?xml version="1.0" encoding="utf-8"?>
+<p:sld xmlns:a="http://schemas.openxmlformats.org/drawingml/2006/main" xmlns:r="http://schemas.openxmlformats.org/officeDocument/2006/relationships" xmlns:p="http://schemas.openxmlformats.org/presentationml/2006/main">
+  <p:cSld name="Slide 15">
+    <p:bg>
+      <p:bgPr>
+        <a:solidFill>
+          <a:srgbClr val="FFFFFF"/>
+        </a:solidFill>
+      </p:bgPr>
+    </p:bg>
+    <p:spTree>
+      <p:nvGrpSpPr>
+        <p:cNvPr id="1" name=""/>
+        <p:cNvGrpSpPr/>
+        <p:nvPr/>
+      </p:nvGrpSpPr>
+      <p:grpSpPr>
+        <a:xfrm>
+          <a:off x="0" y="0"/>
+          <a:ext cx="0" cy="0"/>
+          <a:chOff x="0" y="0"/>
+          <a:chExt cx="0" cy="0"/>
+        </a:xfrm>
+      </p:grpSpPr>
+      <p:sp>
+        <p:nvSpPr>
+          <p:cNvPr id="2" name="Text 0"/>
+          <p:cNvSpPr/>
+          <p:nvPr/>
+        </p:nvSpPr>
+        <p:spPr>
+          <a:xfrm>
+            <a:off x="0" y="0"/>
+            <a:ext cx="9144000" cy="101501"/>
+          </a:xfrm>
+          <a:prstGeom prst="rect">
+            <a:avLst/>
+          </a:prstGeom>
+          <a:solidFill>
+            <a:srgbClr val="277884"/>
+          </a:solidFill>
+          <a:ln/>
+        </p:spPr>
+        <p:txBody>
+          <a:bodyPr wrap="square" rtlCol="0" anchor="ctr"/>
+          <a:lstStyle/>
+          <a:p>
+            <a:pPr indent="0" marL="0">
+              <a:buNone/>
+            </a:pPr>
+            <a:endParaRPr lang="en-US" dirty="0"/>
+          </a:p>
+        </p:txBody>
+      </p:sp>
+      <p:sp>
+        <p:nvSpPr>
+          <p:cNvPr id="3" name="Text 1"/>
+          <p:cNvSpPr/>
+          <p:nvPr/>
+        </p:nvSpPr>
+        <p:spPr>
+          <a:xfrm>
+            <a:off x="406301" y="457051"/>
+            <a:ext cx="8498026" cy="274290"/>
+          </a:xfrm>
+          <a:prstGeom prst="rect">
+            <a:avLst/>
+          </a:prstGeom>
+          <a:noFill/>
+          <a:ln/>
+        </p:spPr>
+        <p:txBody>
+          <a:bodyPr wrap="square" lIns="0" tIns="0" rIns="0" bIns="0" rtlCol="0" anchor="t"/>
+          <a:lstStyle/>
+          <a:p>
+            <a:pPr algn="l" indent="0" marL="0">
+              <a:lnSpc>
+                <a:spcPts val="2160"/>
+              </a:lnSpc>
+              <a:spcBef>
+                <a:spcPts val="600"/>
+              </a:spcBef>
+              <a:spcAft>
+                <a:spcPts val="800"/>
+              </a:spcAft>
+              <a:buNone/>
+            </a:pPr>
+            <a:r>
+              <a:rPr lang="en-US" sz="1800" b="1" dirty="0">
+                <a:solidFill>
+                  <a:srgbClr val="FE4447"/>
+                </a:solidFill>
+                <a:latin typeface="Georgia" pitchFamily="34" charset="0"/>
+                <a:ea typeface="Georgia" pitchFamily="34" charset="-122"/>
+                <a:cs typeface="Georgia" pitchFamily="34" charset="-120"/>
+              </a:rPr>
+              <a:t>Wrap-up (5 min)</a:t>
+            </a:r>
+            <a:endParaRPr lang="en-US" sz="1800" dirty="0"/>
+          </a:p>
+        </p:txBody>
+      </p:sp>
+      <p:sp>
+        <p:nvSpPr>
+          <p:cNvPr id="4" name="Text 2"/>
+          <p:cNvSpPr/>
+          <p:nvPr/>
+        </p:nvSpPr>
+        <p:spPr>
+          <a:xfrm>
+            <a:off x="634901" y="883593"/>
+            <a:ext cx="8102798" cy="525661"/>
+          </a:xfrm>
+          <a:prstGeom prst="rect">
+            <a:avLst/>
+          </a:prstGeom>
+          <a:noFill/>
+          <a:ln/>
+        </p:spPr>
+        <p:txBody>
+          <a:bodyPr wrap="square" lIns="0" tIns="0" rIns="0" bIns="0" rtlCol="0" anchor="t"/>
+          <a:lstStyle/>
+          <a:p>
+            <a:pPr algn="l" marL="342900" indent="-342900">
+              <a:lnSpc>
+                <a:spcPts val="1620"/>
+              </a:lnSpc>
+              <a:spcAft>
+                <a:spcPts val="300"/>
+              </a:spcAft>
+              <a:buSzPct val="100000"/>
+              <a:buChar char="•"/>
+            </a:pPr>
+            <a:r>
+              <a:rPr lang="en-US" sz="1200" dirty="0">
+                <a:solidFill>
+                  <a:srgbClr val="1C2833"/>
+                </a:solidFill>
+                <a:latin typeface="Arial" pitchFamily="34" charset="0"/>
+                <a:ea typeface="Arial" pitchFamily="34" charset="-122"/>
+                <a:cs typeface="Arial" pitchFamily="34" charset="-120"/>
+              </a:rPr>
+              <a:t>Two volunteer-read paragraphs (with permission).</a:t>
+            </a:r>
+            <a:endParaRPr lang="en-US" sz="1200" dirty="0"/>
+          </a:p>
+          <a:p>
+            <a:pPr algn="l" marL="342900" indent="-342900">
+              <a:lnSpc>
+                <a:spcPts val="1620"/>
+              </a:lnSpc>
+              <a:spcAft>
+                <a:spcPts val="300"/>
+              </a:spcAft>
+              <a:buSzPct val="100000"/>
+              <a:buChar char="•"/>
+            </a:pPr>
+            <a:r>
+              <a:rPr lang="en-US" sz="1200" dirty="0">
+                <a:solidFill>
+                  <a:srgbClr val="1C2833"/>
+                </a:solidFill>
+                <a:latin typeface="Arial" pitchFamily="34" charset="0"/>
+                <a:ea typeface="Arial" pitchFamily="34" charset="-122"/>
+                <a:cs typeface="Arial" pitchFamily="34" charset="-120"/>
+              </a:rPr>
+              <a:t>Preview Day 8: </a:t>
+            </a:r>
+            <a:pPr algn="l" indent="0" marL="0">
+              <a:lnSpc>
+                <a:spcPts val="1620"/>
+              </a:lnSpc>
+              <a:spcAft>
+                <a:spcPts val="300"/>
+              </a:spcAft>
+              <a:buNone/>
+            </a:pPr>
+            <a:r>
               <a:rPr lang="en-US" sz="1200" i="1" dirty="0">
                 <a:solidFill>
                   <a:srgbClr val="1C2833"/>
@@ -2997,15 +4878,960 @@
                 <a:ea typeface="Arial" pitchFamily="34" charset="-122"/>
                 <a:cs typeface="Arial" pitchFamily="34" charset="-120"/>
               </a:rPr>
+              <a:t>"Tomorrow we go cross-cultural — China's Lo Shu and Europe's Dürer."</a:t>
+            </a:r>
+            <a:endParaRPr lang="en-US" sz="1200" dirty="0"/>
+          </a:p>
+        </p:txBody>
+      </p:sp>
+      <p:sp>
+        <p:nvSpPr>
+          <p:cNvPr id="5" name="Text 3"/>
+          <p:cNvSpPr/>
+          <p:nvPr/>
+        </p:nvSpPr>
+        <p:spPr>
+          <a:xfrm>
+            <a:off x="406301" y="4434929"/>
+            <a:ext cx="8498026" cy="213271"/>
+          </a:xfrm>
+          <a:prstGeom prst="rect">
+            <a:avLst/>
+          </a:prstGeom>
+          <a:noFill/>
+          <a:ln/>
+        </p:spPr>
+        <p:txBody>
+          <a:bodyPr wrap="square" lIns="0" tIns="0" rIns="0" bIns="0" rtlCol="0" anchor="t"/>
+          <a:lstStyle/>
+          <a:p>
+            <a:pPr algn="l" indent="0" marL="0">
+              <a:lnSpc>
+                <a:spcPts val="1680"/>
+              </a:lnSpc>
+              <a:spcBef>
+                <a:spcPts val="300"/>
+              </a:spcBef>
+              <a:spcAft>
+                <a:spcPts val="300"/>
+              </a:spcAft>
+              <a:buNone/>
+            </a:pPr>
+            <a:r>
+              <a:rPr lang="en-US" sz="1200" dirty="0">
+                <a:solidFill>
+                  <a:srgbClr val="1C2833"/>
+                </a:solidFill>
+                <a:latin typeface="Arial" pitchFamily="34" charset="0"/>
+                <a:ea typeface="Arial" pitchFamily="34" charset="-122"/>
+                <a:cs typeface="Arial" pitchFamily="34" charset="-120"/>
+              </a:rPr>
+              <a:t>Middle ·  · IKS Curriculum</a:t>
+            </a:r>
+            <a:endParaRPr lang="en-US" sz="1200" dirty="0"/>
+          </a:p>
+        </p:txBody>
+      </p:sp>
+    </p:spTree>
+  </p:cSld>
+  <p:clrMapOvr>
+    <a:masterClrMapping/>
+  </p:clrMapOvr>
+</p:sld>
+</file>
+
+<file path=ppt/slides/slide16.xml><?xml version="1.0" encoding="utf-8"?>
+<p:sld xmlns:a="http://schemas.openxmlformats.org/drawingml/2006/main" xmlns:r="http://schemas.openxmlformats.org/officeDocument/2006/relationships" xmlns:p="http://schemas.openxmlformats.org/presentationml/2006/main">
+  <p:cSld name="Slide 16">
+    <p:bg>
+      <p:bgPr>
+        <a:solidFill>
+          <a:srgbClr val="FFFFFF"/>
+        </a:solidFill>
+      </p:bgPr>
+    </p:bg>
+    <p:spTree>
+      <p:nvGrpSpPr>
+        <p:cNvPr id="1" name=""/>
+        <p:cNvGrpSpPr/>
+        <p:nvPr/>
+      </p:nvGrpSpPr>
+      <p:grpSpPr>
+        <a:xfrm>
+          <a:off x="0" y="0"/>
+          <a:ext cx="0" cy="0"/>
+          <a:chOff x="0" y="0"/>
+          <a:chExt cx="0" cy="0"/>
+        </a:xfrm>
+      </p:grpSpPr>
+      <p:sp>
+        <p:nvSpPr>
+          <p:cNvPr id="2" name="Text 0"/>
+          <p:cNvSpPr/>
+          <p:nvPr/>
+        </p:nvSpPr>
+        <p:spPr>
+          <a:xfrm>
+            <a:off x="0" y="0"/>
+            <a:ext cx="9144000" cy="101501"/>
+          </a:xfrm>
+          <a:prstGeom prst="rect">
+            <a:avLst/>
+          </a:prstGeom>
+          <a:solidFill>
+            <a:srgbClr val="277884"/>
+          </a:solidFill>
+          <a:ln/>
+        </p:spPr>
+        <p:txBody>
+          <a:bodyPr wrap="square" rtlCol="0" anchor="ctr"/>
+          <a:lstStyle/>
+          <a:p>
+            <a:pPr indent="0" marL="0">
+              <a:buNone/>
+            </a:pPr>
+            <a:endParaRPr lang="en-US" dirty="0"/>
+          </a:p>
+        </p:txBody>
+      </p:sp>
+      <p:sp>
+        <p:nvSpPr>
+          <p:cNvPr id="3" name="Text 1"/>
+          <p:cNvSpPr/>
+          <p:nvPr/>
+        </p:nvSpPr>
+        <p:spPr>
+          <a:xfrm>
+            <a:off x="406301" y="457051"/>
+            <a:ext cx="8498026" cy="274290"/>
+          </a:xfrm>
+          <a:prstGeom prst="rect">
+            <a:avLst/>
+          </a:prstGeom>
+          <a:noFill/>
+          <a:ln/>
+        </p:spPr>
+        <p:txBody>
+          <a:bodyPr wrap="square" lIns="0" tIns="0" rIns="0" bIns="0" rtlCol="0" anchor="t"/>
+          <a:lstStyle/>
+          <a:p>
+            <a:pPr algn="l" indent="0" marL="0">
+              <a:lnSpc>
+                <a:spcPts val="2160"/>
+              </a:lnSpc>
+              <a:spcBef>
+                <a:spcPts val="600"/>
+              </a:spcBef>
+              <a:spcAft>
+                <a:spcPts val="800"/>
+              </a:spcAft>
+              <a:buNone/>
+            </a:pPr>
+            <a:r>
+              <a:rPr lang="en-US" sz="1800" b="1" dirty="0">
+                <a:solidFill>
+                  <a:srgbClr val="FE4447"/>
+                </a:solidFill>
+                <a:latin typeface="Georgia" pitchFamily="34" charset="0"/>
+                <a:ea typeface="Georgia" pitchFamily="34" charset="-122"/>
+                <a:cs typeface="Georgia" pitchFamily="34" charset="-120"/>
+              </a:rPr>
+              <a:t>Homework</a:t>
+            </a:r>
+            <a:endParaRPr lang="en-US" sz="1800" dirty="0"/>
+          </a:p>
+        </p:txBody>
+      </p:sp>
+      <p:sp>
+        <p:nvSpPr>
+          <p:cNvPr id="4" name="Text 2"/>
+          <p:cNvSpPr/>
+          <p:nvPr/>
+        </p:nvSpPr>
+        <p:spPr>
+          <a:xfrm>
+            <a:off x="634901" y="883593"/>
+            <a:ext cx="8102798" cy="487561"/>
+          </a:xfrm>
+          <a:prstGeom prst="rect">
+            <a:avLst/>
+          </a:prstGeom>
+          <a:noFill/>
+          <a:ln/>
+        </p:spPr>
+        <p:txBody>
+          <a:bodyPr wrap="square" lIns="0" tIns="0" rIns="0" bIns="0" rtlCol="0" anchor="t"/>
+          <a:lstStyle/>
+          <a:p>
+            <a:pPr algn="l" marL="342900" indent="-342900">
+              <a:lnSpc>
+                <a:spcPts val="1620"/>
+              </a:lnSpc>
+              <a:spcAft>
+                <a:spcPts val="300"/>
+              </a:spcAft>
+              <a:buSzPct val="100000"/>
+              <a:buChar char="•"/>
+            </a:pPr>
+            <a:r>
+              <a:rPr lang="en-US" sz="1200" dirty="0">
+                <a:solidFill>
+                  <a:srgbClr val="1C2833"/>
+                </a:solidFill>
+                <a:latin typeface="Arial" pitchFamily="34" charset="0"/>
+                <a:ea typeface="Arial" pitchFamily="34" charset="-122"/>
+                <a:cs typeface="Arial" pitchFamily="34" charset="-120"/>
+              </a:rPr>
+              <a:t>Polish your reflection paragraph from class. Add one more specific example (e.g. "I used the rule today to construct a 7×7 square in under 5 minutes; without the rule I would have been guessing all night.").</a:t>
+            </a:r>
+            <a:endParaRPr lang="en-US" sz="1200" dirty="0"/>
+          </a:p>
+        </p:txBody>
+      </p:sp>
+      <p:sp>
+        <p:nvSpPr>
+          <p:cNvPr id="5" name="Text 3"/>
+          <p:cNvSpPr/>
+          <p:nvPr/>
+        </p:nvSpPr>
+        <p:spPr>
+          <a:xfrm>
+            <a:off x="406301" y="4434929"/>
+            <a:ext cx="8498026" cy="213271"/>
+          </a:xfrm>
+          <a:prstGeom prst="rect">
+            <a:avLst/>
+          </a:prstGeom>
+          <a:noFill/>
+          <a:ln/>
+        </p:spPr>
+        <p:txBody>
+          <a:bodyPr wrap="square" lIns="0" tIns="0" rIns="0" bIns="0" rtlCol="0" anchor="t"/>
+          <a:lstStyle/>
+          <a:p>
+            <a:pPr algn="l" indent="0" marL="0">
+              <a:lnSpc>
+                <a:spcPts val="1680"/>
+              </a:lnSpc>
+              <a:spcBef>
+                <a:spcPts val="300"/>
+              </a:spcBef>
+              <a:spcAft>
+                <a:spcPts val="300"/>
+              </a:spcAft>
+              <a:buNone/>
+            </a:pPr>
+            <a:r>
+              <a:rPr lang="en-US" sz="1200" dirty="0">
+                <a:solidFill>
+                  <a:srgbClr val="1C2833"/>
+                </a:solidFill>
+                <a:latin typeface="Arial" pitchFamily="34" charset="0"/>
+                <a:ea typeface="Arial" pitchFamily="34" charset="-122"/>
+                <a:cs typeface="Arial" pitchFamily="34" charset="-120"/>
+              </a:rPr>
+              <a:t>Middle ·  · IKS Curriculum</a:t>
+            </a:r>
+            <a:endParaRPr lang="en-US" sz="1200" dirty="0"/>
+          </a:p>
+        </p:txBody>
+      </p:sp>
+    </p:spTree>
+  </p:cSld>
+  <p:clrMapOvr>
+    <a:masterClrMapping/>
+  </p:clrMapOvr>
+</p:sld>
+</file>
+
+<file path=ppt/slides/slide17.xml><?xml version="1.0" encoding="utf-8"?>
+<p:sld xmlns:a="http://schemas.openxmlformats.org/drawingml/2006/main" xmlns:r="http://schemas.openxmlformats.org/officeDocument/2006/relationships" xmlns:p="http://schemas.openxmlformats.org/presentationml/2006/main">
+  <p:cSld name="Slide 17">
+    <p:bg>
+      <p:bgPr>
+        <a:solidFill>
+          <a:srgbClr val="FFFFFF"/>
+        </a:solidFill>
+      </p:bgPr>
+    </p:bg>
+    <p:spTree>
+      <p:nvGrpSpPr>
+        <p:cNvPr id="1" name=""/>
+        <p:cNvGrpSpPr/>
+        <p:nvPr/>
+      </p:nvGrpSpPr>
+      <p:grpSpPr>
+        <a:xfrm>
+          <a:off x="0" y="0"/>
+          <a:ext cx="0" cy="0"/>
+          <a:chOff x="0" y="0"/>
+          <a:chExt cx="0" cy="0"/>
+        </a:xfrm>
+      </p:grpSpPr>
+      <p:sp>
+        <p:nvSpPr>
+          <p:cNvPr id="2" name="Text 0"/>
+          <p:cNvSpPr/>
+          <p:nvPr/>
+        </p:nvSpPr>
+        <p:spPr>
+          <a:xfrm>
+            <a:off x="0" y="0"/>
+            <a:ext cx="9144000" cy="101501"/>
+          </a:xfrm>
+          <a:prstGeom prst="rect">
+            <a:avLst/>
+          </a:prstGeom>
+          <a:solidFill>
+            <a:srgbClr val="277884"/>
+          </a:solidFill>
+          <a:ln/>
+        </p:spPr>
+        <p:txBody>
+          <a:bodyPr wrap="square" rtlCol="0" anchor="ctr"/>
+          <a:lstStyle/>
+          <a:p>
+            <a:pPr indent="0" marL="0">
+              <a:buNone/>
+            </a:pPr>
+            <a:endParaRPr lang="en-US" dirty="0"/>
+          </a:p>
+        </p:txBody>
+      </p:sp>
+      <p:sp>
+        <p:nvSpPr>
+          <p:cNvPr id="3" name="Text 1"/>
+          <p:cNvSpPr/>
+          <p:nvPr/>
+        </p:nvSpPr>
+        <p:spPr>
+          <a:xfrm>
+            <a:off x="406301" y="457051"/>
+            <a:ext cx="8498026" cy="274290"/>
+          </a:xfrm>
+          <a:prstGeom prst="rect">
+            <a:avLst/>
+          </a:prstGeom>
+          <a:noFill/>
+          <a:ln/>
+        </p:spPr>
+        <p:txBody>
+          <a:bodyPr wrap="square" lIns="0" tIns="0" rIns="0" bIns="0" rtlCol="0" anchor="t"/>
+          <a:lstStyle/>
+          <a:p>
+            <a:pPr algn="l" indent="0" marL="0">
+              <a:lnSpc>
+                <a:spcPts val="2160"/>
+              </a:lnSpc>
+              <a:spcBef>
+                <a:spcPts val="600"/>
+              </a:spcBef>
+              <a:spcAft>
+                <a:spcPts val="800"/>
+              </a:spcAft>
+              <a:buNone/>
+            </a:pPr>
+            <a:r>
+              <a:rPr lang="en-US" sz="1800" b="1" dirty="0">
+                <a:solidFill>
+                  <a:srgbClr val="FE4447"/>
+                </a:solidFill>
+                <a:latin typeface="Georgia" pitchFamily="34" charset="0"/>
+                <a:ea typeface="Georgia" pitchFamily="34" charset="-122"/>
+                <a:cs typeface="Georgia" pitchFamily="34" charset="-120"/>
+              </a:rPr>
+              <a:t>Differentiation</a:t>
+            </a:r>
+            <a:endParaRPr lang="en-US" sz="1800" dirty="0"/>
+          </a:p>
+        </p:txBody>
+      </p:sp>
+      <p:sp>
+        <p:nvSpPr>
+          <p:cNvPr id="4" name="Text 2"/>
+          <p:cNvSpPr/>
+          <p:nvPr/>
+        </p:nvSpPr>
+        <p:spPr>
+          <a:xfrm>
+            <a:off x="634901" y="883593"/>
+            <a:ext cx="8102798" cy="731341"/>
+          </a:xfrm>
+          <a:prstGeom prst="rect">
+            <a:avLst/>
+          </a:prstGeom>
+          <a:noFill/>
+          <a:ln/>
+        </p:spPr>
+        <p:txBody>
+          <a:bodyPr wrap="square" lIns="0" tIns="0" rIns="0" bIns="0" rtlCol="0" anchor="t"/>
+          <a:lstStyle/>
+          <a:p>
+            <a:pPr algn="l" marL="342900" indent="-342900">
+              <a:lnSpc>
+                <a:spcPts val="1620"/>
+              </a:lnSpc>
+              <a:spcAft>
+                <a:spcPts val="300"/>
+              </a:spcAft>
+              <a:buSzPct val="100000"/>
+              <a:buChar char="•"/>
+            </a:pPr>
+            <a:r>
+              <a:rPr lang="en-US" sz="1200" b="1" dirty="0">
+                <a:solidFill>
+                  <a:srgbClr val="1C2833"/>
+                </a:solidFill>
+                <a:latin typeface="Arial" pitchFamily="34" charset="0"/>
+                <a:ea typeface="Arial" pitchFamily="34" charset="-122"/>
+                <a:cs typeface="Arial" pitchFamily="34" charset="-120"/>
+              </a:rPr>
+              <a:t>One tier up:</a:t>
+            </a:r>
+            <a:pPr algn="l" indent="0" marL="0">
+              <a:lnSpc>
+                <a:spcPts val="1620"/>
+              </a:lnSpc>
+              <a:spcAft>
+                <a:spcPts val="300"/>
+              </a:spcAft>
+              <a:buNone/>
+            </a:pPr>
+            <a:r>
+              <a:rPr lang="en-US" sz="1200" dirty="0">
+                <a:solidFill>
+                  <a:srgbClr val="1C2833"/>
+                </a:solidFill>
+                <a:latin typeface="Arial" pitchFamily="34" charset="0"/>
+                <a:ea typeface="Arial" pitchFamily="34" charset="-122"/>
+                <a:cs typeface="Arial" pitchFamily="34" charset="-120"/>
+              </a:rPr>
+              <a:t> Compare Nārāyaṇa to Bhāskara II (~1150 CE). What did Bhāskara cover that Nārāyaṇa didn't? Vice versa? (Bhāskara: calculus precursors, planetary motion. Nārāyaṇa: combinatorics, magic squares.)</a:t>
+            </a:r>
+            <a:endParaRPr lang="en-US" sz="1200" dirty="0"/>
+          </a:p>
+          <a:p>
+            <a:pPr algn="l" marL="342900" indent="-342900">
+              <a:lnSpc>
+                <a:spcPts val="1620"/>
+              </a:lnSpc>
+              <a:spcAft>
+                <a:spcPts val="300"/>
+              </a:spcAft>
+              <a:buSzPct val="100000"/>
+              <a:buChar char="•"/>
+            </a:pPr>
+            <a:r>
+              <a:rPr lang="en-US" sz="1200" b="1" dirty="0">
+                <a:solidFill>
+                  <a:srgbClr val="1C2833"/>
+                </a:solidFill>
+                <a:latin typeface="Arial" pitchFamily="34" charset="0"/>
+                <a:ea typeface="Arial" pitchFamily="34" charset="-122"/>
+                <a:cs typeface="Arial" pitchFamily="34" charset="-120"/>
+              </a:rPr>
+              <a:t>One tier down:</a:t>
+            </a:r>
+            <a:pPr algn="l" indent="0" marL="0">
+              <a:lnSpc>
+                <a:spcPts val="1620"/>
+              </a:lnSpc>
+              <a:spcAft>
+                <a:spcPts val="300"/>
+              </a:spcAft>
+              <a:buNone/>
+            </a:pPr>
+            <a:r>
+              <a:rPr lang="en-US" sz="1200" dirty="0">
+                <a:solidFill>
+                  <a:srgbClr val="1C2833"/>
+                </a:solidFill>
+                <a:latin typeface="Arial" pitchFamily="34" charset="0"/>
+                <a:ea typeface="Arial" pitchFamily="34" charset="-122"/>
+                <a:cs typeface="Arial" pitchFamily="34" charset="-120"/>
+              </a:rPr>
+              <a:t> Write just 3–4 sentences. Focus on the "rule vs. example" distinction.</a:t>
+            </a:r>
+            <a:endParaRPr lang="en-US" sz="1200" dirty="0"/>
+          </a:p>
+        </p:txBody>
+      </p:sp>
+      <p:sp>
+        <p:nvSpPr>
+          <p:cNvPr id="5" name="Text 3"/>
+          <p:cNvSpPr/>
+          <p:nvPr/>
+        </p:nvSpPr>
+        <p:spPr>
+          <a:xfrm>
+            <a:off x="406301" y="4434929"/>
+            <a:ext cx="8498026" cy="213271"/>
+          </a:xfrm>
+          <a:prstGeom prst="rect">
+            <a:avLst/>
+          </a:prstGeom>
+          <a:noFill/>
+          <a:ln/>
+        </p:spPr>
+        <p:txBody>
+          <a:bodyPr wrap="square" lIns="0" tIns="0" rIns="0" bIns="0" rtlCol="0" anchor="t"/>
+          <a:lstStyle/>
+          <a:p>
+            <a:pPr algn="l" indent="0" marL="0">
+              <a:lnSpc>
+                <a:spcPts val="1680"/>
+              </a:lnSpc>
+              <a:spcBef>
+                <a:spcPts val="300"/>
+              </a:spcBef>
+              <a:spcAft>
+                <a:spcPts val="300"/>
+              </a:spcAft>
+              <a:buNone/>
+            </a:pPr>
+            <a:r>
+              <a:rPr lang="en-US" sz="1200" dirty="0">
+                <a:solidFill>
+                  <a:srgbClr val="1C2833"/>
+                </a:solidFill>
+                <a:latin typeface="Arial" pitchFamily="34" charset="0"/>
+                <a:ea typeface="Arial" pitchFamily="34" charset="-122"/>
+                <a:cs typeface="Arial" pitchFamily="34" charset="-120"/>
+              </a:rPr>
+              <a:t>Middle ·  · IKS Curriculum</a:t>
+            </a:r>
+            <a:endParaRPr lang="en-US" sz="1200" dirty="0"/>
+          </a:p>
+        </p:txBody>
+      </p:sp>
+    </p:spTree>
+  </p:cSld>
+  <p:clrMapOvr>
+    <a:masterClrMapping/>
+  </p:clrMapOvr>
+</p:sld>
+</file>
+
+<file path=ppt/slides/slide18.xml><?xml version="1.0" encoding="utf-8"?>
+<p:sld xmlns:a="http://schemas.openxmlformats.org/drawingml/2006/main" xmlns:r="http://schemas.openxmlformats.org/officeDocument/2006/relationships" xmlns:p="http://schemas.openxmlformats.org/presentationml/2006/main">
+  <p:cSld name="Slide 18">
+    <p:bg>
+      <p:bgPr>
+        <a:solidFill>
+          <a:srgbClr val="FFFFFF"/>
+        </a:solidFill>
+      </p:bgPr>
+    </p:bg>
+    <p:spTree>
+      <p:nvGrpSpPr>
+        <p:cNvPr id="1" name=""/>
+        <p:cNvGrpSpPr/>
+        <p:nvPr/>
+      </p:nvGrpSpPr>
+      <p:grpSpPr>
+        <a:xfrm>
+          <a:off x="0" y="0"/>
+          <a:ext cx="0" cy="0"/>
+          <a:chOff x="0" y="0"/>
+          <a:chExt cx="0" cy="0"/>
+        </a:xfrm>
+      </p:grpSpPr>
+      <p:sp>
+        <p:nvSpPr>
+          <p:cNvPr id="2" name="Text 0"/>
+          <p:cNvSpPr/>
+          <p:nvPr/>
+        </p:nvSpPr>
+        <p:spPr>
+          <a:xfrm>
+            <a:off x="0" y="0"/>
+            <a:ext cx="9144000" cy="101501"/>
+          </a:xfrm>
+          <a:prstGeom prst="rect">
+            <a:avLst/>
+          </a:prstGeom>
+          <a:solidFill>
+            <a:srgbClr val="277884"/>
+          </a:solidFill>
+          <a:ln/>
+        </p:spPr>
+        <p:txBody>
+          <a:bodyPr wrap="square" rtlCol="0" anchor="ctr"/>
+          <a:lstStyle/>
+          <a:p>
+            <a:pPr indent="0" marL="0">
+              <a:buNone/>
+            </a:pPr>
+            <a:endParaRPr lang="en-US" dirty="0"/>
+          </a:p>
+        </p:txBody>
+      </p:sp>
+      <p:sp>
+        <p:nvSpPr>
+          <p:cNvPr id="3" name="Text 1"/>
+          <p:cNvSpPr/>
+          <p:nvPr/>
+        </p:nvSpPr>
+        <p:spPr>
+          <a:xfrm>
+            <a:off x="406301" y="457051"/>
+            <a:ext cx="8498026" cy="274290"/>
+          </a:xfrm>
+          <a:prstGeom prst="rect">
+            <a:avLst/>
+          </a:prstGeom>
+          <a:noFill/>
+          <a:ln/>
+        </p:spPr>
+        <p:txBody>
+          <a:bodyPr wrap="square" lIns="0" tIns="0" rIns="0" bIns="0" rtlCol="0" anchor="t"/>
+          <a:lstStyle/>
+          <a:p>
+            <a:pPr algn="l" indent="0" marL="0">
+              <a:lnSpc>
+                <a:spcPts val="2160"/>
+              </a:lnSpc>
+              <a:spcBef>
+                <a:spcPts val="600"/>
+              </a:spcBef>
+              <a:spcAft>
+                <a:spcPts val="800"/>
+              </a:spcAft>
+              <a:buNone/>
+            </a:pPr>
+            <a:r>
+              <a:rPr lang="en-US" sz="1800" b="1" dirty="0">
+                <a:solidFill>
+                  <a:srgbClr val="FE4447"/>
+                </a:solidFill>
+                <a:latin typeface="Georgia" pitchFamily="34" charset="0"/>
+                <a:ea typeface="Georgia" pitchFamily="34" charset="-122"/>
+                <a:cs typeface="Georgia" pitchFamily="34" charset="-120"/>
+              </a:rPr>
+              <a:t>Teacher notes</a:t>
+            </a:r>
+            <a:endParaRPr lang="en-US" sz="1800" dirty="0"/>
+          </a:p>
+        </p:txBody>
+      </p:sp>
+      <p:sp>
+        <p:nvSpPr>
+          <p:cNvPr id="4" name="Text 2"/>
+          <p:cNvSpPr/>
+          <p:nvPr/>
+        </p:nvSpPr>
+        <p:spPr>
+          <a:xfrm>
+            <a:off x="634901" y="883593"/>
+            <a:ext cx="8102798" cy="1180802"/>
+          </a:xfrm>
+          <a:prstGeom prst="rect">
+            <a:avLst/>
+          </a:prstGeom>
+          <a:noFill/>
+          <a:ln/>
+        </p:spPr>
+        <p:txBody>
+          <a:bodyPr wrap="square" lIns="0" tIns="0" rIns="0" bIns="0" rtlCol="0" anchor="t"/>
+          <a:lstStyle/>
+          <a:p>
+            <a:pPr algn="l" marL="342900" indent="-342900">
+              <a:lnSpc>
+                <a:spcPts val="1620"/>
+              </a:lnSpc>
+              <a:spcAft>
+                <a:spcPts val="300"/>
+              </a:spcAft>
+              <a:buSzPct val="100000"/>
+              <a:buChar char="•"/>
+            </a:pPr>
+            <a:r>
+              <a:rPr lang="en-US" sz="1200" dirty="0">
+                <a:solidFill>
+                  <a:srgbClr val="1C2833"/>
+                </a:solidFill>
+                <a:latin typeface="Arial" pitchFamily="34" charset="0"/>
+                <a:ea typeface="Arial" pitchFamily="34" charset="-122"/>
+                <a:cs typeface="Arial" pitchFamily="34" charset="-120"/>
+              </a:rPr>
+              <a:t>Avoid hero-worship framing. Nārāyaṇa was a brilliant systematiser; he was not the sole discoverer of magic squares.</a:t>
+            </a:r>
+            <a:endParaRPr lang="en-US" sz="1200" dirty="0"/>
+          </a:p>
+          <a:p>
+            <a:pPr algn="l" marL="342900" indent="-342900">
+              <a:lnSpc>
+                <a:spcPts val="1620"/>
+              </a:lnSpc>
+              <a:spcAft>
+                <a:spcPts val="300"/>
+              </a:spcAft>
+              <a:buSzPct val="100000"/>
+              <a:buChar char="•"/>
+            </a:pPr>
+            <a:r>
+              <a:rPr lang="en-US" sz="1200" dirty="0">
+                <a:solidFill>
+                  <a:srgbClr val="1C2833"/>
+                </a:solidFill>
+                <a:latin typeface="Arial" pitchFamily="34" charset="0"/>
+                <a:ea typeface="Arial" pitchFamily="34" charset="-122"/>
+                <a:cs typeface="Arial" pitchFamily="34" charset="-120"/>
+              </a:rPr>
+              <a:t>A few students will ask whether Nārāyaṇa's methods were known outside India. Answer: yes, eventually — the same odd-order method shows up in 17th-c. European mathematics (via de la Loubère, 1687) probably with intermediate Islamic-world transmission. The independent re-discovery story is interesting but speculative.</a:t>
+            </a:r>
+            <a:endParaRPr lang="en-US" sz="1200" dirty="0"/>
+          </a:p>
+          <a:p>
+            <a:pPr algn="l" marL="342900" indent="-342900">
+              <a:lnSpc>
+                <a:spcPts val="1620"/>
+              </a:lnSpc>
+              <a:spcAft>
+                <a:spcPts val="300"/>
+              </a:spcAft>
+              <a:buSzPct val="100000"/>
+              <a:buChar char="•"/>
+            </a:pPr>
+            <a:r>
+              <a:rPr lang="en-US" sz="1200" dirty="0">
+                <a:solidFill>
+                  <a:srgbClr val="1C2833"/>
+                </a:solidFill>
+                <a:latin typeface="Arial" pitchFamily="34" charset="0"/>
+                <a:ea typeface="Arial" pitchFamily="34" charset="-122"/>
+                <a:cs typeface="Arial" pitchFamily="34" charset="-120"/>
+              </a:rPr>
+              <a:t>The reflection paragraph is a low-stakes formative — don't grade harshly. Read for understanding, not for polish.</a:t>
+            </a:r>
+            <a:endParaRPr lang="en-US" sz="1200" dirty="0"/>
+          </a:p>
+        </p:txBody>
+      </p:sp>
+      <p:sp>
+        <p:nvSpPr>
+          <p:cNvPr id="5" name="Text 3"/>
+          <p:cNvSpPr/>
+          <p:nvPr/>
+        </p:nvSpPr>
+        <p:spPr>
+          <a:xfrm>
+            <a:off x="406301" y="4434929"/>
+            <a:ext cx="8498026" cy="213271"/>
+          </a:xfrm>
+          <a:prstGeom prst="rect">
+            <a:avLst/>
+          </a:prstGeom>
+          <a:noFill/>
+          <a:ln/>
+        </p:spPr>
+        <p:txBody>
+          <a:bodyPr wrap="square" lIns="0" tIns="0" rIns="0" bIns="0" rtlCol="0" anchor="t"/>
+          <a:lstStyle/>
+          <a:p>
+            <a:pPr algn="l" indent="0" marL="0">
+              <a:lnSpc>
+                <a:spcPts val="1680"/>
+              </a:lnSpc>
+              <a:spcBef>
+                <a:spcPts val="300"/>
+              </a:spcBef>
+              <a:spcAft>
+                <a:spcPts val="300"/>
+              </a:spcAft>
+              <a:buNone/>
+            </a:pPr>
+            <a:r>
+              <a:rPr lang="en-US" sz="1200" dirty="0">
+                <a:solidFill>
+                  <a:srgbClr val="1C2833"/>
+                </a:solidFill>
+                <a:latin typeface="Arial" pitchFamily="34" charset="0"/>
+                <a:ea typeface="Arial" pitchFamily="34" charset="-122"/>
+                <a:cs typeface="Arial" pitchFamily="34" charset="-120"/>
+              </a:rPr>
+              <a:t>Middle ·  · IKS Curriculum</a:t>
+            </a:r>
+            <a:endParaRPr lang="en-US" sz="1200" dirty="0"/>
+          </a:p>
+        </p:txBody>
+      </p:sp>
+    </p:spTree>
+  </p:cSld>
+  <p:clrMapOvr>
+    <a:masterClrMapping/>
+  </p:clrMapOvr>
+</p:sld>
+</file>
+
+<file path=ppt/slides/slide19.xml><?xml version="1.0" encoding="utf-8"?>
+<p:sld xmlns:a="http://schemas.openxmlformats.org/drawingml/2006/main" xmlns:r="http://schemas.openxmlformats.org/officeDocument/2006/relationships" xmlns:p="http://schemas.openxmlformats.org/presentationml/2006/main">
+  <p:cSld name="Slide 19">
+    <p:bg>
+      <p:bgPr>
+        <a:solidFill>
+          <a:srgbClr val="FFFFFF"/>
+        </a:solidFill>
+      </p:bgPr>
+    </p:bg>
+    <p:spTree>
+      <p:nvGrpSpPr>
+        <p:cNvPr id="1" name=""/>
+        <p:cNvGrpSpPr/>
+        <p:nvPr/>
+      </p:nvGrpSpPr>
+      <p:grpSpPr>
+        <a:xfrm>
+          <a:off x="0" y="0"/>
+          <a:ext cx="0" cy="0"/>
+          <a:chOff x="0" y="0"/>
+          <a:chExt cx="0" cy="0"/>
+        </a:xfrm>
+      </p:grpSpPr>
+      <p:sp>
+        <p:nvSpPr>
+          <p:cNvPr id="2" name="Text 0"/>
+          <p:cNvSpPr/>
+          <p:nvPr/>
+        </p:nvSpPr>
+        <p:spPr>
+          <a:xfrm>
+            <a:off x="0" y="0"/>
+            <a:ext cx="9144000" cy="101501"/>
+          </a:xfrm>
+          <a:prstGeom prst="rect">
+            <a:avLst/>
+          </a:prstGeom>
+          <a:solidFill>
+            <a:srgbClr val="277884"/>
+          </a:solidFill>
+          <a:ln/>
+        </p:spPr>
+        <p:txBody>
+          <a:bodyPr wrap="square" rtlCol="0" anchor="ctr"/>
+          <a:lstStyle/>
+          <a:p>
+            <a:pPr indent="0" marL="0">
+              <a:buNone/>
+            </a:pPr>
+            <a:endParaRPr lang="en-US" dirty="0"/>
+          </a:p>
+        </p:txBody>
+      </p:sp>
+      <p:sp>
+        <p:nvSpPr>
+          <p:cNvPr id="3" name="Text 1"/>
+          <p:cNvSpPr/>
+          <p:nvPr/>
+        </p:nvSpPr>
+        <p:spPr>
+          <a:xfrm>
+            <a:off x="406301" y="457051"/>
+            <a:ext cx="8498026" cy="274290"/>
+          </a:xfrm>
+          <a:prstGeom prst="rect">
+            <a:avLst/>
+          </a:prstGeom>
+          <a:noFill/>
+          <a:ln/>
+        </p:spPr>
+        <p:txBody>
+          <a:bodyPr wrap="square" lIns="0" tIns="0" rIns="0" bIns="0" rtlCol="0" anchor="t"/>
+          <a:lstStyle/>
+          <a:p>
+            <a:pPr algn="l" indent="0" marL="0">
+              <a:lnSpc>
+                <a:spcPts val="2160"/>
+              </a:lnSpc>
+              <a:spcBef>
+                <a:spcPts val="600"/>
+              </a:spcBef>
+              <a:spcAft>
+                <a:spcPts val="800"/>
+              </a:spcAft>
+              <a:buNone/>
+            </a:pPr>
+            <a:r>
+              <a:rPr lang="en-US" sz="1800" b="1" dirty="0">
+                <a:solidFill>
+                  <a:srgbClr val="FE4447"/>
+                </a:solidFill>
+                <a:latin typeface="Georgia" pitchFamily="34" charset="0"/>
+                <a:ea typeface="Georgia" pitchFamily="34" charset="-122"/>
+                <a:cs typeface="Georgia" pitchFamily="34" charset="-120"/>
+              </a:rPr>
+              <a:t>Citation(s) used in this lesson</a:t>
+            </a:r>
+            <a:endParaRPr lang="en-US" sz="1800" dirty="0"/>
+          </a:p>
+        </p:txBody>
+      </p:sp>
+      <p:sp>
+        <p:nvSpPr>
+          <p:cNvPr id="4" name="Text 2"/>
+          <p:cNvSpPr/>
+          <p:nvPr/>
+        </p:nvSpPr>
+        <p:spPr>
+          <a:xfrm>
+            <a:off x="634901" y="883593"/>
+            <a:ext cx="8102798" cy="525661"/>
+          </a:xfrm>
+          <a:prstGeom prst="rect">
+            <a:avLst/>
+          </a:prstGeom>
+          <a:noFill/>
+          <a:ln/>
+        </p:spPr>
+        <p:txBody>
+          <a:bodyPr wrap="square" lIns="0" tIns="0" rIns="0" bIns="0" rtlCol="0" anchor="t"/>
+          <a:lstStyle/>
+          <a:p>
+            <a:pPr algn="l" marL="342900" indent="-342900">
+              <a:lnSpc>
+                <a:spcPts val="1620"/>
+              </a:lnSpc>
+              <a:spcAft>
+                <a:spcPts val="300"/>
+              </a:spcAft>
+              <a:buSzPct val="100000"/>
+              <a:buChar char="•"/>
+            </a:pPr>
+            <a:r>
+              <a:rPr lang="en-US" sz="1200" dirty="0">
+                <a:solidFill>
+                  <a:srgbClr val="1C2833"/>
+                </a:solidFill>
+                <a:latin typeface="Arial" pitchFamily="34" charset="0"/>
+                <a:ea typeface="Arial" pitchFamily="34" charset="-122"/>
+                <a:cs typeface="Arial" pitchFamily="34" charset="-120"/>
+              </a:rPr>
+              <a:t>Nārāyaṇa Paṇḍita, </a:t>
+            </a:r>
+            <a:pPr algn="l" indent="0" marL="0">
+              <a:lnSpc>
+                <a:spcPts val="1620"/>
+              </a:lnSpc>
+              <a:spcAft>
+                <a:spcPts val="300"/>
+              </a:spcAft>
+              <a:buNone/>
+            </a:pPr>
+            <a:r>
+              <a:rPr lang="en-US" sz="1200" i="1" dirty="0">
+                <a:solidFill>
+                  <a:srgbClr val="1C2833"/>
+                </a:solidFill>
+                <a:latin typeface="Arial" pitchFamily="34" charset="0"/>
+                <a:ea typeface="Arial" pitchFamily="34" charset="-122"/>
+                <a:cs typeface="Arial" pitchFamily="34" charset="-120"/>
+              </a:rPr>
               <a:t>Gaṇita-kaumudī</a:t>
             </a:r>
             <a:pPr algn="l" indent="0" marL="0">
               <a:lnSpc>
-                <a:spcPts val="1680"/>
-              </a:lnSpc>
-              <a:spcBef>
-                <a:spcPts val="300"/>
-              </a:spcBef>
+                <a:spcPts val="1620"/>
+              </a:lnSpc>
               <a:spcAft>
                 <a:spcPts val="300"/>
               </a:spcAft>
@@ -3024,11 +5850,8 @@
             </a:r>
             <a:pPr algn="l" indent="0" marL="0">
               <a:lnSpc>
-                <a:spcPts val="1680"/>
-              </a:lnSpc>
-              <a:spcBef>
-                <a:spcPts val="300"/>
-              </a:spcBef>
+                <a:spcPts val="1620"/>
+              </a:lnSpc>
               <a:spcAft>
                 <a:spcPts val="300"/>
               </a:spcAft>
@@ -3047,11 +5870,8 @@
             </a:r>
             <a:pPr algn="l" indent="0" marL="0">
               <a:lnSpc>
-                <a:spcPts val="1680"/>
-              </a:lnSpc>
-              <a:spcBef>
-                <a:spcPts val="300"/>
-              </a:spcBef>
+                <a:spcPts val="1620"/>
+              </a:lnSpc>
               <a:spcAft>
                 <a:spcPts val="300"/>
               </a:spcAft>
@@ -3066,15 +5886,36 @@
                 <a:ea typeface="Arial" pitchFamily="34" charset="-122"/>
                 <a:cs typeface="Arial" pitchFamily="34" charset="-120"/>
               </a:rPr>
-              <a:t>), 1356 CE — primary source paraphrased. – Plofker (2009), </a:t>
-            </a:r>
-            <a:pPr algn="l" indent="0" marL="0">
-              <a:lnSpc>
-                <a:spcPts val="1680"/>
-              </a:lnSpc>
-              <a:spcBef>
-                <a:spcPts val="300"/>
-              </a:spcBef>
+              <a:t>), 1356 CE — primary source paraphrased.</a:t>
+            </a:r>
+            <a:endParaRPr lang="en-US" sz="1200" dirty="0"/>
+          </a:p>
+          <a:p>
+            <a:pPr algn="l" marL="342900" indent="-342900">
+              <a:lnSpc>
+                <a:spcPts val="1620"/>
+              </a:lnSpc>
+              <a:spcAft>
+                <a:spcPts val="300"/>
+              </a:spcAft>
+              <a:buSzPct val="100000"/>
+              <a:buChar char="•"/>
+            </a:pPr>
+            <a:r>
+              <a:rPr lang="en-US" sz="1200" dirty="0">
+                <a:solidFill>
+                  <a:srgbClr val="1C2833"/>
+                </a:solidFill>
+                <a:latin typeface="Arial" pitchFamily="34" charset="0"/>
+                <a:ea typeface="Arial" pitchFamily="34" charset="-122"/>
+                <a:cs typeface="Arial" pitchFamily="34" charset="-120"/>
+              </a:rPr>
+              <a:t>Plofker (2009), </a:t>
+            </a:r>
+            <a:pPr algn="l" indent="0" marL="0">
+              <a:lnSpc>
+                <a:spcPts val="1620"/>
+              </a:lnSpc>
               <a:spcAft>
                 <a:spcPts val="300"/>
               </a:spcAft>
@@ -3093,11 +5934,8 @@
             </a:r>
             <a:pPr algn="l" indent="0" marL="0">
               <a:lnSpc>
-                <a:spcPts val="1680"/>
-              </a:lnSpc>
-              <a:spcBef>
-                <a:spcPts val="300"/>
-              </a:spcBef>
+                <a:spcPts val="1620"/>
+              </a:lnSpc>
               <a:spcAft>
                 <a:spcPts val="300"/>
               </a:spcAft>
@@ -3270,7 +6108,7 @@
                 <a:ea typeface="Georgia" pitchFamily="34" charset="-122"/>
                 <a:cs typeface="Georgia" pitchFamily="34" charset="-120"/>
               </a:rPr>
-              <a:t>Materials</a:t>
+              <a:t>Learning objective</a:t>
             </a:r>
             <a:endParaRPr lang="en-US" sz="1800" dirty="0"/>
           </a:p>
@@ -3285,7 +6123,7 @@
         <p:spPr>
           <a:xfrm>
             <a:off x="406301" y="870942"/>
-            <a:ext cx="8498026" cy="213271"/>
+            <a:ext cx="8498026" cy="426541"/>
           </a:xfrm>
           <a:prstGeom prst="rect">
             <a:avLst/>
@@ -3318,7 +6156,53 @@
                 <a:ea typeface="Arial" pitchFamily="34" charset="-122"/>
                 <a:cs typeface="Arial" pitchFamily="34" charset="-120"/>
               </a:rPr>
-              <a:t>– Whiteboard – Notebook – A printed simple chronology chart (handout, see Student-facing content)</a:t>
+              <a:t>By the end of this lesson, students will (a) place Nārāyaṇa Paṇḍita (14th c. CE) in the chronology of Indian mathematics, (b) describe what the </a:t>
+            </a:r>
+            <a:pPr algn="l" indent="0" marL="0">
+              <a:lnSpc>
+                <a:spcPts val="1680"/>
+              </a:lnSpc>
+              <a:spcBef>
+                <a:spcPts val="300"/>
+              </a:spcBef>
+              <a:spcAft>
+                <a:spcPts val="300"/>
+              </a:spcAft>
+              <a:buNone/>
+            </a:pPr>
+            <a:r>
+              <a:rPr lang="en-US" sz="1200" i="1" dirty="0">
+                <a:solidFill>
+                  <a:srgbClr val="1C2833"/>
+                </a:solidFill>
+                <a:latin typeface="Arial" pitchFamily="34" charset="0"/>
+                <a:ea typeface="Arial" pitchFamily="34" charset="-122"/>
+                <a:cs typeface="Arial" pitchFamily="34" charset="-120"/>
+              </a:rPr>
+              <a:t>Gaṇita-kaumudī</a:t>
+            </a:r>
+            <a:pPr algn="l" indent="0" marL="0">
+              <a:lnSpc>
+                <a:spcPts val="1680"/>
+              </a:lnSpc>
+              <a:spcBef>
+                <a:spcPts val="300"/>
+              </a:spcBef>
+              <a:spcAft>
+                <a:spcPts val="300"/>
+              </a:spcAft>
+              <a:buNone/>
+            </a:pPr>
+            <a:r>
+              <a:rPr lang="en-US" sz="1200" dirty="0">
+                <a:solidFill>
+                  <a:srgbClr val="1C2833"/>
+                </a:solidFill>
+                <a:latin typeface="Arial" pitchFamily="34" charset="0"/>
+                <a:ea typeface="Arial" pitchFamily="34" charset="-122"/>
+                <a:cs typeface="Arial" pitchFamily="34" charset="-120"/>
+              </a:rPr>
+              <a:t> covers, and (c) write a short reflection on why systematic written method matters.</a:t>
             </a:r>
             <a:endParaRPr lang="en-US" sz="1200" dirty="0"/>
           </a:p>
@@ -3476,7 +6360,7 @@
                 <a:ea typeface="Georgia" pitchFamily="34" charset="-122"/>
                 <a:cs typeface="Georgia" pitchFamily="34" charset="-120"/>
               </a:rPr>
-              <a:t>Vocabulary review</a:t>
+              <a:t>Materials</a:t>
             </a:r>
             <a:endParaRPr lang="en-US" sz="1800" dirty="0"/>
           </a:p>
@@ -3491,7 +6375,7 @@
         <p:spPr>
           <a:xfrm>
             <a:off x="634901" y="883593"/>
-            <a:ext cx="8102798" cy="544711"/>
+            <a:ext cx="8102798" cy="769441"/>
           </a:xfrm>
           <a:prstGeom prst="rect">
             <a:avLst/>
@@ -3514,26 +6398,6 @@
               <a:buChar char="•"/>
             </a:pPr>
             <a:r>
-              <a:rPr lang="en-US" sz="1200" i="1" dirty="0">
-                <a:solidFill>
-                  <a:srgbClr val="1C2833"/>
-                </a:solidFill>
-                <a:latin typeface="Arial" pitchFamily="34" charset="0"/>
-                <a:ea typeface="Arial" pitchFamily="34" charset="-122"/>
-                <a:cs typeface="Arial" pitchFamily="34" charset="-120"/>
-              </a:rPr>
-              <a:t>Gaṇita-kaumudī</a:t>
-            </a:r>
-            <a:pPr algn="l" indent="0" marL="0">
-              <a:lnSpc>
-                <a:spcPts val="1620"/>
-              </a:lnSpc>
-              <a:spcAft>
-                <a:spcPts val="300"/>
-              </a:spcAft>
-              <a:buNone/>
-            </a:pPr>
-            <a:r>
               <a:rPr lang="en-US" sz="1200" dirty="0">
                 <a:solidFill>
                   <a:srgbClr val="1C2833"/>
@@ -3542,47 +6406,7 @@
                 <a:ea typeface="Arial" pitchFamily="34" charset="-122"/>
                 <a:cs typeface="Arial" pitchFamily="34" charset="-120"/>
               </a:rPr>
-              <a:t> (introduced in </a:t>
-            </a:r>
-            <a:pPr algn="l" indent="0" marL="0">
-              <a:lnSpc>
-                <a:spcPts val="1620"/>
-              </a:lnSpc>
-              <a:spcAft>
-                <a:spcPts val="300"/>
-              </a:spcAft>
-              <a:buNone/>
-            </a:pPr>
-            <a:r>
-              <a:rPr lang="en-US" sz="1200" dirty="0">
-                <a:solidFill>
-                  <a:srgbClr val="1C2833"/>
-                </a:solidFill>
-                <a:latin typeface="Arial" pitchFamily="34" charset="0"/>
-                <a:ea typeface="Arial" pitchFamily="34" charset="-122"/>
-                <a:cs typeface="Arial" pitchFamily="34" charset="-120"/>
-              </a:rPr>
-              <a:t>_shared/glossary.md</a:t>
-            </a:r>
-            <a:pPr algn="l" indent="0" marL="0">
-              <a:lnSpc>
-                <a:spcPts val="1620"/>
-              </a:lnSpc>
-              <a:spcAft>
-                <a:spcPts val="300"/>
-              </a:spcAft>
-              <a:buNone/>
-            </a:pPr>
-            <a:r>
-              <a:rPr lang="en-US" sz="1200" dirty="0">
-                <a:solidFill>
-                  <a:srgbClr val="1C2833"/>
-                </a:solidFill>
-                <a:latin typeface="Arial" pitchFamily="34" charset="0"/>
-                <a:ea typeface="Arial" pitchFamily="34" charset="-122"/>
-                <a:cs typeface="Arial" pitchFamily="34" charset="-120"/>
-              </a:rPr>
-              <a:t>) — "Moonlight of Mathematics," Nārāyaṇa's 1356 CE treatise.</a:t>
+              <a:t>Whiteboard</a:t>
             </a:r>
             <a:endParaRPr lang="en-US" sz="1200" dirty="0"/>
           </a:p>
@@ -3598,24 +6422,28 @@
               <a:buChar char="•"/>
             </a:pPr>
             <a:r>
-              <a:rPr lang="en-US" sz="1200" i="1" dirty="0">
-                <a:solidFill>
-                  <a:srgbClr val="1C2833"/>
-                </a:solidFill>
-                <a:latin typeface="Arial" pitchFamily="34" charset="0"/>
-                <a:ea typeface="Arial" pitchFamily="34" charset="-122"/>
-                <a:cs typeface="Arial" pitchFamily="34" charset="-120"/>
-              </a:rPr>
-              <a:t>Bhadragaṇita</a:t>
-            </a:r>
-            <a:pPr algn="l" indent="0" marL="0">
+              <a:rPr lang="en-US" sz="1200" dirty="0">
+                <a:solidFill>
+                  <a:srgbClr val="1C2833"/>
+                </a:solidFill>
+                <a:latin typeface="Arial" pitchFamily="34" charset="0"/>
+                <a:ea typeface="Arial" pitchFamily="34" charset="-122"/>
+                <a:cs typeface="Arial" pitchFamily="34" charset="-120"/>
+              </a:rPr>
+              <a:t>Notebook</a:t>
+            </a:r>
+            <a:endParaRPr lang="en-US" sz="1200" dirty="0"/>
+          </a:p>
+          <a:p>
+            <a:pPr algn="l" marL="342900" indent="-342900">
               <a:lnSpc>
                 <a:spcPts val="1620"/>
               </a:lnSpc>
               <a:spcAft>
                 <a:spcPts val="300"/>
               </a:spcAft>
-              <a:buNone/>
+              <a:buSzPct val="100000"/>
+              <a:buChar char="•"/>
             </a:pPr>
             <a:r>
               <a:rPr lang="en-US" sz="1200" dirty="0">
@@ -3626,47 +6454,7 @@
                 <a:ea typeface="Arial" pitchFamily="34" charset="-122"/>
                 <a:cs typeface="Arial" pitchFamily="34" charset="-120"/>
               </a:rPr>
-              <a:t> — Book 14 of the </a:t>
-            </a:r>
-            <a:pPr algn="l" indent="0" marL="0">
-              <a:lnSpc>
-                <a:spcPts val="1620"/>
-              </a:lnSpc>
-              <a:spcAft>
-                <a:spcPts val="300"/>
-              </a:spcAft>
-              <a:buNone/>
-            </a:pPr>
-            <a:r>
-              <a:rPr lang="en-US" sz="1200" i="1" dirty="0">
-                <a:solidFill>
-                  <a:srgbClr val="1C2833"/>
-                </a:solidFill>
-                <a:latin typeface="Arial" pitchFamily="34" charset="0"/>
-                <a:ea typeface="Arial" pitchFamily="34" charset="-122"/>
-                <a:cs typeface="Arial" pitchFamily="34" charset="-120"/>
-              </a:rPr>
-              <a:t>Gaṇita-kaumudī</a:t>
-            </a:r>
-            <a:pPr algn="l" indent="0" marL="0">
-              <a:lnSpc>
-                <a:spcPts val="1620"/>
-              </a:lnSpc>
-              <a:spcAft>
-                <a:spcPts val="300"/>
-              </a:spcAft>
-              <a:buNone/>
-            </a:pPr>
-            <a:r>
-              <a:rPr lang="en-US" sz="1200" dirty="0">
-                <a:solidFill>
-                  <a:srgbClr val="1C2833"/>
-                </a:solidFill>
-                <a:latin typeface="Arial" pitchFamily="34" charset="0"/>
-                <a:ea typeface="Arial" pitchFamily="34" charset="-122"/>
-                <a:cs typeface="Arial" pitchFamily="34" charset="-120"/>
-              </a:rPr>
-              <a:t>, devoted to magic squares.</a:t>
+              <a:t>A printed simple chronology chart (handout, see Student-facing content)</a:t>
             </a:r>
             <a:endParaRPr lang="en-US" sz="1200" dirty="0"/>
           </a:p>
@@ -3824,7 +6612,7 @@
                 <a:ea typeface="Georgia" pitchFamily="34" charset="-122"/>
                 <a:cs typeface="Georgia" pitchFamily="34" charset="-120"/>
               </a:rPr>
-              <a:t>Lesson flow</a:t>
+              <a:t>Vocabulary review</a:t>
             </a:r>
             <a:endParaRPr lang="en-US" sz="1800" dirty="0"/>
           </a:p>
@@ -3833,6 +6621,196 @@
       <p:sp>
         <p:nvSpPr>
           <p:cNvPr id="4" name="Text 2"/>
+          <p:cNvSpPr/>
+          <p:nvPr/>
+        </p:nvSpPr>
+        <p:spPr>
+          <a:xfrm>
+            <a:off x="634901" y="883593"/>
+            <a:ext cx="8102798" cy="544711"/>
+          </a:xfrm>
+          <a:prstGeom prst="rect">
+            <a:avLst/>
+          </a:prstGeom>
+          <a:noFill/>
+          <a:ln/>
+        </p:spPr>
+        <p:txBody>
+          <a:bodyPr wrap="square" lIns="0" tIns="0" rIns="0" bIns="0" rtlCol="0" anchor="t"/>
+          <a:lstStyle/>
+          <a:p>
+            <a:pPr algn="l" marL="342900" indent="-342900">
+              <a:lnSpc>
+                <a:spcPts val="1620"/>
+              </a:lnSpc>
+              <a:spcAft>
+                <a:spcPts val="300"/>
+              </a:spcAft>
+              <a:buSzPct val="100000"/>
+              <a:buChar char="•"/>
+            </a:pPr>
+            <a:r>
+              <a:rPr lang="en-US" sz="1200" i="1" dirty="0">
+                <a:solidFill>
+                  <a:srgbClr val="1C2833"/>
+                </a:solidFill>
+                <a:latin typeface="Arial" pitchFamily="34" charset="0"/>
+                <a:ea typeface="Arial" pitchFamily="34" charset="-122"/>
+                <a:cs typeface="Arial" pitchFamily="34" charset="-120"/>
+              </a:rPr>
+              <a:t>Gaṇita-kaumudī</a:t>
+            </a:r>
+            <a:pPr algn="l" indent="0" marL="0">
+              <a:lnSpc>
+                <a:spcPts val="1620"/>
+              </a:lnSpc>
+              <a:spcAft>
+                <a:spcPts val="300"/>
+              </a:spcAft>
+              <a:buNone/>
+            </a:pPr>
+            <a:r>
+              <a:rPr lang="en-US" sz="1200" dirty="0">
+                <a:solidFill>
+                  <a:srgbClr val="1C2833"/>
+                </a:solidFill>
+                <a:latin typeface="Arial" pitchFamily="34" charset="0"/>
+                <a:ea typeface="Arial" pitchFamily="34" charset="-122"/>
+                <a:cs typeface="Arial" pitchFamily="34" charset="-120"/>
+              </a:rPr>
+              <a:t> (introduced in </a:t>
+            </a:r>
+            <a:pPr algn="l" indent="0" marL="0">
+              <a:lnSpc>
+                <a:spcPts val="1620"/>
+              </a:lnSpc>
+              <a:spcAft>
+                <a:spcPts val="300"/>
+              </a:spcAft>
+              <a:buNone/>
+            </a:pPr>
+            <a:r>
+              <a:rPr lang="en-US" sz="1200" dirty="0">
+                <a:solidFill>
+                  <a:srgbClr val="1C2833"/>
+                </a:solidFill>
+                <a:latin typeface="Arial" pitchFamily="34" charset="0"/>
+                <a:ea typeface="Arial" pitchFamily="34" charset="-122"/>
+                <a:cs typeface="Arial" pitchFamily="34" charset="-120"/>
+              </a:rPr>
+              <a:t>_shared/glossary.md</a:t>
+            </a:r>
+            <a:pPr algn="l" indent="0" marL="0">
+              <a:lnSpc>
+                <a:spcPts val="1620"/>
+              </a:lnSpc>
+              <a:spcAft>
+                <a:spcPts val="300"/>
+              </a:spcAft>
+              <a:buNone/>
+            </a:pPr>
+            <a:r>
+              <a:rPr lang="en-US" sz="1200" dirty="0">
+                <a:solidFill>
+                  <a:srgbClr val="1C2833"/>
+                </a:solidFill>
+                <a:latin typeface="Arial" pitchFamily="34" charset="0"/>
+                <a:ea typeface="Arial" pitchFamily="34" charset="-122"/>
+                <a:cs typeface="Arial" pitchFamily="34" charset="-120"/>
+              </a:rPr>
+              <a:t>) — "Moonlight of Mathematics," Nārāyaṇa's 1356 CE treatise.</a:t>
+            </a:r>
+            <a:endParaRPr lang="en-US" sz="1200" dirty="0"/>
+          </a:p>
+          <a:p>
+            <a:pPr algn="l" marL="342900" indent="-342900">
+              <a:lnSpc>
+                <a:spcPts val="1620"/>
+              </a:lnSpc>
+              <a:spcAft>
+                <a:spcPts val="300"/>
+              </a:spcAft>
+              <a:buSzPct val="100000"/>
+              <a:buChar char="•"/>
+            </a:pPr>
+            <a:r>
+              <a:rPr lang="en-US" sz="1200" i="1" dirty="0">
+                <a:solidFill>
+                  <a:srgbClr val="1C2833"/>
+                </a:solidFill>
+                <a:latin typeface="Arial" pitchFamily="34" charset="0"/>
+                <a:ea typeface="Arial" pitchFamily="34" charset="-122"/>
+                <a:cs typeface="Arial" pitchFamily="34" charset="-120"/>
+              </a:rPr>
+              <a:t>Bhadragaṇita</a:t>
+            </a:r>
+            <a:pPr algn="l" indent="0" marL="0">
+              <a:lnSpc>
+                <a:spcPts val="1620"/>
+              </a:lnSpc>
+              <a:spcAft>
+                <a:spcPts val="300"/>
+              </a:spcAft>
+              <a:buNone/>
+            </a:pPr>
+            <a:r>
+              <a:rPr lang="en-US" sz="1200" dirty="0">
+                <a:solidFill>
+                  <a:srgbClr val="1C2833"/>
+                </a:solidFill>
+                <a:latin typeface="Arial" pitchFamily="34" charset="0"/>
+                <a:ea typeface="Arial" pitchFamily="34" charset="-122"/>
+                <a:cs typeface="Arial" pitchFamily="34" charset="-120"/>
+              </a:rPr>
+              <a:t> — Book 14 of the </a:t>
+            </a:r>
+            <a:pPr algn="l" indent="0" marL="0">
+              <a:lnSpc>
+                <a:spcPts val="1620"/>
+              </a:lnSpc>
+              <a:spcAft>
+                <a:spcPts val="300"/>
+              </a:spcAft>
+              <a:buNone/>
+            </a:pPr>
+            <a:r>
+              <a:rPr lang="en-US" sz="1200" i="1" dirty="0">
+                <a:solidFill>
+                  <a:srgbClr val="1C2833"/>
+                </a:solidFill>
+                <a:latin typeface="Arial" pitchFamily="34" charset="0"/>
+                <a:ea typeface="Arial" pitchFamily="34" charset="-122"/>
+                <a:cs typeface="Arial" pitchFamily="34" charset="-120"/>
+              </a:rPr>
+              <a:t>Gaṇita-kaumudī</a:t>
+            </a:r>
+            <a:pPr algn="l" indent="0" marL="0">
+              <a:lnSpc>
+                <a:spcPts val="1620"/>
+              </a:lnSpc>
+              <a:spcAft>
+                <a:spcPts val="300"/>
+              </a:spcAft>
+              <a:buNone/>
+            </a:pPr>
+            <a:r>
+              <a:rPr lang="en-US" sz="1200" dirty="0">
+                <a:solidFill>
+                  <a:srgbClr val="1C2833"/>
+                </a:solidFill>
+                <a:latin typeface="Arial" pitchFamily="34" charset="0"/>
+                <a:ea typeface="Arial" pitchFamily="34" charset="-122"/>
+                <a:cs typeface="Arial" pitchFamily="34" charset="-120"/>
+              </a:rPr>
+              <a:t>, devoted to magic squares.</a:t>
+            </a:r>
+            <a:endParaRPr lang="en-US" sz="1200" dirty="0"/>
+          </a:p>
+        </p:txBody>
+      </p:sp>
+      <p:sp>
+        <p:nvSpPr>
+          <p:cNvPr id="5" name="Text 3"/>
           <p:cNvSpPr/>
           <p:nvPr/>
         </p:nvSpPr>
@@ -3982,7 +6960,7 @@
                 <a:ea typeface="Georgia" pitchFamily="34" charset="-122"/>
                 <a:cs typeface="Georgia" pitchFamily="34" charset="-120"/>
               </a:rPr>
-              <a:t>Warm-up (5 min)</a:t>
+              <a:t>Lesson flow</a:t>
             </a:r>
             <a:endParaRPr lang="en-US" sz="1800" dirty="0"/>
           </a:p>
@@ -3991,100 +6969,6 @@
       <p:sp>
         <p:nvSpPr>
           <p:cNvPr id="4" name="Text 2"/>
-          <p:cNvSpPr/>
-          <p:nvPr/>
-        </p:nvSpPr>
-        <p:spPr>
-          <a:xfrm>
-            <a:off x="634901" y="883593"/>
-            <a:ext cx="8102798" cy="487561"/>
-          </a:xfrm>
-          <a:prstGeom prst="rect">
-            <a:avLst/>
-          </a:prstGeom>
-          <a:noFill/>
-          <a:ln/>
-        </p:spPr>
-        <p:txBody>
-          <a:bodyPr wrap="square" lIns="0" tIns="0" rIns="0" bIns="0" rtlCol="0" anchor="t"/>
-          <a:lstStyle/>
-          <a:p>
-            <a:pPr algn="l" marL="342900" indent="-342900">
-              <a:lnSpc>
-                <a:spcPts val="1620"/>
-              </a:lnSpc>
-              <a:spcAft>
-                <a:spcPts val="300"/>
-              </a:spcAft>
-              <a:buSzPct val="100000"/>
-              <a:buChar char="•"/>
-            </a:pPr>
-            <a:r>
-              <a:rPr lang="en-US" sz="1200" i="1" dirty="0">
-                <a:solidFill>
-                  <a:srgbClr val="1C2833"/>
-                </a:solidFill>
-                <a:latin typeface="Arial" pitchFamily="34" charset="0"/>
-                <a:ea typeface="Arial" pitchFamily="34" charset="-122"/>
-                <a:cs typeface="Arial" pitchFamily="34" charset="-120"/>
-              </a:rPr>
-              <a:t>"You've been using Nārāyaṇa Paṇḍita's algorithm for three days. Today: who was he, what did he write, and why does it matter?"</a:t>
-            </a:r>
-            <a:endParaRPr lang="en-US" sz="1200" dirty="0"/>
-          </a:p>
-        </p:txBody>
-      </p:sp>
-      <p:sp>
-        <p:nvSpPr>
-          <p:cNvPr id="5" name="Text 3"/>
-          <p:cNvSpPr/>
-          <p:nvPr/>
-        </p:nvSpPr>
-        <p:spPr>
-          <a:xfrm>
-            <a:off x="406301" y="1460004"/>
-            <a:ext cx="8498026" cy="213271"/>
-          </a:xfrm>
-          <a:prstGeom prst="rect">
-            <a:avLst/>
-          </a:prstGeom>
-          <a:noFill/>
-          <a:ln/>
-        </p:spPr>
-        <p:txBody>
-          <a:bodyPr wrap="square" lIns="0" tIns="0" rIns="0" bIns="0" rtlCol="0" anchor="t"/>
-          <a:lstStyle/>
-          <a:p>
-            <a:pPr algn="l" indent="0" marL="0">
-              <a:lnSpc>
-                <a:spcPts val="1680"/>
-              </a:lnSpc>
-              <a:spcBef>
-                <a:spcPts val="300"/>
-              </a:spcBef>
-              <a:spcAft>
-                <a:spcPts val="300"/>
-              </a:spcAft>
-              <a:buNone/>
-            </a:pPr>
-            <a:r>
-              <a:rPr lang="en-US" sz="1200" dirty="0">
-                <a:solidFill>
-                  <a:srgbClr val="1C2833"/>
-                </a:solidFill>
-                <a:latin typeface="Arial" pitchFamily="34" charset="0"/>
-                <a:ea typeface="Arial" pitchFamily="34" charset="-122"/>
-                <a:cs typeface="Arial" pitchFamily="34" charset="-120"/>
-              </a:rPr>
-              <a:t>– Quick free-write (60 seconds): "What do I think I know about Nārāyaṇa already?" — students jot. Not collected.</a:t>
-            </a:r>
-            <a:endParaRPr lang="en-US" sz="1200" dirty="0"/>
-          </a:p>
-        </p:txBody>
-      </p:sp>
-      <p:sp>
-        <p:nvSpPr>
-          <p:cNvPr id="6" name="Text 4"/>
           <p:cNvSpPr/>
           <p:nvPr/>
         </p:nvSpPr>
@@ -4234,7 +7118,7 @@
                 <a:ea typeface="Georgia" pitchFamily="34" charset="-122"/>
                 <a:cs typeface="Georgia" pitchFamily="34" charset="-120"/>
               </a:rPr>
-              <a:t>Core (20 min)</a:t>
+              <a:t>Warm-up (5 min)</a:t>
             </a:r>
             <a:endParaRPr lang="en-US" sz="1800" dirty="0"/>
           </a:p>
@@ -4249,7 +7133,7 @@
         <p:spPr>
           <a:xfrm>
             <a:off x="634901" y="883593"/>
-            <a:ext cx="8102798" cy="281880"/>
+            <a:ext cx="8102798" cy="731341"/>
           </a:xfrm>
           <a:prstGeom prst="rect">
             <a:avLst/>
@@ -4272,24 +7156,28 @@
               <a:buChar char="•"/>
             </a:pPr>
             <a:r>
-              <a:rPr lang="en-US" sz="1200" b="1" dirty="0">
-                <a:solidFill>
-                  <a:srgbClr val="1C2833"/>
-                </a:solidFill>
-                <a:latin typeface="Arial" pitchFamily="34" charset="0"/>
-                <a:ea typeface="Arial" pitchFamily="34" charset="-122"/>
-                <a:cs typeface="Arial" pitchFamily="34" charset="-120"/>
-              </a:rPr>
-              <a:t>Chronology.</a:t>
-            </a:r>
-            <a:pPr algn="l" indent="0" marL="0">
+              <a:rPr lang="en-US" sz="1200" i="1" dirty="0">
+                <a:solidFill>
+                  <a:srgbClr val="1C2833"/>
+                </a:solidFill>
+                <a:latin typeface="Arial" pitchFamily="34" charset="0"/>
+                <a:ea typeface="Arial" pitchFamily="34" charset="-122"/>
+                <a:cs typeface="Arial" pitchFamily="34" charset="-120"/>
+              </a:rPr>
+              <a:t>"You've been using Nārāyaṇa Paṇḍita's algorithm for three days. Today: who was he, what did he write, and why does it matter?"</a:t>
+            </a:r>
+            <a:endParaRPr lang="en-US" sz="1200" dirty="0"/>
+          </a:p>
+          <a:p>
+            <a:pPr algn="l" marL="342900" indent="-342900">
               <a:lnSpc>
                 <a:spcPts val="1620"/>
               </a:lnSpc>
               <a:spcAft>
                 <a:spcPts val="300"/>
               </a:spcAft>
-              <a:buNone/>
+              <a:buSzPct val="100000"/>
+              <a:buChar char="•"/>
             </a:pPr>
             <a:r>
               <a:rPr lang="en-US" sz="1200" dirty="0">
@@ -4300,7 +7188,7 @@
                 <a:ea typeface="Arial" pitchFamily="34" charset="-122"/>
                 <a:cs typeface="Arial" pitchFamily="34" charset="-120"/>
               </a:rPr>
-              <a:t> Build a simple timeline on the board:</a:t>
+              <a:t>Quick free-write (60 seconds): "What do I think I know about Nārāyaṇa already?" — students jot. Not collected.</a:t>
             </a:r>
             <a:endParaRPr lang="en-US" sz="1200" dirty="0"/>
           </a:p>
@@ -4314,1346 +7202,7 @@
         </p:nvSpPr>
         <p:spPr>
           <a:xfrm>
-            <a:off x="406301" y="1254323"/>
-            <a:ext cx="8498026" cy="213271"/>
-          </a:xfrm>
-          <a:prstGeom prst="rect">
-            <a:avLst/>
-          </a:prstGeom>
-          <a:noFill/>
-          <a:ln/>
-        </p:spPr>
-        <p:txBody>
-          <a:bodyPr wrap="square" lIns="0" tIns="0" rIns="0" bIns="0" rtlCol="0" anchor="t"/>
-          <a:lstStyle/>
-          <a:p>
-            <a:pPr algn="l" indent="0" marL="0">
-              <a:lnSpc>
-                <a:spcPts val="1680"/>
-              </a:lnSpc>
-              <a:spcBef>
-                <a:spcPts val="300"/>
-              </a:spcBef>
-              <a:spcAft>
-                <a:spcPts val="300"/>
-              </a:spcAft>
-              <a:buNone/>
-            </a:pPr>
-            <a:r>
-              <a:rPr lang="en-US" sz="1200" i="1" dirty="0">
-                <a:solidFill>
-                  <a:srgbClr val="1C2833"/>
-                </a:solidFill>
-                <a:latin typeface="Arial" pitchFamily="34" charset="0"/>
-                <a:ea typeface="Arial" pitchFamily="34" charset="-122"/>
-                <a:cs typeface="Arial" pitchFamily="34" charset="-120"/>
-              </a:rPr>
-              <a:t>Each row: Period · Indian mathematics.</a:t>
-            </a:r>
-            <a:endParaRPr lang="en-US" sz="1200" dirty="0"/>
-          </a:p>
-        </p:txBody>
-      </p:sp>
-      <p:sp>
-        <p:nvSpPr>
-          <p:cNvPr id="6" name="Text 4"/>
-          <p:cNvSpPr/>
-          <p:nvPr/>
-        </p:nvSpPr>
-        <p:spPr>
-          <a:xfrm>
-            <a:off x="634901" y="1556445"/>
-            <a:ext cx="8102798" cy="1500783"/>
-          </a:xfrm>
-          <a:prstGeom prst="rect">
-            <a:avLst/>
-          </a:prstGeom>
-          <a:noFill/>
-          <a:ln/>
-        </p:spPr>
-        <p:txBody>
-          <a:bodyPr wrap="square" lIns="0" tIns="0" rIns="0" bIns="0" rtlCol="0" anchor="t"/>
-          <a:lstStyle/>
-          <a:p>
-            <a:pPr algn="l" marL="342900" indent="-342900">
-              <a:lnSpc>
-                <a:spcPts val="1620"/>
-              </a:lnSpc>
-              <a:spcAft>
-                <a:spcPts val="300"/>
-              </a:spcAft>
-              <a:buSzPct val="100000"/>
-              <a:buChar char="•"/>
-            </a:pPr>
-            <a:r>
-              <a:rPr lang="en-US" sz="1200" b="1" dirty="0">
-                <a:solidFill>
-                  <a:srgbClr val="1C2833"/>
-                </a:solidFill>
-                <a:latin typeface="Arial" pitchFamily="34" charset="0"/>
-                <a:ea typeface="Arial" pitchFamily="34" charset="-122"/>
-                <a:cs typeface="Arial" pitchFamily="34" charset="-120"/>
-              </a:rPr>
-              <a:t>~500 BCE</a:t>
-            </a:r>
-            <a:pPr algn="l" indent="0" marL="0">
-              <a:lnSpc>
-                <a:spcPts val="1620"/>
-              </a:lnSpc>
-              <a:spcAft>
-                <a:spcPts val="300"/>
-              </a:spcAft>
-              <a:buNone/>
-            </a:pPr>
-            <a:r>
-              <a:rPr lang="en-US" sz="1200" dirty="0">
-                <a:solidFill>
-                  <a:srgbClr val="1C2833"/>
-                </a:solidFill>
-                <a:latin typeface="Arial" pitchFamily="34" charset="0"/>
-                <a:ea typeface="Arial" pitchFamily="34" charset="-122"/>
-                <a:cs typeface="Arial" pitchFamily="34" charset="-120"/>
-              </a:rPr>
-              <a:t> — </a:t>
-            </a:r>
-            <a:pPr algn="l" indent="0" marL="0">
-              <a:lnSpc>
-                <a:spcPts val="1620"/>
-              </a:lnSpc>
-              <a:spcAft>
-                <a:spcPts val="300"/>
-              </a:spcAft>
-              <a:buNone/>
-            </a:pPr>
-            <a:r>
-              <a:rPr lang="en-US" sz="1200" i="1" dirty="0">
-                <a:solidFill>
-                  <a:srgbClr val="1C2833"/>
-                </a:solidFill>
-                <a:latin typeface="Arial" pitchFamily="34" charset="0"/>
-                <a:ea typeface="Arial" pitchFamily="34" charset="-122"/>
-                <a:cs typeface="Arial" pitchFamily="34" charset="-120"/>
-              </a:rPr>
-              <a:t>Śulba Sūtras</a:t>
-            </a:r>
-            <a:pPr algn="l" indent="0" marL="0">
-              <a:lnSpc>
-                <a:spcPts val="1620"/>
-              </a:lnSpc>
-              <a:spcAft>
-                <a:spcPts val="300"/>
-              </a:spcAft>
-              <a:buNone/>
-            </a:pPr>
-            <a:r>
-              <a:rPr lang="en-US" sz="1200" dirty="0">
-                <a:solidFill>
-                  <a:srgbClr val="1C2833"/>
-                </a:solidFill>
-                <a:latin typeface="Arial" pitchFamily="34" charset="0"/>
-                <a:ea typeface="Arial" pitchFamily="34" charset="-122"/>
-                <a:cs typeface="Arial" pitchFamily="34" charset="-120"/>
-              </a:rPr>
-              <a:t> — geometric ritual texts</a:t>
-            </a:r>
-            <a:endParaRPr lang="en-US" sz="1200" dirty="0"/>
-          </a:p>
-          <a:p>
-            <a:pPr algn="l" marL="342900" indent="-342900">
-              <a:lnSpc>
-                <a:spcPts val="1620"/>
-              </a:lnSpc>
-              <a:spcAft>
-                <a:spcPts val="300"/>
-              </a:spcAft>
-              <a:buSzPct val="100000"/>
-              <a:buChar char="•"/>
-            </a:pPr>
-            <a:r>
-              <a:rPr lang="en-US" sz="1200" b="1" dirty="0">
-                <a:solidFill>
-                  <a:srgbClr val="1C2833"/>
-                </a:solidFill>
-                <a:latin typeface="Arial" pitchFamily="34" charset="0"/>
-                <a:ea typeface="Arial" pitchFamily="34" charset="-122"/>
-                <a:cs typeface="Arial" pitchFamily="34" charset="-120"/>
-              </a:rPr>
-              <a:t>~500 CE</a:t>
-            </a:r>
-            <a:pPr algn="l" indent="0" marL="0">
-              <a:lnSpc>
-                <a:spcPts val="1620"/>
-              </a:lnSpc>
-              <a:spcAft>
-                <a:spcPts val="300"/>
-              </a:spcAft>
-              <a:buNone/>
-            </a:pPr>
-            <a:r>
-              <a:rPr lang="en-US" sz="1200" dirty="0">
-                <a:solidFill>
-                  <a:srgbClr val="1C2833"/>
-                </a:solidFill>
-                <a:latin typeface="Arial" pitchFamily="34" charset="0"/>
-                <a:ea typeface="Arial" pitchFamily="34" charset="-122"/>
-                <a:cs typeface="Arial" pitchFamily="34" charset="-120"/>
-              </a:rPr>
-              <a:t> — Āryabhaṭa (b. 476) — </a:t>
-            </a:r>
-            <a:pPr algn="l" indent="0" marL="0">
-              <a:lnSpc>
-                <a:spcPts val="1620"/>
-              </a:lnSpc>
-              <a:spcAft>
-                <a:spcPts val="300"/>
-              </a:spcAft>
-              <a:buNone/>
-            </a:pPr>
-            <a:r>
-              <a:rPr lang="en-US" sz="1200" i="1" dirty="0">
-                <a:solidFill>
-                  <a:srgbClr val="1C2833"/>
-                </a:solidFill>
-                <a:latin typeface="Arial" pitchFamily="34" charset="0"/>
-                <a:ea typeface="Arial" pitchFamily="34" charset="-122"/>
-                <a:cs typeface="Arial" pitchFamily="34" charset="-120"/>
-              </a:rPr>
-              <a:t>Āryabhaṭīya</a:t>
-            </a:r>
-            <a:endParaRPr lang="en-US" sz="1200" dirty="0"/>
-          </a:p>
-          <a:p>
-            <a:pPr algn="l" marL="342900" indent="-342900">
-              <a:lnSpc>
-                <a:spcPts val="1620"/>
-              </a:lnSpc>
-              <a:spcAft>
-                <a:spcPts val="300"/>
-              </a:spcAft>
-              <a:buSzPct val="100000"/>
-              <a:buChar char="•"/>
-            </a:pPr>
-            <a:r>
-              <a:rPr lang="en-US" sz="1200" b="1" dirty="0">
-                <a:solidFill>
-                  <a:srgbClr val="1C2833"/>
-                </a:solidFill>
-                <a:latin typeface="Arial" pitchFamily="34" charset="0"/>
-                <a:ea typeface="Arial" pitchFamily="34" charset="-122"/>
-                <a:cs typeface="Arial" pitchFamily="34" charset="-120"/>
-              </a:rPr>
-              <a:t>~600 CE</a:t>
-            </a:r>
-            <a:pPr algn="l" indent="0" marL="0">
-              <a:lnSpc>
-                <a:spcPts val="1620"/>
-              </a:lnSpc>
-              <a:spcAft>
-                <a:spcPts val="300"/>
-              </a:spcAft>
-              <a:buNone/>
-            </a:pPr>
-            <a:r>
-              <a:rPr lang="en-US" sz="1200" dirty="0">
-                <a:solidFill>
-                  <a:srgbClr val="1C2833"/>
-                </a:solidFill>
-                <a:latin typeface="Arial" pitchFamily="34" charset="0"/>
-                <a:ea typeface="Arial" pitchFamily="34" charset="-122"/>
-                <a:cs typeface="Arial" pitchFamily="34" charset="-120"/>
-              </a:rPr>
-              <a:t> — Brahmagupta — </a:t>
-            </a:r>
-            <a:pPr algn="l" indent="0" marL="0">
-              <a:lnSpc>
-                <a:spcPts val="1620"/>
-              </a:lnSpc>
-              <a:spcAft>
-                <a:spcPts val="300"/>
-              </a:spcAft>
-              <a:buNone/>
-            </a:pPr>
-            <a:r>
-              <a:rPr lang="en-US" sz="1200" i="1" dirty="0">
-                <a:solidFill>
-                  <a:srgbClr val="1C2833"/>
-                </a:solidFill>
-                <a:latin typeface="Arial" pitchFamily="34" charset="0"/>
-                <a:ea typeface="Arial" pitchFamily="34" charset="-122"/>
-                <a:cs typeface="Arial" pitchFamily="34" charset="-120"/>
-              </a:rPr>
-              <a:t>Brāhmasphuṭasiddhānta</a:t>
-            </a:r>
-            <a:endParaRPr lang="en-US" sz="1200" dirty="0"/>
-          </a:p>
-          <a:p>
-            <a:pPr algn="l" marL="342900" indent="-342900">
-              <a:lnSpc>
-                <a:spcPts val="1620"/>
-              </a:lnSpc>
-              <a:spcAft>
-                <a:spcPts val="300"/>
-              </a:spcAft>
-              <a:buSzPct val="100000"/>
-              <a:buChar char="•"/>
-            </a:pPr>
-            <a:r>
-              <a:rPr lang="en-US" sz="1200" b="1" dirty="0">
-                <a:solidFill>
-                  <a:srgbClr val="1C2833"/>
-                </a:solidFill>
-                <a:latin typeface="Arial" pitchFamily="34" charset="0"/>
-                <a:ea typeface="Arial" pitchFamily="34" charset="-122"/>
-                <a:cs typeface="Arial" pitchFamily="34" charset="-120"/>
-              </a:rPr>
-              <a:t>~1100 CE</a:t>
-            </a:r>
-            <a:pPr algn="l" indent="0" marL="0">
-              <a:lnSpc>
-                <a:spcPts val="1620"/>
-              </a:lnSpc>
-              <a:spcAft>
-                <a:spcPts val="300"/>
-              </a:spcAft>
-              <a:buNone/>
-            </a:pPr>
-            <a:r>
-              <a:rPr lang="en-US" sz="1200" dirty="0">
-                <a:solidFill>
-                  <a:srgbClr val="1C2833"/>
-                </a:solidFill>
-                <a:latin typeface="Arial" pitchFamily="34" charset="0"/>
-                <a:ea typeface="Arial" pitchFamily="34" charset="-122"/>
-                <a:cs typeface="Arial" pitchFamily="34" charset="-120"/>
-              </a:rPr>
-              <a:t> — Bhāskara II — </a:t>
-            </a:r>
-            <a:pPr algn="l" indent="0" marL="0">
-              <a:lnSpc>
-                <a:spcPts val="1620"/>
-              </a:lnSpc>
-              <a:spcAft>
-                <a:spcPts val="300"/>
-              </a:spcAft>
-              <a:buNone/>
-            </a:pPr>
-            <a:r>
-              <a:rPr lang="en-US" sz="1200" i="1" dirty="0">
-                <a:solidFill>
-                  <a:srgbClr val="1C2833"/>
-                </a:solidFill>
-                <a:latin typeface="Arial" pitchFamily="34" charset="0"/>
-                <a:ea typeface="Arial" pitchFamily="34" charset="-122"/>
-                <a:cs typeface="Arial" pitchFamily="34" charset="-120"/>
-              </a:rPr>
-              <a:t>Līlāvatī</a:t>
-            </a:r>
-            <a:pPr algn="l" indent="0" marL="0">
-              <a:lnSpc>
-                <a:spcPts val="1620"/>
-              </a:lnSpc>
-              <a:spcAft>
-                <a:spcPts val="300"/>
-              </a:spcAft>
-              <a:buNone/>
-            </a:pPr>
-            <a:r>
-              <a:rPr lang="en-US" sz="1200" dirty="0">
-                <a:solidFill>
-                  <a:srgbClr val="1C2833"/>
-                </a:solidFill>
-                <a:latin typeface="Arial" pitchFamily="34" charset="0"/>
-                <a:ea typeface="Arial" pitchFamily="34" charset="-122"/>
-                <a:cs typeface="Arial" pitchFamily="34" charset="-120"/>
-              </a:rPr>
-              <a:t>, </a:t>
-            </a:r>
-            <a:pPr algn="l" indent="0" marL="0">
-              <a:lnSpc>
-                <a:spcPts val="1620"/>
-              </a:lnSpc>
-              <a:spcAft>
-                <a:spcPts val="300"/>
-              </a:spcAft>
-              <a:buNone/>
-            </a:pPr>
-            <a:r>
-              <a:rPr lang="en-US" sz="1200" i="1" dirty="0">
-                <a:solidFill>
-                  <a:srgbClr val="1C2833"/>
-                </a:solidFill>
-                <a:latin typeface="Arial" pitchFamily="34" charset="0"/>
-                <a:ea typeface="Arial" pitchFamily="34" charset="-122"/>
-                <a:cs typeface="Arial" pitchFamily="34" charset="-120"/>
-              </a:rPr>
-              <a:t>Bījagaṇita</a:t>
-            </a:r>
-            <a:endParaRPr lang="en-US" sz="1200" dirty="0"/>
-          </a:p>
-          <a:p>
-            <a:pPr algn="l" marL="342900" indent="-342900">
-              <a:lnSpc>
-                <a:spcPts val="1620"/>
-              </a:lnSpc>
-              <a:spcAft>
-                <a:spcPts val="300"/>
-              </a:spcAft>
-              <a:buSzPct val="100000"/>
-              <a:buChar char="•"/>
-            </a:pPr>
-            <a:r>
-              <a:rPr lang="en-US" sz="1200" b="1" dirty="0">
-                <a:solidFill>
-                  <a:srgbClr val="1C2833"/>
-                </a:solidFill>
-                <a:latin typeface="Arial" pitchFamily="34" charset="0"/>
-                <a:ea typeface="Arial" pitchFamily="34" charset="-122"/>
-                <a:cs typeface="Arial" pitchFamily="34" charset="-120"/>
-              </a:rPr>
-              <a:t>1356 CE</a:t>
-            </a:r>
-            <a:pPr algn="l" indent="0" marL="0">
-              <a:lnSpc>
-                <a:spcPts val="1620"/>
-              </a:lnSpc>
-              <a:spcAft>
-                <a:spcPts val="300"/>
-              </a:spcAft>
-              <a:buNone/>
-            </a:pPr>
-            <a:r>
-              <a:rPr lang="en-US" sz="1200" dirty="0">
-                <a:solidFill>
-                  <a:srgbClr val="1C2833"/>
-                </a:solidFill>
-                <a:latin typeface="Arial" pitchFamily="34" charset="0"/>
-                <a:ea typeface="Arial" pitchFamily="34" charset="-122"/>
-                <a:cs typeface="Arial" pitchFamily="34" charset="-120"/>
-              </a:rPr>
-              <a:t> — *</a:t>
-            </a:r>
-            <a:pPr algn="l" indent="0" marL="0">
-              <a:lnSpc>
-                <a:spcPts val="1620"/>
-              </a:lnSpc>
-              <a:spcAft>
-                <a:spcPts val="300"/>
-              </a:spcAft>
-              <a:buNone/>
-            </a:pPr>
-            <a:r>
-              <a:rPr lang="en-US" sz="1200" i="1" dirty="0">
-                <a:solidFill>
-                  <a:srgbClr val="1C2833"/>
-                </a:solidFill>
-                <a:latin typeface="Arial" pitchFamily="34" charset="0"/>
-                <a:ea typeface="Arial" pitchFamily="34" charset="-122"/>
-                <a:cs typeface="Arial" pitchFamily="34" charset="-120"/>
-              </a:rPr>
-              <a:t>Nārāyaṇa Paṇḍita —</a:t>
-            </a:r>
-            <a:pPr algn="l" indent="0" marL="0">
-              <a:lnSpc>
-                <a:spcPts val="1620"/>
-              </a:lnSpc>
-              <a:spcAft>
-                <a:spcPts val="300"/>
-              </a:spcAft>
-              <a:buNone/>
-            </a:pPr>
-            <a:r>
-              <a:rPr lang="en-US" sz="1200" dirty="0">
-                <a:solidFill>
-                  <a:srgbClr val="1C2833"/>
-                </a:solidFill>
-                <a:latin typeface="Arial" pitchFamily="34" charset="0"/>
-                <a:ea typeface="Arial" pitchFamily="34" charset="-122"/>
-                <a:cs typeface="Arial" pitchFamily="34" charset="-120"/>
-              </a:rPr>
-              <a:t>Gaṇita-kaumudī***</a:t>
-            </a:r>
-            <a:endParaRPr lang="en-US" sz="1200" dirty="0"/>
-          </a:p>
-          <a:p>
-            <a:pPr algn="l" marL="342900" indent="-342900">
-              <a:lnSpc>
-                <a:spcPts val="1620"/>
-              </a:lnSpc>
-              <a:spcAft>
-                <a:spcPts val="300"/>
-              </a:spcAft>
-              <a:buSzPct val="100000"/>
-              <a:buChar char="•"/>
-            </a:pPr>
-            <a:r>
-              <a:rPr lang="en-US" sz="1200" b="1" dirty="0">
-                <a:solidFill>
-                  <a:srgbClr val="1C2833"/>
-                </a:solidFill>
-                <a:latin typeface="Arial" pitchFamily="34" charset="0"/>
-                <a:ea typeface="Arial" pitchFamily="34" charset="-122"/>
-                <a:cs typeface="Arial" pitchFamily="34" charset="-120"/>
-              </a:rPr>
-              <a:t>~1400 CE</a:t>
-            </a:r>
-            <a:pPr algn="l" indent="0" marL="0">
-              <a:lnSpc>
-                <a:spcPts val="1620"/>
-              </a:lnSpc>
-              <a:spcAft>
-                <a:spcPts val="300"/>
-              </a:spcAft>
-              <a:buNone/>
-            </a:pPr>
-            <a:r>
-              <a:rPr lang="en-US" sz="1200" dirty="0">
-                <a:solidFill>
-                  <a:srgbClr val="1C2833"/>
-                </a:solidFill>
-                <a:latin typeface="Arial" pitchFamily="34" charset="0"/>
-                <a:ea typeface="Arial" pitchFamily="34" charset="-122"/>
-                <a:cs typeface="Arial" pitchFamily="34" charset="-120"/>
-              </a:rPr>
-              <a:t> — Mādhava (Kerala) — early infinite series</a:t>
-            </a:r>
-            <a:endParaRPr lang="en-US" sz="1200" dirty="0"/>
-          </a:p>
-        </p:txBody>
-      </p:sp>
-      <p:sp>
-        <p:nvSpPr>
-          <p:cNvPr id="7" name="Text 5"/>
-          <p:cNvSpPr/>
-          <p:nvPr/>
-        </p:nvSpPr>
-        <p:spPr>
-          <a:xfrm>
-            <a:off x="406301" y="3146078"/>
-            <a:ext cx="8498026" cy="426541"/>
-          </a:xfrm>
-          <a:prstGeom prst="rect">
-            <a:avLst/>
-          </a:prstGeom>
-          <a:noFill/>
-          <a:ln/>
-        </p:spPr>
-        <p:txBody>
-          <a:bodyPr wrap="square" lIns="0" tIns="0" rIns="0" bIns="0" rtlCol="0" anchor="t"/>
-          <a:lstStyle/>
-          <a:p>
-            <a:pPr algn="l" indent="0" marL="0">
-              <a:lnSpc>
-                <a:spcPts val="1680"/>
-              </a:lnSpc>
-              <a:spcBef>
-                <a:spcPts val="300"/>
-              </a:spcBef>
-              <a:spcAft>
-                <a:spcPts val="300"/>
-              </a:spcAft>
-              <a:buNone/>
-            </a:pPr>
-            <a:r>
-              <a:rPr lang="en-US" sz="1200" i="1" dirty="0">
-                <a:solidFill>
-                  <a:srgbClr val="1C2833"/>
-                </a:solidFill>
-                <a:latin typeface="Arial" pitchFamily="34" charset="0"/>
-                <a:ea typeface="Arial" pitchFamily="34" charset="-122"/>
-                <a:cs typeface="Arial" pitchFamily="34" charset="-120"/>
-              </a:rPr>
-              <a:t>"Nārāyaṇa wrote in the 14th century — relatively 'late' in the medieval Indian mathematical tradition, but he produced one of the most comprehensive single works."</a:t>
-            </a:r>
-            <a:endParaRPr lang="en-US" sz="1200" dirty="0"/>
-          </a:p>
-        </p:txBody>
-      </p:sp>
-      <p:sp>
-        <p:nvSpPr>
-          <p:cNvPr id="8" name="Text 6"/>
-          <p:cNvSpPr/>
-          <p:nvPr/>
-        </p:nvSpPr>
-        <p:spPr>
-          <a:xfrm>
-            <a:off x="634901" y="3661470"/>
-            <a:ext cx="8102798" cy="281880"/>
-          </a:xfrm>
-          <a:prstGeom prst="rect">
-            <a:avLst/>
-          </a:prstGeom>
-          <a:noFill/>
-          <a:ln/>
-        </p:spPr>
-        <p:txBody>
-          <a:bodyPr wrap="square" lIns="0" tIns="0" rIns="0" bIns="0" rtlCol="0" anchor="t"/>
-          <a:lstStyle/>
-          <a:p>
-            <a:pPr algn="l" marL="342900" indent="-342900">
-              <a:lnSpc>
-                <a:spcPts val="1620"/>
-              </a:lnSpc>
-              <a:spcAft>
-                <a:spcPts val="300"/>
-              </a:spcAft>
-              <a:buSzPct val="100000"/>
-              <a:buChar char="•"/>
-            </a:pPr>
-            <a:pPr algn="l" indent="0" marL="0">
-              <a:lnSpc>
-                <a:spcPts val="1620"/>
-              </a:lnSpc>
-              <a:spcAft>
-                <a:spcPts val="300"/>
-              </a:spcAft>
-              <a:buNone/>
-            </a:pPr>
-            <a:r>
-              <a:rPr lang="en-US" sz="1200" i="1" dirty="0">
-                <a:solidFill>
-                  <a:srgbClr val="1C2833"/>
-                </a:solidFill>
-                <a:latin typeface="Arial" pitchFamily="34" charset="0"/>
-                <a:ea typeface="Arial" pitchFamily="34" charset="-122"/>
-                <a:cs typeface="Arial" pitchFamily="34" charset="-120"/>
-              </a:rPr>
-              <a:t>What is in the</a:t>
-            </a:r>
-            <a:pPr algn="l" indent="0" marL="0">
-              <a:lnSpc>
-                <a:spcPts val="1620"/>
-              </a:lnSpc>
-              <a:spcAft>
-                <a:spcPts val="300"/>
-              </a:spcAft>
-              <a:buNone/>
-            </a:pPr>
-            <a:r>
-              <a:rPr lang="en-US" sz="1200" dirty="0">
-                <a:solidFill>
-                  <a:srgbClr val="1C2833"/>
-                </a:solidFill>
-                <a:latin typeface="Arial" pitchFamily="34" charset="0"/>
-                <a:ea typeface="Arial" pitchFamily="34" charset="-122"/>
-                <a:cs typeface="Arial" pitchFamily="34" charset="-120"/>
-              </a:rPr>
-              <a:t>Gaṇita-kaumudī</a:t>
-            </a:r>
-            <a:pPr algn="l" indent="0" marL="0">
-              <a:lnSpc>
-                <a:spcPts val="1620"/>
-              </a:lnSpc>
-              <a:spcAft>
-                <a:spcPts val="300"/>
-              </a:spcAft>
-              <a:buNone/>
-            </a:pPr>
-            <a:r>
-              <a:rPr lang="en-US" sz="1200" i="1" dirty="0">
-                <a:solidFill>
-                  <a:srgbClr val="1C2833"/>
-                </a:solidFill>
-                <a:latin typeface="Arial" pitchFamily="34" charset="0"/>
-                <a:ea typeface="Arial" pitchFamily="34" charset="-122"/>
-                <a:cs typeface="Arial" pitchFamily="34" charset="-120"/>
-              </a:rPr>
-              <a:t>?</a:t>
-            </a:r>
-            <a:pPr algn="l" indent="0" marL="0">
-              <a:lnSpc>
-                <a:spcPts val="1620"/>
-              </a:lnSpc>
-              <a:spcAft>
-                <a:spcPts val="300"/>
-              </a:spcAft>
-              <a:buNone/>
-            </a:pPr>
-            <a:r>
-              <a:rPr lang="en-US" sz="1200" i="1" dirty="0">
-                <a:solidFill>
-                  <a:srgbClr val="1C2833"/>
-                </a:solidFill>
-                <a:latin typeface="Arial" pitchFamily="34" charset="0"/>
-                <a:ea typeface="Arial" pitchFamily="34" charset="-122"/>
-                <a:cs typeface="Arial" pitchFamily="34" charset="-120"/>
-              </a:rPr>
-              <a:t> Fourteen books (</a:t>
-            </a:r>
-            <a:pPr algn="l" indent="0" marL="0">
-              <a:lnSpc>
-                <a:spcPts val="1620"/>
-              </a:lnSpc>
-              <a:spcAft>
-                <a:spcPts val="300"/>
-              </a:spcAft>
-              <a:buNone/>
-            </a:pPr>
-            <a:r>
-              <a:rPr lang="en-US" sz="1200" dirty="0">
-                <a:solidFill>
-                  <a:srgbClr val="1C2833"/>
-                </a:solidFill>
-                <a:latin typeface="Arial" pitchFamily="34" charset="0"/>
-                <a:ea typeface="Arial" pitchFamily="34" charset="-122"/>
-                <a:cs typeface="Arial" pitchFamily="34" charset="-120"/>
-              </a:rPr>
-              <a:t>vyavahāras*):</a:t>
-            </a:r>
-            <a:endParaRPr lang="en-US" sz="1200" dirty="0"/>
-          </a:p>
-        </p:txBody>
-      </p:sp>
-      <p:sp>
-        <p:nvSpPr>
-          <p:cNvPr id="9" name="Text 7"/>
-          <p:cNvSpPr/>
-          <p:nvPr/>
-        </p:nvSpPr>
-        <p:spPr>
-          <a:xfrm>
-            <a:off x="406301" y="4032200"/>
-            <a:ext cx="8498026" cy="853083"/>
-          </a:xfrm>
-          <a:prstGeom prst="rect">
-            <a:avLst/>
-          </a:prstGeom>
-          <a:noFill/>
-          <a:ln/>
-        </p:spPr>
-        <p:txBody>
-          <a:bodyPr wrap="square" lIns="0" tIns="0" rIns="0" bIns="0" rtlCol="0" anchor="t"/>
-          <a:lstStyle/>
-          <a:p>
-            <a:pPr algn="l" indent="0" marL="0">
-              <a:lnSpc>
-                <a:spcPts val="1680"/>
-              </a:lnSpc>
-              <a:spcBef>
-                <a:spcPts val="300"/>
-              </a:spcBef>
-              <a:spcAft>
-                <a:spcPts val="300"/>
-              </a:spcAft>
-              <a:buNone/>
-            </a:pPr>
-            <a:r>
-              <a:rPr lang="en-US" sz="1200" dirty="0">
-                <a:solidFill>
-                  <a:srgbClr val="1C2833"/>
-                </a:solidFill>
-                <a:latin typeface="Arial" pitchFamily="34" charset="0"/>
-                <a:ea typeface="Arial" pitchFamily="34" charset="-122"/>
-                <a:cs typeface="Arial" pitchFamily="34" charset="-120"/>
-              </a:rPr>
-              <a:t>– Book 1–3: arithmetic (basic operations, fractions) – Book 4–6: ratios, percentage problems, alligation – Book 7–8: progressions and series – Book 9: combinatorics (permutations, partitions — Nārāyaṇa was a pioneer here) – Book 10–11: geometry of plane figures and solids – Book 12: triangular and figurate numbers – Book 13: practical problems (e.g. dilution of milk, mixture problems) - *</a:t>
-            </a:r>
-            <a:pPr algn="l" indent="0" marL="0">
-              <a:lnSpc>
-                <a:spcPts val="1680"/>
-              </a:lnSpc>
-              <a:spcBef>
-                <a:spcPts val="300"/>
-              </a:spcBef>
-              <a:spcAft>
-                <a:spcPts val="300"/>
-              </a:spcAft>
-              <a:buNone/>
-            </a:pPr>
-            <a:r>
-              <a:rPr lang="en-US" sz="1200" i="1" dirty="0">
-                <a:solidFill>
-                  <a:srgbClr val="1C2833"/>
-                </a:solidFill>
-                <a:latin typeface="Arial" pitchFamily="34" charset="0"/>
-                <a:ea typeface="Arial" pitchFamily="34" charset="-122"/>
-                <a:cs typeface="Arial" pitchFamily="34" charset="-120"/>
-              </a:rPr>
-              <a:t>Book 14:</a:t>
-            </a:r>
-            <a:pPr algn="l" indent="0" marL="0">
-              <a:lnSpc>
-                <a:spcPts val="1680"/>
-              </a:lnSpc>
-              <a:spcBef>
-                <a:spcPts val="300"/>
-              </a:spcBef>
-              <a:spcAft>
-                <a:spcPts val="300"/>
-              </a:spcAft>
-              <a:buNone/>
-            </a:pPr>
-            <a:r>
-              <a:rPr lang="en-US" sz="1200" dirty="0">
-                <a:solidFill>
-                  <a:srgbClr val="1C2833"/>
-                </a:solidFill>
-                <a:latin typeface="Arial" pitchFamily="34" charset="0"/>
-                <a:ea typeface="Arial" pitchFamily="34" charset="-122"/>
-                <a:cs typeface="Arial" pitchFamily="34" charset="-120"/>
-              </a:rPr>
-              <a:t>Bhadragaṇita</a:t>
-            </a:r>
-            <a:pPr algn="l" indent="0" marL="0">
-              <a:lnSpc>
-                <a:spcPts val="1680"/>
-              </a:lnSpc>
-              <a:spcBef>
-                <a:spcPts val="300"/>
-              </a:spcBef>
-              <a:spcAft>
-                <a:spcPts val="300"/>
-              </a:spcAft>
-              <a:buNone/>
-            </a:pPr>
-            <a:r>
-              <a:rPr lang="en-US" sz="1200" i="1" dirty="0">
-                <a:solidFill>
-                  <a:srgbClr val="1C2833"/>
-                </a:solidFill>
-                <a:latin typeface="Arial" pitchFamily="34" charset="0"/>
-                <a:ea typeface="Arial" pitchFamily="34" charset="-122"/>
-                <a:cs typeface="Arial" pitchFamily="34" charset="-120"/>
-              </a:rPr>
-              <a:t> — magic squares</a:t>
-            </a:r>
-            <a:pPr algn="l" indent="0" marL="0">
-              <a:lnSpc>
-                <a:spcPts val="1680"/>
-              </a:lnSpc>
-              <a:spcBef>
-                <a:spcPts val="300"/>
-              </a:spcBef>
-              <a:spcAft>
-                <a:spcPts val="300"/>
-              </a:spcAft>
-              <a:buNone/>
-            </a:pPr>
-            <a:r>
-              <a:rPr lang="en-US" sz="1200" dirty="0">
-                <a:solidFill>
-                  <a:srgbClr val="1C2833"/>
-                </a:solidFill>
-                <a:latin typeface="Arial" pitchFamily="34" charset="0"/>
-                <a:ea typeface="Arial" pitchFamily="34" charset="-122"/>
-                <a:cs typeface="Arial" pitchFamily="34" charset="-120"/>
-              </a:rPr>
-              <a:t>*</a:t>
-            </a:r>
-            <a:endParaRPr lang="en-US" sz="1200" dirty="0"/>
-          </a:p>
-        </p:txBody>
-      </p:sp>
-      <p:sp>
-        <p:nvSpPr>
-          <p:cNvPr id="10" name="Text 8"/>
-          <p:cNvSpPr/>
-          <p:nvPr/>
-        </p:nvSpPr>
-        <p:spPr>
-          <a:xfrm>
-            <a:off x="406301" y="4961483"/>
-            <a:ext cx="8498026" cy="426541"/>
-          </a:xfrm>
-          <a:prstGeom prst="rect">
-            <a:avLst/>
-          </a:prstGeom>
-          <a:noFill/>
-          <a:ln/>
-        </p:spPr>
-        <p:txBody>
-          <a:bodyPr wrap="square" lIns="0" tIns="0" rIns="0" bIns="0" rtlCol="0" anchor="t"/>
-          <a:lstStyle/>
-          <a:p>
-            <a:pPr algn="l" indent="0" marL="0">
-              <a:lnSpc>
-                <a:spcPts val="1680"/>
-              </a:lnSpc>
-              <a:spcBef>
-                <a:spcPts val="300"/>
-              </a:spcBef>
-              <a:spcAft>
-                <a:spcPts val="300"/>
-              </a:spcAft>
-              <a:buNone/>
-            </a:pPr>
-            <a:r>
-              <a:rPr lang="en-US" sz="1200" i="1" dirty="0">
-                <a:solidFill>
-                  <a:srgbClr val="1C2833"/>
-                </a:solidFill>
-                <a:latin typeface="Arial" pitchFamily="34" charset="0"/>
-                <a:ea typeface="Arial" pitchFamily="34" charset="-122"/>
-                <a:cs typeface="Arial" pitchFamily="34" charset="-120"/>
-              </a:rPr>
-              <a:t>"The treatise is comprehensive — it isn't only about magic squares. But the magic-square book is the longest and most systematic in any pre-modern work we have."</a:t>
-            </a:r>
-            <a:endParaRPr lang="en-US" sz="1200" dirty="0"/>
-          </a:p>
-        </p:txBody>
-      </p:sp>
-      <p:sp>
-        <p:nvSpPr>
-          <p:cNvPr id="11" name="Text 9"/>
-          <p:cNvSpPr/>
-          <p:nvPr/>
-        </p:nvSpPr>
-        <p:spPr>
-          <a:xfrm>
-            <a:off x="634901" y="5476875"/>
-            <a:ext cx="8102798" cy="281880"/>
-          </a:xfrm>
-          <a:prstGeom prst="rect">
-            <a:avLst/>
-          </a:prstGeom>
-          <a:noFill/>
-          <a:ln/>
-        </p:spPr>
-        <p:txBody>
-          <a:bodyPr wrap="square" lIns="0" tIns="0" rIns="0" bIns="0" rtlCol="0" anchor="t"/>
-          <a:lstStyle/>
-          <a:p>
-            <a:pPr algn="l" marL="342900" indent="-342900">
-              <a:lnSpc>
-                <a:spcPts val="1620"/>
-              </a:lnSpc>
-              <a:spcAft>
-                <a:spcPts val="300"/>
-              </a:spcAft>
-              <a:buSzPct val="100000"/>
-              <a:buChar char="•"/>
-            </a:pPr>
-            <a:r>
-              <a:rPr lang="en-US" sz="1200" b="1" dirty="0">
-                <a:solidFill>
-                  <a:srgbClr val="1C2833"/>
-                </a:solidFill>
-                <a:latin typeface="Arial" pitchFamily="34" charset="0"/>
-                <a:ea typeface="Arial" pitchFamily="34" charset="-122"/>
-                <a:cs typeface="Arial" pitchFamily="34" charset="-120"/>
-              </a:rPr>
-              <a:t>Why systematic written method matters.</a:t>
-            </a:r>
-            <a:pPr algn="l" indent="0" marL="0">
-              <a:lnSpc>
-                <a:spcPts val="1620"/>
-              </a:lnSpc>
-              <a:spcAft>
-                <a:spcPts val="300"/>
-              </a:spcAft>
-              <a:buNone/>
-            </a:pPr>
-            <a:r>
-              <a:rPr lang="en-US" sz="1200" dirty="0">
-                <a:solidFill>
-                  <a:srgbClr val="1C2833"/>
-                </a:solidFill>
-                <a:latin typeface="Arial" pitchFamily="34" charset="0"/>
-                <a:ea typeface="Arial" pitchFamily="34" charset="-122"/>
-                <a:cs typeface="Arial" pitchFamily="34" charset="-120"/>
-              </a:rPr>
-              <a:t> Discuss together:</a:t>
-            </a:r>
-            <a:endParaRPr lang="en-US" sz="1200" dirty="0"/>
-          </a:p>
-        </p:txBody>
-      </p:sp>
-      <p:sp>
-        <p:nvSpPr>
-          <p:cNvPr id="12" name="Text 10"/>
-          <p:cNvSpPr/>
-          <p:nvPr/>
-        </p:nvSpPr>
-        <p:spPr>
-          <a:xfrm>
-            <a:off x="406301" y="5847606"/>
-            <a:ext cx="8498026" cy="853083"/>
-          </a:xfrm>
-          <a:prstGeom prst="rect">
-            <a:avLst/>
-          </a:prstGeom>
-          <a:noFill/>
-          <a:ln/>
-        </p:spPr>
-        <p:txBody>
-          <a:bodyPr wrap="square" lIns="0" tIns="0" rIns="0" bIns="0" rtlCol="0" anchor="t"/>
-          <a:lstStyle/>
-          <a:p>
-            <a:pPr algn="l" indent="0" marL="0">
-              <a:lnSpc>
-                <a:spcPts val="1680"/>
-              </a:lnSpc>
-              <a:spcBef>
-                <a:spcPts val="300"/>
-              </a:spcBef>
-              <a:spcAft>
-                <a:spcPts val="300"/>
-              </a:spcAft>
-              <a:buNone/>
-            </a:pPr>
-            <a:r>
-              <a:rPr lang="en-US" sz="1200" dirty="0">
-                <a:solidFill>
-                  <a:srgbClr val="1C2833"/>
-                </a:solidFill>
-                <a:latin typeface="Arial" pitchFamily="34" charset="0"/>
-                <a:ea typeface="Arial" pitchFamily="34" charset="-122"/>
-                <a:cs typeface="Arial" pitchFamily="34" charset="-120"/>
-              </a:rPr>
-              <a:t>– Before Nārāyaṇa, magic squares appeared in many Indian and non-Indian sources — but mostly as </a:t>
-            </a:r>
-            <a:pPr algn="l" indent="0" marL="0">
-              <a:lnSpc>
-                <a:spcPts val="1680"/>
-              </a:lnSpc>
-              <a:spcBef>
-                <a:spcPts val="300"/>
-              </a:spcBef>
-              <a:spcAft>
-                <a:spcPts val="300"/>
-              </a:spcAft>
-              <a:buNone/>
-            </a:pPr>
-            <a:r>
-              <a:rPr lang="en-US" sz="1200" i="1" dirty="0">
-                <a:solidFill>
-                  <a:srgbClr val="1C2833"/>
-                </a:solidFill>
-                <a:latin typeface="Arial" pitchFamily="34" charset="0"/>
-                <a:ea typeface="Arial" pitchFamily="34" charset="-122"/>
-                <a:cs typeface="Arial" pitchFamily="34" charset="-120"/>
-              </a:rPr>
-              <a:t>examples</a:t>
-            </a:r>
-            <a:pPr algn="l" indent="0" marL="0">
-              <a:lnSpc>
-                <a:spcPts val="1680"/>
-              </a:lnSpc>
-              <a:spcBef>
-                <a:spcPts val="300"/>
-              </a:spcBef>
-              <a:spcAft>
-                <a:spcPts val="300"/>
-              </a:spcAft>
-              <a:buNone/>
-            </a:pPr>
-            <a:r>
-              <a:rPr lang="en-US" sz="1200" dirty="0">
-                <a:solidFill>
-                  <a:srgbClr val="1C2833"/>
-                </a:solidFill>
-                <a:latin typeface="Arial" pitchFamily="34" charset="0"/>
-                <a:ea typeface="Arial" pitchFamily="34" charset="-122"/>
-                <a:cs typeface="Arial" pitchFamily="34" charset="-120"/>
-              </a:rPr>
-              <a:t>, not as recipes. – Nārāyaṇa gives </a:t>
-            </a:r>
-            <a:pPr algn="l" indent="0" marL="0">
-              <a:lnSpc>
-                <a:spcPts val="1680"/>
-              </a:lnSpc>
-              <a:spcBef>
-                <a:spcPts val="300"/>
-              </a:spcBef>
-              <a:spcAft>
-                <a:spcPts val="300"/>
-              </a:spcAft>
-              <a:buNone/>
-            </a:pPr>
-            <a:r>
-              <a:rPr lang="en-US" sz="1200" b="1" dirty="0">
-                <a:solidFill>
-                  <a:srgbClr val="1C2833"/>
-                </a:solidFill>
-                <a:latin typeface="Arial" pitchFamily="34" charset="0"/>
-                <a:ea typeface="Arial" pitchFamily="34" charset="-122"/>
-                <a:cs typeface="Arial" pitchFamily="34" charset="-120"/>
-              </a:rPr>
-              <a:t>methods</a:t>
-            </a:r>
-            <a:pPr algn="l" indent="0" marL="0">
-              <a:lnSpc>
-                <a:spcPts val="1680"/>
-              </a:lnSpc>
-              <a:spcBef>
-                <a:spcPts val="300"/>
-              </a:spcBef>
-              <a:spcAft>
-                <a:spcPts val="300"/>
-              </a:spcAft>
-              <a:buNone/>
-            </a:pPr>
-            <a:r>
-              <a:rPr lang="en-US" sz="1200" dirty="0">
-                <a:solidFill>
-                  <a:srgbClr val="1C2833"/>
-                </a:solidFill>
-                <a:latin typeface="Arial" pitchFamily="34" charset="0"/>
-                <a:ea typeface="Arial" pitchFamily="34" charset="-122"/>
-                <a:cs typeface="Arial" pitchFamily="34" charset="-120"/>
-              </a:rPr>
-              <a:t>: rules that work for any input size. This is what makes it mathematics, not just a curiosity collection. – This is the same distinction we draw today between "here's a Sudoku puzzle" and "here's an algorithm to generate Sudoku puzzles."</a:t>
-            </a:r>
-            <a:endParaRPr lang="en-US" sz="1200" dirty="0"/>
-          </a:p>
-        </p:txBody>
-      </p:sp>
-      <p:sp>
-        <p:nvSpPr>
-          <p:cNvPr id="13" name="Text 11"/>
-          <p:cNvSpPr/>
-          <p:nvPr/>
-        </p:nvSpPr>
-        <p:spPr>
-          <a:xfrm>
-            <a:off x="634901" y="6789539"/>
-            <a:ext cx="8102798" cy="281880"/>
-          </a:xfrm>
-          <a:prstGeom prst="rect">
-            <a:avLst/>
-          </a:prstGeom>
-          <a:noFill/>
-          <a:ln/>
-        </p:spPr>
-        <p:txBody>
-          <a:bodyPr wrap="square" lIns="0" tIns="0" rIns="0" bIns="0" rtlCol="0" anchor="t"/>
-          <a:lstStyle/>
-          <a:p>
-            <a:pPr algn="l" marL="342900" indent="-342900">
-              <a:lnSpc>
-                <a:spcPts val="1620"/>
-              </a:lnSpc>
-              <a:spcAft>
-                <a:spcPts val="300"/>
-              </a:spcAft>
-              <a:buSzPct val="100000"/>
-              <a:buChar char="•"/>
-            </a:pPr>
-            <a:r>
-              <a:rPr lang="en-US" sz="1200" b="1" dirty="0">
-                <a:solidFill>
-                  <a:srgbClr val="1C2833"/>
-                </a:solidFill>
-                <a:latin typeface="Arial" pitchFamily="34" charset="0"/>
-                <a:ea typeface="Arial" pitchFamily="34" charset="-122"/>
-                <a:cs typeface="Arial" pitchFamily="34" charset="-120"/>
-              </a:rPr>
-              <a:t>A paraphrase from the source.</a:t>
-            </a:r>
-            <a:pPr algn="l" indent="0" marL="0">
-              <a:lnSpc>
-                <a:spcPts val="1620"/>
-              </a:lnSpc>
-              <a:spcAft>
-                <a:spcPts val="300"/>
-              </a:spcAft>
-              <a:buNone/>
-            </a:pPr>
-            <a:r>
-              <a:rPr lang="en-US" sz="1200" dirty="0">
-                <a:solidFill>
-                  <a:srgbClr val="1C2833"/>
-                </a:solidFill>
-                <a:latin typeface="Arial" pitchFamily="34" charset="0"/>
-                <a:ea typeface="Arial" pitchFamily="34" charset="-122"/>
-                <a:cs typeface="Arial" pitchFamily="34" charset="-120"/>
-              </a:rPr>
-              <a:t> From </a:t>
-            </a:r>
-            <a:pPr algn="l" indent="0" marL="0">
-              <a:lnSpc>
-                <a:spcPts val="1620"/>
-              </a:lnSpc>
-              <a:spcAft>
-                <a:spcPts val="300"/>
-              </a:spcAft>
-              <a:buNone/>
-            </a:pPr>
-            <a:r>
-              <a:rPr lang="en-US" sz="1200" i="1" dirty="0">
-                <a:solidFill>
-                  <a:srgbClr val="1C2833"/>
-                </a:solidFill>
-                <a:latin typeface="Arial" pitchFamily="34" charset="0"/>
-                <a:ea typeface="Arial" pitchFamily="34" charset="-122"/>
-                <a:cs typeface="Arial" pitchFamily="34" charset="-120"/>
-              </a:rPr>
-              <a:t>Bhadragaṇita</a:t>
-            </a:r>
-            <a:pPr algn="l" indent="0" marL="0">
-              <a:lnSpc>
-                <a:spcPts val="1620"/>
-              </a:lnSpc>
-              <a:spcAft>
-                <a:spcPts val="300"/>
-              </a:spcAft>
-              <a:buNone/>
-            </a:pPr>
-            <a:r>
-              <a:rPr lang="en-US" sz="1200" dirty="0">
-                <a:solidFill>
-                  <a:srgbClr val="1C2833"/>
-                </a:solidFill>
-                <a:latin typeface="Arial" pitchFamily="34" charset="0"/>
-                <a:ea typeface="Arial" pitchFamily="34" charset="-122"/>
-                <a:cs typeface="Arial" pitchFamily="34" charset="-120"/>
-              </a:rPr>
-              <a:t>, paraphrased:</a:t>
-            </a:r>
-            <a:endParaRPr lang="en-US" sz="1200" dirty="0"/>
-          </a:p>
-        </p:txBody>
-      </p:sp>
-      <p:sp>
-        <p:nvSpPr>
-          <p:cNvPr id="14" name="Text 12"/>
-          <p:cNvSpPr/>
-          <p:nvPr/>
-        </p:nvSpPr>
-        <p:spPr>
-          <a:xfrm>
-            <a:off x="406301" y="7160270"/>
-            <a:ext cx="8498026" cy="639812"/>
-          </a:xfrm>
-          <a:prstGeom prst="rect">
-            <a:avLst/>
-          </a:prstGeom>
-          <a:noFill/>
-          <a:ln/>
-        </p:spPr>
-        <p:txBody>
-          <a:bodyPr wrap="square" lIns="0" tIns="0" rIns="0" bIns="0" rtlCol="0" anchor="t"/>
-          <a:lstStyle/>
-          <a:p>
-            <a:pPr algn="l" indent="0" marL="0">
-              <a:lnSpc>
-                <a:spcPts val="1680"/>
-              </a:lnSpc>
-              <a:spcBef>
-                <a:spcPts val="300"/>
-              </a:spcBef>
-              <a:spcAft>
-                <a:spcPts val="300"/>
-              </a:spcAft>
-              <a:buNone/>
-            </a:pPr>
-            <a:r>
-              <a:rPr lang="en-US" sz="1200" dirty="0">
-                <a:solidFill>
-                  <a:srgbClr val="1C2833"/>
-                </a:solidFill>
-                <a:latin typeface="Arial" pitchFamily="34" charset="0"/>
-                <a:ea typeface="Arial" pitchFamily="34" charset="-122"/>
-                <a:cs typeface="Arial" pitchFamily="34" charset="-120"/>
-              </a:rPr>
-              <a:t>&gt; "Magic squares of odd order are made by placing the first number in the top middle cell, and proceeding diagonally upward and rightward; if blocked, descend by one." (Nārāyaṇa Paṇḍita, </a:t>
-            </a:r>
-            <a:pPr algn="l" indent="0" marL="0">
-              <a:lnSpc>
-                <a:spcPts val="1680"/>
-              </a:lnSpc>
-              <a:spcBef>
-                <a:spcPts val="300"/>
-              </a:spcBef>
-              <a:spcAft>
-                <a:spcPts val="300"/>
-              </a:spcAft>
-              <a:buNone/>
-            </a:pPr>
-            <a:r>
-              <a:rPr lang="en-US" sz="1200" i="1" dirty="0">
-                <a:solidFill>
-                  <a:srgbClr val="1C2833"/>
-                </a:solidFill>
-                <a:latin typeface="Arial" pitchFamily="34" charset="0"/>
-                <a:ea typeface="Arial" pitchFamily="34" charset="-122"/>
-                <a:cs typeface="Arial" pitchFamily="34" charset="-120"/>
-              </a:rPr>
-              <a:t>Gaṇita-kaumudī</a:t>
-            </a:r>
-            <a:pPr algn="l" indent="0" marL="0">
-              <a:lnSpc>
-                <a:spcPts val="1680"/>
-              </a:lnSpc>
-              <a:spcBef>
-                <a:spcPts val="300"/>
-              </a:spcBef>
-              <a:spcAft>
-                <a:spcPts val="300"/>
-              </a:spcAft>
-              <a:buNone/>
-            </a:pPr>
-            <a:r>
-              <a:rPr lang="en-US" sz="1200" dirty="0">
-                <a:solidFill>
-                  <a:srgbClr val="1C2833"/>
-                </a:solidFill>
-                <a:latin typeface="Arial" pitchFamily="34" charset="0"/>
-                <a:ea typeface="Arial" pitchFamily="34" charset="-122"/>
-                <a:cs typeface="Arial" pitchFamily="34" charset="-120"/>
-              </a:rPr>
-              <a:t> Book 14, 1356 CE — paraphrased.)</a:t>
-            </a:r>
-            <a:endParaRPr lang="en-US" sz="1200" dirty="0"/>
-          </a:p>
-        </p:txBody>
-      </p:sp>
-      <p:sp>
-        <p:nvSpPr>
-          <p:cNvPr id="15" name="Text 13"/>
-          <p:cNvSpPr/>
-          <p:nvPr/>
-        </p:nvSpPr>
-        <p:spPr>
-          <a:xfrm>
-            <a:off x="406301" y="7876282"/>
-            <a:ext cx="8498026" cy="213271"/>
-          </a:xfrm>
-          <a:prstGeom prst="rect">
-            <a:avLst/>
-          </a:prstGeom>
-          <a:noFill/>
-          <a:ln/>
-        </p:spPr>
-        <p:txBody>
-          <a:bodyPr wrap="square" lIns="0" tIns="0" rIns="0" bIns="0" rtlCol="0" anchor="t"/>
-          <a:lstStyle/>
-          <a:p>
-            <a:pPr algn="l" indent="0" marL="0">
-              <a:lnSpc>
-                <a:spcPts val="1680"/>
-              </a:lnSpc>
-              <a:spcBef>
-                <a:spcPts val="300"/>
-              </a:spcBef>
-              <a:spcAft>
-                <a:spcPts val="300"/>
-              </a:spcAft>
-              <a:buNone/>
-            </a:pPr>
-            <a:r>
-              <a:rPr lang="en-US" sz="1200" dirty="0">
-                <a:solidFill>
-                  <a:srgbClr val="1C2833"/>
-                </a:solidFill>
-                <a:latin typeface="Arial" pitchFamily="34" charset="0"/>
-                <a:ea typeface="Arial" pitchFamily="34" charset="-122"/>
-                <a:cs typeface="Arial" pitchFamily="34" charset="-120"/>
-              </a:rPr>
-              <a:t>This is the rule you have been using. The original is in Sanskrit; this is a faithful paraphrase, not a quoted verse.</a:t>
-            </a:r>
-            <a:endParaRPr lang="en-US" sz="1200" dirty="0"/>
-          </a:p>
-        </p:txBody>
-      </p:sp>
-      <p:sp>
-        <p:nvSpPr>
-          <p:cNvPr id="16" name="Text 14"/>
-          <p:cNvSpPr/>
-          <p:nvPr/>
-        </p:nvSpPr>
-        <p:spPr>
-          <a:xfrm>
-            <a:off x="406301" y="8241953"/>
+            <a:off x="406301" y="4434929"/>
             <a:ext cx="8498026" cy="213271"/>
           </a:xfrm>
           <a:prstGeom prst="rect">
@@ -5797,7 +7346,7 @@
                 <a:ea typeface="Georgia" pitchFamily="34" charset="-122"/>
                 <a:cs typeface="Georgia" pitchFamily="34" charset="-120"/>
               </a:rPr>
-              <a:t>Activity (15 min) — Reflection paragraph</a:t>
+              <a:t>Core (20 min)</a:t>
             </a:r>
             <a:endParaRPr lang="en-US" sz="1800" dirty="0"/>
           </a:p>
@@ -5811,8 +7360,8 @@
         </p:nvSpPr>
         <p:spPr>
           <a:xfrm>
-            <a:off x="406301" y="870942"/>
-            <a:ext cx="8498026" cy="213271"/>
+            <a:off x="634901" y="883593"/>
+            <a:ext cx="8102798" cy="281880"/>
           </a:xfrm>
           <a:prstGeom prst="rect">
             <a:avLst/>
@@ -5824,13 +7373,31 @@
           <a:bodyPr wrap="square" lIns="0" tIns="0" rIns="0" bIns="0" rtlCol="0" anchor="t"/>
           <a:lstStyle/>
           <a:p>
-            <a:pPr algn="l" indent="0" marL="0">
-              <a:lnSpc>
-                <a:spcPts val="1680"/>
-              </a:lnSpc>
-              <a:spcBef>
-                <a:spcPts val="300"/>
-              </a:spcBef>
+            <a:pPr algn="l" marL="342900" indent="-342900">
+              <a:lnSpc>
+                <a:spcPts val="1620"/>
+              </a:lnSpc>
+              <a:spcAft>
+                <a:spcPts val="300"/>
+              </a:spcAft>
+              <a:buSzPct val="100000"/>
+              <a:buChar char="•"/>
+            </a:pPr>
+            <a:r>
+              <a:rPr lang="en-US" sz="1200" b="1" dirty="0">
+                <a:solidFill>
+                  <a:srgbClr val="1C2833"/>
+                </a:solidFill>
+                <a:latin typeface="Arial" pitchFamily="34" charset="0"/>
+                <a:ea typeface="Arial" pitchFamily="34" charset="-122"/>
+                <a:cs typeface="Arial" pitchFamily="34" charset="-120"/>
+              </a:rPr>
+              <a:t>Chronology.</a:t>
+            </a:r>
+            <a:pPr algn="l" indent="0" marL="0">
+              <a:lnSpc>
+                <a:spcPts val="1620"/>
+              </a:lnSpc>
               <a:spcAft>
                 <a:spcPts val="300"/>
               </a:spcAft>
@@ -5845,7 +7412,7 @@
                 <a:ea typeface="Arial" pitchFamily="34" charset="-122"/>
                 <a:cs typeface="Arial" pitchFamily="34" charset="-120"/>
               </a:rPr>
-              <a:t>– Each student writes 5–7 sentences in response to:</a:t>
+              <a:t> Build a simple timeline on the board:</a:t>
             </a:r>
             <a:endParaRPr lang="en-US" sz="1200" dirty="0"/>
           </a:p>
@@ -5859,8 +7426,8 @@
         </p:nvSpPr>
         <p:spPr>
           <a:xfrm>
-            <a:off x="406301" y="1160413"/>
-            <a:ext cx="8498026" cy="426541"/>
+            <a:off x="406301" y="1254323"/>
+            <a:ext cx="8498026" cy="213271"/>
           </a:xfrm>
           <a:prstGeom prst="rect">
             <a:avLst/>
@@ -5885,29 +7452,6 @@
               <a:buNone/>
             </a:pPr>
             <a:r>
-              <a:rPr lang="en-US" sz="1200" dirty="0">
-                <a:solidFill>
-                  <a:srgbClr val="1C2833"/>
-                </a:solidFill>
-                <a:latin typeface="Arial" pitchFamily="34" charset="0"/>
-                <a:ea typeface="Arial" pitchFamily="34" charset="-122"/>
-                <a:cs typeface="Arial" pitchFamily="34" charset="-120"/>
-              </a:rPr>
-              <a:t>&gt; </a:t>
-            </a:r>
-            <a:pPr algn="l" indent="0" marL="0">
-              <a:lnSpc>
-                <a:spcPts val="1680"/>
-              </a:lnSpc>
-              <a:spcBef>
-                <a:spcPts val="300"/>
-              </a:spcBef>
-              <a:spcAft>
-                <a:spcPts val="300"/>
-              </a:spcAft>
-              <a:buNone/>
-            </a:pPr>
-            <a:r>
               <a:rPr lang="en-US" sz="1200" i="1" dirty="0">
                 <a:solidFill>
                   <a:srgbClr val="1C2833"/>
@@ -5916,7 +7460,7 @@
                 <a:ea typeface="Arial" pitchFamily="34" charset="-122"/>
                 <a:cs typeface="Arial" pitchFamily="34" charset="-120"/>
               </a:rPr>
-              <a:t>"Nārāyaṇa Paṇḍita gave us a rule, not a magic square. Why is having a rule more valuable than having just one example? Use specific evidence from this module."</a:t>
+              <a:t>Each row: Period · Indian mathematics.</a:t>
             </a:r>
             <a:endParaRPr lang="en-US" sz="1200" dirty="0"/>
           </a:p>
@@ -5925,54 +7469,6 @@
       <p:sp>
         <p:nvSpPr>
           <p:cNvPr id="6" name="Text 4"/>
-          <p:cNvSpPr/>
-          <p:nvPr/>
-        </p:nvSpPr>
-        <p:spPr>
-          <a:xfrm>
-            <a:off x="406301" y="1663154"/>
-            <a:ext cx="8498026" cy="426541"/>
-          </a:xfrm>
-          <a:prstGeom prst="rect">
-            <a:avLst/>
-          </a:prstGeom>
-          <a:noFill/>
-          <a:ln/>
-        </p:spPr>
-        <p:txBody>
-          <a:bodyPr wrap="square" lIns="0" tIns="0" rIns="0" bIns="0" rtlCol="0" anchor="t"/>
-          <a:lstStyle/>
-          <a:p>
-            <a:pPr algn="l" indent="0" marL="0">
-              <a:lnSpc>
-                <a:spcPts val="1680"/>
-              </a:lnSpc>
-              <a:spcBef>
-                <a:spcPts val="300"/>
-              </a:spcBef>
-              <a:spcAft>
-                <a:spcPts val="300"/>
-              </a:spcAft>
-              <a:buNone/>
-            </a:pPr>
-            <a:r>
-              <a:rPr lang="en-US" sz="1200" dirty="0">
-                <a:solidFill>
-                  <a:srgbClr val="1C2833"/>
-                </a:solidFill>
-                <a:latin typeface="Arial" pitchFamily="34" charset="0"/>
-                <a:ea typeface="Arial" pitchFamily="34" charset="-122"/>
-                <a:cs typeface="Arial" pitchFamily="34" charset="-120"/>
-              </a:rPr>
-              <a:t>– Pairs swap and read each other's paragraphs. One quick comment each: "the part that landed" and "what I'd want more of."</a:t>
-            </a:r>
-            <a:endParaRPr lang="en-US" sz="1200" dirty="0"/>
-          </a:p>
-        </p:txBody>
-      </p:sp>
-      <p:sp>
-        <p:nvSpPr>
-          <p:cNvPr id="7" name="Text 5"/>
           <p:cNvSpPr/>
           <p:nvPr/>
         </p:nvSpPr>
@@ -6122,7 +7618,7 @@
                 <a:ea typeface="Georgia" pitchFamily="34" charset="-122"/>
                 <a:cs typeface="Georgia" pitchFamily="34" charset="-120"/>
               </a:rPr>
-              <a:t>Wrap-up (5 min)</a:t>
+              <a:t>Core (20 min) (cont.)</a:t>
             </a:r>
             <a:endParaRPr lang="en-US" sz="1800" dirty="0"/>
           </a:p>
@@ -6136,8 +7632,8 @@
         </p:nvSpPr>
         <p:spPr>
           <a:xfrm>
-            <a:off x="406301" y="870942"/>
-            <a:ext cx="8498026" cy="426541"/>
+            <a:off x="634901" y="883593"/>
+            <a:ext cx="8102798" cy="1500783"/>
           </a:xfrm>
           <a:prstGeom prst="rect">
             <a:avLst/>
@@ -6149,13 +7645,31 @@
           <a:bodyPr wrap="square" lIns="0" tIns="0" rIns="0" bIns="0" rtlCol="0" anchor="t"/>
           <a:lstStyle/>
           <a:p>
-            <a:pPr algn="l" indent="0" marL="0">
-              <a:lnSpc>
-                <a:spcPts val="1680"/>
-              </a:lnSpc>
-              <a:spcBef>
-                <a:spcPts val="300"/>
-              </a:spcBef>
+            <a:pPr algn="l" marL="342900" indent="-342900">
+              <a:lnSpc>
+                <a:spcPts val="1620"/>
+              </a:lnSpc>
+              <a:spcAft>
+                <a:spcPts val="300"/>
+              </a:spcAft>
+              <a:buSzPct val="100000"/>
+              <a:buChar char="•"/>
+            </a:pPr>
+            <a:r>
+              <a:rPr lang="en-US" sz="1200" b="1" dirty="0">
+                <a:solidFill>
+                  <a:srgbClr val="1C2833"/>
+                </a:solidFill>
+                <a:latin typeface="Arial" pitchFamily="34" charset="0"/>
+                <a:ea typeface="Arial" pitchFamily="34" charset="-122"/>
+                <a:cs typeface="Arial" pitchFamily="34" charset="-120"/>
+              </a:rPr>
+              <a:t>~500 BCE</a:t>
+            </a:r>
+            <a:pPr algn="l" indent="0" marL="0">
+              <a:lnSpc>
+                <a:spcPts val="1620"/>
+              </a:lnSpc>
               <a:spcAft>
                 <a:spcPts val="300"/>
               </a:spcAft>
@@ -6170,15 +7684,12 @@
                 <a:ea typeface="Arial" pitchFamily="34" charset="-122"/>
                 <a:cs typeface="Arial" pitchFamily="34" charset="-120"/>
               </a:rPr>
-              <a:t>– Two volunteer-read paragraphs (with permission). – Preview Day 8: </a:t>
-            </a:r>
-            <a:pPr algn="l" indent="0" marL="0">
-              <a:lnSpc>
-                <a:spcPts val="1680"/>
-              </a:lnSpc>
-              <a:spcBef>
-                <a:spcPts val="300"/>
-              </a:spcBef>
+              <a:t> — </a:t>
+            </a:r>
+            <a:pPr algn="l" indent="0" marL="0">
+              <a:lnSpc>
+                <a:spcPts val="1620"/>
+              </a:lnSpc>
               <a:spcAft>
                 <a:spcPts val="300"/>
               </a:spcAft>
@@ -6193,7 +7704,387 @@
                 <a:ea typeface="Arial" pitchFamily="34" charset="-122"/>
                 <a:cs typeface="Arial" pitchFamily="34" charset="-120"/>
               </a:rPr>
-              <a:t>"Tomorrow we go cross-cultural — China's Lo Shu and Europe's Dürer."</a:t>
+              <a:t>Śulba Sūtras</a:t>
+            </a:r>
+            <a:pPr algn="l" indent="0" marL="0">
+              <a:lnSpc>
+                <a:spcPts val="1620"/>
+              </a:lnSpc>
+              <a:spcAft>
+                <a:spcPts val="300"/>
+              </a:spcAft>
+              <a:buNone/>
+            </a:pPr>
+            <a:r>
+              <a:rPr lang="en-US" sz="1200" dirty="0">
+                <a:solidFill>
+                  <a:srgbClr val="1C2833"/>
+                </a:solidFill>
+                <a:latin typeface="Arial" pitchFamily="34" charset="0"/>
+                <a:ea typeface="Arial" pitchFamily="34" charset="-122"/>
+                <a:cs typeface="Arial" pitchFamily="34" charset="-120"/>
+              </a:rPr>
+              <a:t> — geometric ritual texts</a:t>
+            </a:r>
+            <a:endParaRPr lang="en-US" sz="1200" dirty="0"/>
+          </a:p>
+          <a:p>
+            <a:pPr algn="l" marL="342900" indent="-342900">
+              <a:lnSpc>
+                <a:spcPts val="1620"/>
+              </a:lnSpc>
+              <a:spcAft>
+                <a:spcPts val="300"/>
+              </a:spcAft>
+              <a:buSzPct val="100000"/>
+              <a:buChar char="•"/>
+            </a:pPr>
+            <a:r>
+              <a:rPr lang="en-US" sz="1200" b="1" dirty="0">
+                <a:solidFill>
+                  <a:srgbClr val="1C2833"/>
+                </a:solidFill>
+                <a:latin typeface="Arial" pitchFamily="34" charset="0"/>
+                <a:ea typeface="Arial" pitchFamily="34" charset="-122"/>
+                <a:cs typeface="Arial" pitchFamily="34" charset="-120"/>
+              </a:rPr>
+              <a:t>~500 CE</a:t>
+            </a:r>
+            <a:pPr algn="l" indent="0" marL="0">
+              <a:lnSpc>
+                <a:spcPts val="1620"/>
+              </a:lnSpc>
+              <a:spcAft>
+                <a:spcPts val="300"/>
+              </a:spcAft>
+              <a:buNone/>
+            </a:pPr>
+            <a:r>
+              <a:rPr lang="en-US" sz="1200" dirty="0">
+                <a:solidFill>
+                  <a:srgbClr val="1C2833"/>
+                </a:solidFill>
+                <a:latin typeface="Arial" pitchFamily="34" charset="0"/>
+                <a:ea typeface="Arial" pitchFamily="34" charset="-122"/>
+                <a:cs typeface="Arial" pitchFamily="34" charset="-120"/>
+              </a:rPr>
+              <a:t> — Āryabhaṭa (b. 476) — </a:t>
+            </a:r>
+            <a:pPr algn="l" indent="0" marL="0">
+              <a:lnSpc>
+                <a:spcPts val="1620"/>
+              </a:lnSpc>
+              <a:spcAft>
+                <a:spcPts val="300"/>
+              </a:spcAft>
+              <a:buNone/>
+            </a:pPr>
+            <a:r>
+              <a:rPr lang="en-US" sz="1200" i="1" dirty="0">
+                <a:solidFill>
+                  <a:srgbClr val="1C2833"/>
+                </a:solidFill>
+                <a:latin typeface="Arial" pitchFamily="34" charset="0"/>
+                <a:ea typeface="Arial" pitchFamily="34" charset="-122"/>
+                <a:cs typeface="Arial" pitchFamily="34" charset="-120"/>
+              </a:rPr>
+              <a:t>Āryabhaṭīya</a:t>
+            </a:r>
+            <a:endParaRPr lang="en-US" sz="1200" dirty="0"/>
+          </a:p>
+          <a:p>
+            <a:pPr algn="l" marL="342900" indent="-342900">
+              <a:lnSpc>
+                <a:spcPts val="1620"/>
+              </a:lnSpc>
+              <a:spcAft>
+                <a:spcPts val="300"/>
+              </a:spcAft>
+              <a:buSzPct val="100000"/>
+              <a:buChar char="•"/>
+            </a:pPr>
+            <a:r>
+              <a:rPr lang="en-US" sz="1200" b="1" dirty="0">
+                <a:solidFill>
+                  <a:srgbClr val="1C2833"/>
+                </a:solidFill>
+                <a:latin typeface="Arial" pitchFamily="34" charset="0"/>
+                <a:ea typeface="Arial" pitchFamily="34" charset="-122"/>
+                <a:cs typeface="Arial" pitchFamily="34" charset="-120"/>
+              </a:rPr>
+              <a:t>~600 CE</a:t>
+            </a:r>
+            <a:pPr algn="l" indent="0" marL="0">
+              <a:lnSpc>
+                <a:spcPts val="1620"/>
+              </a:lnSpc>
+              <a:spcAft>
+                <a:spcPts val="300"/>
+              </a:spcAft>
+              <a:buNone/>
+            </a:pPr>
+            <a:r>
+              <a:rPr lang="en-US" sz="1200" dirty="0">
+                <a:solidFill>
+                  <a:srgbClr val="1C2833"/>
+                </a:solidFill>
+                <a:latin typeface="Arial" pitchFamily="34" charset="0"/>
+                <a:ea typeface="Arial" pitchFamily="34" charset="-122"/>
+                <a:cs typeface="Arial" pitchFamily="34" charset="-120"/>
+              </a:rPr>
+              <a:t> — Brahmagupta — </a:t>
+            </a:r>
+            <a:pPr algn="l" indent="0" marL="0">
+              <a:lnSpc>
+                <a:spcPts val="1620"/>
+              </a:lnSpc>
+              <a:spcAft>
+                <a:spcPts val="300"/>
+              </a:spcAft>
+              <a:buNone/>
+            </a:pPr>
+            <a:r>
+              <a:rPr lang="en-US" sz="1200" i="1" dirty="0">
+                <a:solidFill>
+                  <a:srgbClr val="1C2833"/>
+                </a:solidFill>
+                <a:latin typeface="Arial" pitchFamily="34" charset="0"/>
+                <a:ea typeface="Arial" pitchFamily="34" charset="-122"/>
+                <a:cs typeface="Arial" pitchFamily="34" charset="-120"/>
+              </a:rPr>
+              <a:t>Brāhmasphuṭasiddhānta</a:t>
+            </a:r>
+            <a:endParaRPr lang="en-US" sz="1200" dirty="0"/>
+          </a:p>
+          <a:p>
+            <a:pPr algn="l" marL="342900" indent="-342900">
+              <a:lnSpc>
+                <a:spcPts val="1620"/>
+              </a:lnSpc>
+              <a:spcAft>
+                <a:spcPts val="300"/>
+              </a:spcAft>
+              <a:buSzPct val="100000"/>
+              <a:buChar char="•"/>
+            </a:pPr>
+            <a:r>
+              <a:rPr lang="en-US" sz="1200" b="1" dirty="0">
+                <a:solidFill>
+                  <a:srgbClr val="1C2833"/>
+                </a:solidFill>
+                <a:latin typeface="Arial" pitchFamily="34" charset="0"/>
+                <a:ea typeface="Arial" pitchFamily="34" charset="-122"/>
+                <a:cs typeface="Arial" pitchFamily="34" charset="-120"/>
+              </a:rPr>
+              <a:t>~1100 CE</a:t>
+            </a:r>
+            <a:pPr algn="l" indent="0" marL="0">
+              <a:lnSpc>
+                <a:spcPts val="1620"/>
+              </a:lnSpc>
+              <a:spcAft>
+                <a:spcPts val="300"/>
+              </a:spcAft>
+              <a:buNone/>
+            </a:pPr>
+            <a:r>
+              <a:rPr lang="en-US" sz="1200" dirty="0">
+                <a:solidFill>
+                  <a:srgbClr val="1C2833"/>
+                </a:solidFill>
+                <a:latin typeface="Arial" pitchFamily="34" charset="0"/>
+                <a:ea typeface="Arial" pitchFamily="34" charset="-122"/>
+                <a:cs typeface="Arial" pitchFamily="34" charset="-120"/>
+              </a:rPr>
+              <a:t> — Bhāskara II — </a:t>
+            </a:r>
+            <a:pPr algn="l" indent="0" marL="0">
+              <a:lnSpc>
+                <a:spcPts val="1620"/>
+              </a:lnSpc>
+              <a:spcAft>
+                <a:spcPts val="300"/>
+              </a:spcAft>
+              <a:buNone/>
+            </a:pPr>
+            <a:r>
+              <a:rPr lang="en-US" sz="1200" i="1" dirty="0">
+                <a:solidFill>
+                  <a:srgbClr val="1C2833"/>
+                </a:solidFill>
+                <a:latin typeface="Arial" pitchFamily="34" charset="0"/>
+                <a:ea typeface="Arial" pitchFamily="34" charset="-122"/>
+                <a:cs typeface="Arial" pitchFamily="34" charset="-120"/>
+              </a:rPr>
+              <a:t>Līlāvatī</a:t>
+            </a:r>
+            <a:pPr algn="l" indent="0" marL="0">
+              <a:lnSpc>
+                <a:spcPts val="1620"/>
+              </a:lnSpc>
+              <a:spcAft>
+                <a:spcPts val="300"/>
+              </a:spcAft>
+              <a:buNone/>
+            </a:pPr>
+            <a:r>
+              <a:rPr lang="en-US" sz="1200" dirty="0">
+                <a:solidFill>
+                  <a:srgbClr val="1C2833"/>
+                </a:solidFill>
+                <a:latin typeface="Arial" pitchFamily="34" charset="0"/>
+                <a:ea typeface="Arial" pitchFamily="34" charset="-122"/>
+                <a:cs typeface="Arial" pitchFamily="34" charset="-120"/>
+              </a:rPr>
+              <a:t>, </a:t>
+            </a:r>
+            <a:pPr algn="l" indent="0" marL="0">
+              <a:lnSpc>
+                <a:spcPts val="1620"/>
+              </a:lnSpc>
+              <a:spcAft>
+                <a:spcPts val="300"/>
+              </a:spcAft>
+              <a:buNone/>
+            </a:pPr>
+            <a:r>
+              <a:rPr lang="en-US" sz="1200" i="1" dirty="0">
+                <a:solidFill>
+                  <a:srgbClr val="1C2833"/>
+                </a:solidFill>
+                <a:latin typeface="Arial" pitchFamily="34" charset="0"/>
+                <a:ea typeface="Arial" pitchFamily="34" charset="-122"/>
+                <a:cs typeface="Arial" pitchFamily="34" charset="-120"/>
+              </a:rPr>
+              <a:t>Bījagaṇita</a:t>
+            </a:r>
+            <a:endParaRPr lang="en-US" sz="1200" dirty="0"/>
+          </a:p>
+          <a:p>
+            <a:pPr algn="l" marL="342900" indent="-342900">
+              <a:lnSpc>
+                <a:spcPts val="1620"/>
+              </a:lnSpc>
+              <a:spcAft>
+                <a:spcPts val="300"/>
+              </a:spcAft>
+              <a:buSzPct val="100000"/>
+              <a:buChar char="•"/>
+            </a:pPr>
+            <a:r>
+              <a:rPr lang="en-US" sz="1200" b="1" dirty="0">
+                <a:solidFill>
+                  <a:srgbClr val="1C2833"/>
+                </a:solidFill>
+                <a:latin typeface="Arial" pitchFamily="34" charset="0"/>
+                <a:ea typeface="Arial" pitchFamily="34" charset="-122"/>
+                <a:cs typeface="Arial" pitchFamily="34" charset="-120"/>
+              </a:rPr>
+              <a:t>1356 CE</a:t>
+            </a:r>
+            <a:pPr algn="l" indent="0" marL="0">
+              <a:lnSpc>
+                <a:spcPts val="1620"/>
+              </a:lnSpc>
+              <a:spcAft>
+                <a:spcPts val="300"/>
+              </a:spcAft>
+              <a:buNone/>
+            </a:pPr>
+            <a:r>
+              <a:rPr lang="en-US" sz="1200" dirty="0">
+                <a:solidFill>
+                  <a:srgbClr val="1C2833"/>
+                </a:solidFill>
+                <a:latin typeface="Arial" pitchFamily="34" charset="0"/>
+                <a:ea typeface="Arial" pitchFamily="34" charset="-122"/>
+                <a:cs typeface="Arial" pitchFamily="34" charset="-120"/>
+              </a:rPr>
+              <a:t> — *</a:t>
+            </a:r>
+            <a:pPr algn="l" indent="0" marL="0">
+              <a:lnSpc>
+                <a:spcPts val="1620"/>
+              </a:lnSpc>
+              <a:spcAft>
+                <a:spcPts val="300"/>
+              </a:spcAft>
+              <a:buNone/>
+            </a:pPr>
+            <a:r>
+              <a:rPr lang="en-US" sz="1200" i="1" dirty="0">
+                <a:solidFill>
+                  <a:srgbClr val="1C2833"/>
+                </a:solidFill>
+                <a:latin typeface="Arial" pitchFamily="34" charset="0"/>
+                <a:ea typeface="Arial" pitchFamily="34" charset="-122"/>
+                <a:cs typeface="Arial" pitchFamily="34" charset="-120"/>
+              </a:rPr>
+              <a:t>Nārāyaṇa Paṇḍita —</a:t>
+            </a:r>
+            <a:pPr algn="l" indent="0" marL="0">
+              <a:lnSpc>
+                <a:spcPts val="1620"/>
+              </a:lnSpc>
+              <a:spcAft>
+                <a:spcPts val="300"/>
+              </a:spcAft>
+              <a:buNone/>
+            </a:pPr>
+            <a:r>
+              <a:rPr lang="en-US" sz="1200" dirty="0">
+                <a:solidFill>
+                  <a:srgbClr val="1C2833"/>
+                </a:solidFill>
+                <a:latin typeface="Arial" pitchFamily="34" charset="0"/>
+                <a:ea typeface="Arial" pitchFamily="34" charset="-122"/>
+                <a:cs typeface="Arial" pitchFamily="34" charset="-120"/>
+              </a:rPr>
+              <a:t>Gaṇita-kaumudī***</a:t>
+            </a:r>
+            <a:endParaRPr lang="en-US" sz="1200" dirty="0"/>
+          </a:p>
+          <a:p>
+            <a:pPr algn="l" marL="342900" indent="-342900">
+              <a:lnSpc>
+                <a:spcPts val="1620"/>
+              </a:lnSpc>
+              <a:spcAft>
+                <a:spcPts val="300"/>
+              </a:spcAft>
+              <a:buSzPct val="100000"/>
+              <a:buChar char="•"/>
+            </a:pPr>
+            <a:r>
+              <a:rPr lang="en-US" sz="1200" b="1" dirty="0">
+                <a:solidFill>
+                  <a:srgbClr val="1C2833"/>
+                </a:solidFill>
+                <a:latin typeface="Arial" pitchFamily="34" charset="0"/>
+                <a:ea typeface="Arial" pitchFamily="34" charset="-122"/>
+                <a:cs typeface="Arial" pitchFamily="34" charset="-120"/>
+              </a:rPr>
+              <a:t>~1400 CE</a:t>
+            </a:r>
+            <a:pPr algn="l" indent="0" marL="0">
+              <a:lnSpc>
+                <a:spcPts val="1620"/>
+              </a:lnSpc>
+              <a:spcAft>
+                <a:spcPts val="300"/>
+              </a:spcAft>
+              <a:buNone/>
+            </a:pPr>
+            <a:r>
+              <a:rPr lang="en-US" sz="1200" dirty="0">
+                <a:solidFill>
+                  <a:srgbClr val="1C2833"/>
+                </a:solidFill>
+                <a:latin typeface="Arial" pitchFamily="34" charset="0"/>
+                <a:ea typeface="Arial" pitchFamily="34" charset="-122"/>
+                <a:cs typeface="Arial" pitchFamily="34" charset="-120"/>
+              </a:rPr>
+              <a:t> — Mādhava (Kerala) — early infinite series</a:t>
             </a:r>
             <a:endParaRPr lang="en-US" sz="1200" dirty="0"/>
           </a:p>
@@ -6351,7 +8242,7 @@
                 <a:ea typeface="Georgia" pitchFamily="34" charset="-122"/>
                 <a:cs typeface="Georgia" pitchFamily="34" charset="-120"/>
               </a:rPr>
-              <a:t>Homework</a:t>
+              <a:t>Core (20 min) (cont.)</a:t>
             </a:r>
             <a:endParaRPr lang="en-US" sz="1800" dirty="0"/>
           </a:p>
@@ -6391,6 +8282,81 @@
               <a:buNone/>
             </a:pPr>
             <a:r>
+              <a:rPr lang="en-US" sz="1200" i="1" dirty="0">
+                <a:solidFill>
+                  <a:srgbClr val="1C2833"/>
+                </a:solidFill>
+                <a:latin typeface="Arial" pitchFamily="34" charset="0"/>
+                <a:ea typeface="Arial" pitchFamily="34" charset="-122"/>
+                <a:cs typeface="Arial" pitchFamily="34" charset="-120"/>
+              </a:rPr>
+              <a:t>"Nārāyaṇa wrote in the 14th century — relatively 'late' in the medieval Indian mathematical tradition, but he produced one of the most comprehensive single works."</a:t>
+            </a:r>
+            <a:endParaRPr lang="en-US" sz="1200" dirty="0"/>
+          </a:p>
+        </p:txBody>
+      </p:sp>
+      <p:sp>
+        <p:nvSpPr>
+          <p:cNvPr id="5" name="Text 3"/>
+          <p:cNvSpPr/>
+          <p:nvPr/>
+        </p:nvSpPr>
+        <p:spPr>
+          <a:xfrm>
+            <a:off x="634901" y="1386334"/>
+            <a:ext cx="8102798" cy="281880"/>
+          </a:xfrm>
+          <a:prstGeom prst="rect">
+            <a:avLst/>
+          </a:prstGeom>
+          <a:noFill/>
+          <a:ln/>
+        </p:spPr>
+        <p:txBody>
+          <a:bodyPr wrap="square" lIns="0" tIns="0" rIns="0" bIns="0" rtlCol="0" anchor="t"/>
+          <a:lstStyle/>
+          <a:p>
+            <a:pPr algn="l" marL="342900" indent="-342900">
+              <a:lnSpc>
+                <a:spcPts val="1620"/>
+              </a:lnSpc>
+              <a:spcAft>
+                <a:spcPts val="300"/>
+              </a:spcAft>
+              <a:buSzPct val="100000"/>
+              <a:buChar char="•"/>
+            </a:pPr>
+            <a:pPr algn="l" indent="0" marL="0">
+              <a:lnSpc>
+                <a:spcPts val="1620"/>
+              </a:lnSpc>
+              <a:spcAft>
+                <a:spcPts val="300"/>
+              </a:spcAft>
+              <a:buNone/>
+            </a:pPr>
+            <a:r>
+              <a:rPr lang="en-US" sz="1200" i="1" dirty="0">
+                <a:solidFill>
+                  <a:srgbClr val="1C2833"/>
+                </a:solidFill>
+                <a:latin typeface="Arial" pitchFamily="34" charset="0"/>
+                <a:ea typeface="Arial" pitchFamily="34" charset="-122"/>
+                <a:cs typeface="Arial" pitchFamily="34" charset="-120"/>
+              </a:rPr>
+              <a:t>What is in the</a:t>
+            </a:r>
+            <a:pPr algn="l" indent="0" marL="0">
+              <a:lnSpc>
+                <a:spcPts val="1620"/>
+              </a:lnSpc>
+              <a:spcAft>
+                <a:spcPts val="300"/>
+              </a:spcAft>
+              <a:buNone/>
+            </a:pPr>
+            <a:r>
               <a:rPr lang="en-US" sz="1200" dirty="0">
                 <a:solidFill>
                   <a:srgbClr val="1C2833"/>
@@ -6399,7 +8365,67 @@
                 <a:ea typeface="Arial" pitchFamily="34" charset="-122"/>
                 <a:cs typeface="Arial" pitchFamily="34" charset="-120"/>
               </a:rPr>
-              <a:t>– Polish your reflection paragraph from class. Add one more specific example (e.g. "I used the rule today to construct a 7×7 square in under 5 minutes; without the rule I would have been guessing all night.").</a:t>
+              <a:t>Gaṇita-kaumudī</a:t>
+            </a:r>
+            <a:pPr algn="l" indent="0" marL="0">
+              <a:lnSpc>
+                <a:spcPts val="1620"/>
+              </a:lnSpc>
+              <a:spcAft>
+                <a:spcPts val="300"/>
+              </a:spcAft>
+              <a:buNone/>
+            </a:pPr>
+            <a:r>
+              <a:rPr lang="en-US" sz="1200" i="1" dirty="0">
+                <a:solidFill>
+                  <a:srgbClr val="1C2833"/>
+                </a:solidFill>
+                <a:latin typeface="Arial" pitchFamily="34" charset="0"/>
+                <a:ea typeface="Arial" pitchFamily="34" charset="-122"/>
+                <a:cs typeface="Arial" pitchFamily="34" charset="-120"/>
+              </a:rPr>
+              <a:t>?</a:t>
+            </a:r>
+            <a:pPr algn="l" indent="0" marL="0">
+              <a:lnSpc>
+                <a:spcPts val="1620"/>
+              </a:lnSpc>
+              <a:spcAft>
+                <a:spcPts val="300"/>
+              </a:spcAft>
+              <a:buNone/>
+            </a:pPr>
+            <a:r>
+              <a:rPr lang="en-US" sz="1200" i="1" dirty="0">
+                <a:solidFill>
+                  <a:srgbClr val="1C2833"/>
+                </a:solidFill>
+                <a:latin typeface="Arial" pitchFamily="34" charset="0"/>
+                <a:ea typeface="Arial" pitchFamily="34" charset="-122"/>
+                <a:cs typeface="Arial" pitchFamily="34" charset="-120"/>
+              </a:rPr>
+              <a:t> Fourteen books (</a:t>
+            </a:r>
+            <a:pPr algn="l" indent="0" marL="0">
+              <a:lnSpc>
+                <a:spcPts val="1620"/>
+              </a:lnSpc>
+              <a:spcAft>
+                <a:spcPts val="300"/>
+              </a:spcAft>
+              <a:buNone/>
+            </a:pPr>
+            <a:r>
+              <a:rPr lang="en-US" sz="1200" dirty="0">
+                <a:solidFill>
+                  <a:srgbClr val="1C2833"/>
+                </a:solidFill>
+                <a:latin typeface="Arial" pitchFamily="34" charset="0"/>
+                <a:ea typeface="Arial" pitchFamily="34" charset="-122"/>
+                <a:cs typeface="Arial" pitchFamily="34" charset="-120"/>
+              </a:rPr>
+              <a:t>vyavahāras*):</a:t>
             </a:r>
             <a:endParaRPr lang="en-US" sz="1200" dirty="0"/>
           </a:p>
@@ -6407,7 +8433,7 @@
       </p:sp>
       <p:sp>
         <p:nvSpPr>
-          <p:cNvPr id="5" name="Text 3"/>
+          <p:cNvPr id="6" name="Text 4"/>
           <p:cNvSpPr/>
           <p:nvPr/>
         </p:nvSpPr>
